--- a/public/downloads/US-114050-Principles-of-Business.pptx
+++ b/public/downloads/US-114050-Principles-of-Business.pptx
@@ -23,9 +23,10 @@
     <p:sldId id="271" r:id="rId17"/>
     <p:sldId id="272" r:id="rId18"/>
     <p:sldId id="273" r:id="rId19"/>
+    <p:sldId id="274" r:id="rId20"/>
   </p:sldIdLst>
   <p:notesMasterIdLst>
-    <p:notesMasterId r:id="rId20"/>
+    <p:notesMasterId r:id="rId21"/>
   </p:notesMasterIdLst>
   <p:sldSz cx="12188952" cy="6858000"/>
   <p:notesSz cx="6858000" cy="12188952"/>
@@ -1335,6 +1336,94 @@
             <a:fld id="{F7021451-1387-4CA6-816F-3879F97B5CBC}" type="slidenum">
               <a:rPr lang="en-US"/>
               <a:t>18</a:t>
+            </a:fld>
+            <a:endParaRPr lang="en-US"/>
+          </a:p>
+        </p:txBody>
+      </p:sp>
+    </p:spTree>
+    <p:extLst>
+      <p:ext uri="{BB962C8B-B14F-4D97-AF65-F5344CB8AC3E}">
+        <p14:creationId xmlns:p14="http://schemas.microsoft.com/office/powerpoint/2010/main" val="1024086991"/>
+      </p:ext>
+    </p:extLst>
+  </p:cSld>
+  <p:clrMapOvr>
+    <a:masterClrMapping/>
+  </p:clrMapOvr>
+</p:notes>
+</file>
+
+<file path=ppt/notesSlides/notesSlide19.xml><?xml version="1.0" encoding="utf-8"?>
+<p:notes xmlns:a="http://schemas.openxmlformats.org/drawingml/2006/main" xmlns:r="http://schemas.openxmlformats.org/officeDocument/2006/relationships" xmlns:p="http://schemas.openxmlformats.org/presentationml/2006/main">
+  <p:cSld>
+    <p:spTree>
+      <p:nvGrpSpPr>
+        <p:cNvPr id="1" name=""/>
+        <p:cNvGrpSpPr/>
+        <p:nvPr/>
+      </p:nvGrpSpPr>
+      <p:grpSpPr>
+        <a:xfrm>
+          <a:off x="0" y="0"/>
+          <a:ext cx="0" cy="0"/>
+          <a:chOff x="0" y="0"/>
+          <a:chExt cx="0" cy="0"/>
+        </a:xfrm>
+      </p:grpSpPr>
+      <p:sp>
+        <p:nvSpPr>
+          <p:cNvPr id="2" name="Slide Image Placeholder 1"/>
+          <p:cNvSpPr>
+            <a:spLocks noGrp="1" noRot="1" noChangeAspect="1"/>
+          </p:cNvSpPr>
+          <p:nvPr>
+            <p:ph type="sldImg"/>
+          </p:nvPr>
+        </p:nvSpPr>
+        <p:spPr/>
+      </p:sp>
+      <p:sp>
+        <p:nvSpPr>
+          <p:cNvPr id="3" name="Notes Placeholder 2"/>
+          <p:cNvSpPr>
+            <a:spLocks noGrp="1"/>
+          </p:cNvSpPr>
+          <p:nvPr>
+            <p:ph type="body" idx="1"/>
+          </p:nvPr>
+        </p:nvSpPr>
+        <p:spPr/>
+        <p:txBody>
+          <a:bodyPr/>
+          <a:lstStyle/>
+          <a:p>
+            <a:r>
+              <a:rPr lang="en-US" dirty="0"/>
+              <a:t/>
+            </a:r>
+            <a:endParaRPr lang="en-US" dirty="0"/>
+          </a:p>
+        </p:txBody>
+      </p:sp>
+      <p:sp>
+        <p:nvSpPr>
+          <p:cNvPr id="4" name="Slide Number Placeholder 3"/>
+          <p:cNvSpPr>
+            <a:spLocks noGrp="1"/>
+          </p:cNvSpPr>
+          <p:nvPr>
+            <p:ph type="sldNum" sz="quarter" idx="10"/>
+          </p:nvPr>
+        </p:nvSpPr>
+        <p:spPr/>
+        <p:txBody>
+          <a:bodyPr/>
+          <a:lstStyle/>
+          <a:p>
+            <a:fld id="{F7021451-1387-4CA6-816F-3879F97B5CBC}" type="slidenum">
+              <a:rPr lang="en-US"/>
+              <a:t>19</a:t>
             </a:fld>
             <a:endParaRPr lang="en-US"/>
           </a:p>
@@ -2416,8 +2505,8 @@
         </p:nvSpPr>
         <p:spPr>
           <a:xfrm>
-            <a:off x="502920" y="1143000"/>
-            <a:ext cx="4114800" cy="475488"/>
+            <a:off x="502920" y="1005840"/>
+            <a:ext cx="5394960" cy="566928"/>
           </a:xfrm>
           <a:prstGeom prst="roundRect">
             <a:avLst>
@@ -2438,8 +2527,8 @@
         </p:nvSpPr>
         <p:spPr>
           <a:xfrm>
-            <a:off x="502920" y="1143000"/>
-            <a:ext cx="4114800" cy="475488"/>
+            <a:off x="502920" y="1005840"/>
+            <a:ext cx="5394960" cy="566928"/>
           </a:xfrm>
           <a:prstGeom prst="rect">
             <a:avLst/>
@@ -2455,7 +2544,7 @@
               <a:buNone/>
             </a:pPr>
             <a:r>
-              <a:rPr lang="en-US" sz="1200" b="1" spc="100" kern="0" dirty="0">
+              <a:rPr lang="en-US" sz="1800" b="1" spc="100" kern="0" dirty="0">
                 <a:solidFill>
                   <a:srgbClr val="FFFFFF"/>
                 </a:solidFill>
@@ -2465,7 +2554,7 @@
               </a:rPr>
               <a:t>US 114050 · NQF LEVEL 5 · 4 CREDITS</a:t>
             </a:r>
-            <a:endParaRPr lang="en-US" sz="1200" dirty="0"/>
+            <a:endParaRPr lang="en-US" sz="1800" dirty="0"/>
           </a:p>
         </p:txBody>
       </p:sp>
@@ -2477,8 +2566,8 @@
         </p:nvSpPr>
         <p:spPr>
           <a:xfrm>
-            <a:off x="502920" y="1783080"/>
-            <a:ext cx="9875520" cy="1737360"/>
+            <a:off x="502920" y="1737360"/>
+            <a:ext cx="9875520" cy="1691640"/>
           </a:xfrm>
           <a:prstGeom prst="rect">
             <a:avLst/>
@@ -2516,8 +2605,8 @@
         </p:nvSpPr>
         <p:spPr>
           <a:xfrm>
-            <a:off x="502920" y="3520440"/>
-            <a:ext cx="8686800" cy="548640"/>
+            <a:off x="502920" y="3474720"/>
+            <a:ext cx="8869680" cy="685800"/>
           </a:xfrm>
           <a:prstGeom prst="rect">
             <a:avLst/>
@@ -2530,6 +2619,9 @@
           <a:lstStyle/>
           <a:p>
             <a:pPr indent="0" marL="0">
+              <a:lnSpc>
+                <a:spcPct val="115000"/>
+              </a:lnSpc>
               <a:buNone/>
             </a:pPr>
             <a:r>
@@ -2585,7 +2677,7 @@
         </p:nvSpPr>
         <p:spPr>
           <a:xfrm>
-            <a:off x="502920" y="4160520"/>
+            <a:off x="502920" y="4224528"/>
             <a:ext cx="11183112" cy="0"/>
           </a:xfrm>
           <a:prstGeom prst="line">
@@ -2608,8 +2700,8 @@
         </p:nvSpPr>
         <p:spPr>
           <a:xfrm>
-            <a:off x="502920" y="4389120"/>
-            <a:ext cx="2612898" cy="274320"/>
+            <a:off x="502920" y="4407408"/>
+            <a:ext cx="2612898" cy="329184"/>
           </a:xfrm>
           <a:prstGeom prst="rect">
             <a:avLst/>
@@ -2625,7 +2717,7 @@
               <a:buNone/>
             </a:pPr>
             <a:r>
-              <a:rPr lang="en-US" sz="1150" b="1" spc="200" kern="0" dirty="0">
+              <a:rPr lang="en-US" sz="1800" b="1" spc="100" kern="0" dirty="0">
                 <a:solidFill>
                   <a:srgbClr val="0F6CBD"/>
                 </a:solidFill>
@@ -2635,7 +2727,7 @@
               </a:rPr>
               <a:t>TIME</a:t>
             </a:r>
-            <a:endParaRPr lang="en-US" sz="1150" dirty="0"/>
+            <a:endParaRPr lang="en-US" sz="1800" dirty="0"/>
           </a:p>
         </p:txBody>
       </p:sp>
@@ -2647,8 +2739,8 @@
         </p:nvSpPr>
         <p:spPr>
           <a:xfrm>
-            <a:off x="502920" y="4681728"/>
-            <a:ext cx="2612898" cy="548640"/>
+            <a:off x="502920" y="4754880"/>
+            <a:ext cx="2612898" cy="914400"/>
           </a:xfrm>
           <a:prstGeom prst="rect">
             <a:avLst/>
@@ -2661,10 +2753,13 @@
           <a:lstStyle/>
           <a:p>
             <a:pPr indent="0" marL="0">
-              <a:buNone/>
-            </a:pPr>
-            <a:r>
-              <a:rPr lang="en-US" sz="1400" dirty="0">
+              <a:lnSpc>
+                <a:spcPct val="110000"/>
+              </a:lnSpc>
+              <a:buNone/>
+            </a:pPr>
+            <a:r>
+              <a:rPr lang="en-US" sz="1800" dirty="0">
                 <a:solidFill>
                   <a:srgbClr val="002050"/>
                 </a:solidFill>
@@ -2674,7 +2769,7 @@
               </a:rPr>
               <a:t>90 minutes · Self &amp; Group</a:t>
             </a:r>
-            <a:endParaRPr lang="en-US" sz="1400" dirty="0"/>
+            <a:endParaRPr lang="en-US" sz="1800" dirty="0"/>
           </a:p>
         </p:txBody>
       </p:sp>
@@ -2686,8 +2781,8 @@
         </p:nvSpPr>
         <p:spPr>
           <a:xfrm>
-            <a:off x="3298698" y="4389120"/>
-            <a:ext cx="2612898" cy="274320"/>
+            <a:off x="3298698" y="4407408"/>
+            <a:ext cx="2612898" cy="329184"/>
           </a:xfrm>
           <a:prstGeom prst="rect">
             <a:avLst/>
@@ -2703,7 +2798,7 @@
               <a:buNone/>
             </a:pPr>
             <a:r>
-              <a:rPr lang="en-US" sz="1150" b="1" spc="200" kern="0" dirty="0">
+              <a:rPr lang="en-US" sz="1800" b="1" spc="100" kern="0" dirty="0">
                 <a:solidFill>
                   <a:srgbClr val="0F6CBD"/>
                 </a:solidFill>
@@ -2713,7 +2808,7 @@
               </a:rPr>
               <a:t>SESSION</a:t>
             </a:r>
-            <a:endParaRPr lang="en-US" sz="1150" dirty="0"/>
+            <a:endParaRPr lang="en-US" sz="1800" dirty="0"/>
           </a:p>
         </p:txBody>
       </p:sp>
@@ -2725,8 +2820,8 @@
         </p:nvSpPr>
         <p:spPr>
           <a:xfrm>
-            <a:off x="3298698" y="4681728"/>
-            <a:ext cx="2612898" cy="548640"/>
+            <a:off x="3298698" y="4754880"/>
+            <a:ext cx="2612898" cy="914400"/>
           </a:xfrm>
           <a:prstGeom prst="rect">
             <a:avLst/>
@@ -2739,10 +2834,13 @@
           <a:lstStyle/>
           <a:p>
             <a:pPr indent="0" marL="0">
-              <a:buNone/>
-            </a:pPr>
-            <a:r>
-              <a:rPr lang="en-US" sz="1400" dirty="0">
+              <a:lnSpc>
+                <a:spcPct val="110000"/>
+              </a:lnSpc>
+              <a:buNone/>
+            </a:pPr>
+            <a:r>
+              <a:rPr lang="en-US" sz="1800" dirty="0">
                 <a:solidFill>
                   <a:srgbClr val="002050"/>
                 </a:solidFill>
@@ -2752,7 +2850,7 @@
               </a:rPr>
               <a:t>Friday, 21 Aug 2026 · 09h00 – 14h00</a:t>
             </a:r>
-            <a:endParaRPr lang="en-US" sz="1400" dirty="0"/>
+            <a:endParaRPr lang="en-US" sz="1800" dirty="0"/>
           </a:p>
         </p:txBody>
       </p:sp>
@@ -2764,8 +2862,8 @@
         </p:nvSpPr>
         <p:spPr>
           <a:xfrm>
-            <a:off x="6094476" y="4389120"/>
-            <a:ext cx="2612898" cy="274320"/>
+            <a:off x="6094476" y="4407408"/>
+            <a:ext cx="2612898" cy="329184"/>
           </a:xfrm>
           <a:prstGeom prst="rect">
             <a:avLst/>
@@ -2781,7 +2879,7 @@
               <a:buNone/>
             </a:pPr>
             <a:r>
-              <a:rPr lang="en-US" sz="1150" b="1" spc="200" kern="0" dirty="0">
+              <a:rPr lang="en-US" sz="1800" b="1" spc="100" kern="0" dirty="0">
                 <a:solidFill>
                   <a:srgbClr val="0F6CBD"/>
                 </a:solidFill>
@@ -2791,7 +2889,7 @@
               </a:rPr>
               <a:t>MODULE</a:t>
             </a:r>
-            <a:endParaRPr lang="en-US" sz="1150" dirty="0"/>
+            <a:endParaRPr lang="en-US" sz="1800" dirty="0"/>
           </a:p>
         </p:txBody>
       </p:sp>
@@ -2803,8 +2901,8 @@
         </p:nvSpPr>
         <p:spPr>
           <a:xfrm>
-            <a:off x="6094476" y="4681728"/>
-            <a:ext cx="2612898" cy="548640"/>
+            <a:off x="6094476" y="4754880"/>
+            <a:ext cx="2612898" cy="914400"/>
           </a:xfrm>
           <a:prstGeom prst="rect">
             <a:avLst/>
@@ -2817,10 +2915,13 @@
           <a:lstStyle/>
           <a:p>
             <a:pPr indent="0" marL="0">
-              <a:buNone/>
-            </a:pPr>
-            <a:r>
-              <a:rPr lang="en-US" sz="1400" dirty="0">
+              <a:lnSpc>
+                <a:spcPct val="110000"/>
+              </a:lnSpc>
+              <a:buNone/>
+            </a:pPr>
+            <a:r>
+              <a:rPr lang="en-US" sz="1800" dirty="0">
                 <a:solidFill>
                   <a:srgbClr val="002050"/>
                 </a:solidFill>
@@ -2830,7 +2931,7 @@
               </a:rPr>
               <a:t>Module 1 · Professional Team Development</a:t>
             </a:r>
-            <a:endParaRPr lang="en-US" sz="1400" dirty="0"/>
+            <a:endParaRPr lang="en-US" sz="1800" dirty="0"/>
           </a:p>
         </p:txBody>
       </p:sp>
@@ -2842,8 +2943,8 @@
         </p:nvSpPr>
         <p:spPr>
           <a:xfrm>
-            <a:off x="8890254" y="4389120"/>
-            <a:ext cx="2612898" cy="274320"/>
+            <a:off x="8890254" y="4407408"/>
+            <a:ext cx="2612898" cy="329184"/>
           </a:xfrm>
           <a:prstGeom prst="rect">
             <a:avLst/>
@@ -2859,7 +2960,7 @@
               <a:buNone/>
             </a:pPr>
             <a:r>
-              <a:rPr lang="en-US" sz="1150" b="1" spc="200" kern="0" dirty="0">
+              <a:rPr lang="en-US" sz="1800" b="1" spc="100" kern="0" dirty="0">
                 <a:solidFill>
                   <a:srgbClr val="0F6CBD"/>
                 </a:solidFill>
@@ -2869,7 +2970,7 @@
               </a:rPr>
               <a:t>QUALITY ASSURANCE</a:t>
             </a:r>
-            <a:endParaRPr lang="en-US" sz="1150" dirty="0"/>
+            <a:endParaRPr lang="en-US" sz="1800" dirty="0"/>
           </a:p>
         </p:txBody>
       </p:sp>
@@ -2881,8 +2982,8 @@
         </p:nvSpPr>
         <p:spPr>
           <a:xfrm>
-            <a:off x="8890254" y="4681728"/>
-            <a:ext cx="2612898" cy="548640"/>
+            <a:off x="8890254" y="4754880"/>
+            <a:ext cx="2612898" cy="914400"/>
           </a:xfrm>
           <a:prstGeom prst="rect">
             <a:avLst/>
@@ -2895,10 +2996,13 @@
           <a:lstStyle/>
           <a:p>
             <a:pPr indent="0" marL="0">
-              <a:buNone/>
-            </a:pPr>
-            <a:r>
-              <a:rPr lang="en-US" sz="1400" dirty="0">
+              <a:lnSpc>
+                <a:spcPct val="110000"/>
+              </a:lnSpc>
+              <a:buNone/>
+            </a:pPr>
+            <a:r>
+              <a:rPr lang="en-US" sz="1800" dirty="0">
                 <a:solidFill>
                   <a:srgbClr val="002050"/>
                 </a:solidFill>
@@ -2908,7 +3012,7 @@
               </a:rPr>
               <a:t>QCTO / MICT SETA</a:t>
             </a:r>
-            <a:endParaRPr lang="en-US" sz="1400" dirty="0"/>
+            <a:endParaRPr lang="en-US" sz="1800" dirty="0"/>
           </a:p>
         </p:txBody>
       </p:sp>
@@ -2920,8 +3024,8 @@
         </p:nvSpPr>
         <p:spPr>
           <a:xfrm>
-            <a:off x="502920" y="6355080"/>
-            <a:ext cx="11183112" cy="320040"/>
+            <a:off x="502920" y="6291072"/>
+            <a:ext cx="11183112" cy="365760"/>
           </a:xfrm>
           <a:prstGeom prst="rect">
             <a:avLst/>
@@ -2937,7 +3041,7 @@
               <a:buNone/>
             </a:pPr>
             <a:r>
-              <a:rPr lang="en-US" sz="1200" dirty="0">
+              <a:rPr lang="en-US" sz="1800" dirty="0">
                 <a:solidFill>
                   <a:srgbClr val="6B7280"/>
                 </a:solidFill>
@@ -2947,7 +3051,7 @@
               </a:rPr>
               <a:t>ITSS Learn · Investec · Corporate Banking Technology</a:t>
             </a:r>
-            <a:endParaRPr lang="en-US" sz="1200" dirty="0"/>
+            <a:endParaRPr lang="en-US" sz="1800" dirty="0"/>
           </a:p>
         </p:txBody>
       </p:sp>
@@ -2991,8 +3095,8 @@
         </p:nvSpPr>
         <p:spPr>
           <a:xfrm>
-            <a:off x="502920" y="6473952"/>
-            <a:ext cx="10268712" cy="274320"/>
+            <a:off x="502920" y="6400800"/>
+            <a:ext cx="10268712" cy="347472"/>
           </a:xfrm>
           <a:prstGeom prst="rect">
             <a:avLst/>
@@ -3008,7 +3112,7 @@
               <a:buNone/>
             </a:pPr>
             <a:r>
-              <a:rPr lang="en-US" sz="1000" dirty="0">
+              <a:rPr lang="en-US" sz="1800" dirty="0">
                 <a:solidFill>
                   <a:srgbClr val="6B7280"/>
                 </a:solidFill>
@@ -3016,9 +3120,9 @@
                 <a:ea typeface="Aptos" pitchFamily="34" charset="-122"/>
                 <a:cs typeface="Aptos" pitchFamily="34" charset="-120"/>
               </a:rPr>
-              <a:t>US 114050 — Explain the principles of business and the role of information technology · NQF 5 · 4 credits</a:t>
-            </a:r>
-            <a:endParaRPr lang="en-US" sz="1000" dirty="0"/>
+              <a:t>US 114050 · Principles of business &amp; the role of IT · NQF 5 · 4 credits</a:t>
+            </a:r>
+            <a:endParaRPr lang="en-US" sz="1800" dirty="0"/>
           </a:p>
         </p:txBody>
       </p:sp>
@@ -3030,8 +3134,8 @@
         </p:nvSpPr>
         <p:spPr>
           <a:xfrm>
-            <a:off x="11137392" y="6473952"/>
-            <a:ext cx="548640" cy="274320"/>
+            <a:off x="11045952" y="6400800"/>
+            <a:ext cx="640080" cy="347472"/>
           </a:xfrm>
           <a:prstGeom prst="rect">
             <a:avLst/>
@@ -3047,7 +3151,7 @@
               <a:buNone/>
             </a:pPr>
             <a:r>
-              <a:rPr lang="en-US" sz="1000" dirty="0">
+              <a:rPr lang="en-US" sz="1800" dirty="0">
                 <a:solidFill>
                   <a:srgbClr val="6B7280"/>
                 </a:solidFill>
@@ -3057,7 +3161,7 @@
               </a:rPr>
               <a:t>10</a:t>
             </a:r>
-            <a:endParaRPr lang="en-US" sz="1000" dirty="0"/>
+            <a:endParaRPr lang="en-US" sz="1800" dirty="0"/>
           </a:p>
         </p:txBody>
       </p:sp>
@@ -3089,8 +3193,8 @@
         </p:nvSpPr>
         <p:spPr>
           <a:xfrm>
-            <a:off x="502920" y="274320"/>
-            <a:ext cx="11183112" cy="310896"/>
+            <a:off x="502920" y="237744"/>
+            <a:ext cx="11183112" cy="347472"/>
           </a:xfrm>
           <a:prstGeom prst="rect">
             <a:avLst/>
@@ -3106,7 +3210,7 @@
               <a:buNone/>
             </a:pPr>
             <a:r>
-              <a:rPr lang="en-US" sz="1300" b="1" spc="200" kern="0" dirty="0">
+              <a:rPr lang="en-US" sz="1800" b="1" spc="200" kern="0" dirty="0">
                 <a:solidFill>
                   <a:srgbClr val="0F6CBD"/>
                 </a:solidFill>
@@ -3116,7 +3220,7 @@
               </a:rPr>
               <a:t>FRANCHISING</a:t>
             </a:r>
-            <a:endParaRPr lang="en-US" sz="1300" dirty="0"/>
+            <a:endParaRPr lang="en-US" sz="1800" dirty="0"/>
           </a:p>
         </p:txBody>
       </p:sp>
@@ -3128,8 +3232,8 @@
         </p:nvSpPr>
         <p:spPr>
           <a:xfrm>
-            <a:off x="502920" y="566928"/>
-            <a:ext cx="11183112" cy="731520"/>
+            <a:off x="502920" y="585216"/>
+            <a:ext cx="11183112" cy="603504"/>
           </a:xfrm>
           <a:prstGeom prst="rect">
             <a:avLst/>
@@ -3167,8 +3271,8 @@
         </p:nvSpPr>
         <p:spPr>
           <a:xfrm>
-            <a:off x="502920" y="1600200"/>
-            <a:ext cx="11183112" cy="4206240"/>
+            <a:off x="502920" y="1554480"/>
+            <a:ext cx="11183112" cy="4572000"/>
           </a:xfrm>
           <a:prstGeom prst="rect">
             <a:avLst/>
@@ -3180,18 +3284,18 @@
           <a:bodyPr wrap="square" rtlCol="0" anchor="t"/>
           <a:lstStyle/>
           <a:p>
-            <a:pPr marL="177800" indent="-177800">
+            <a:pPr marL="203200" indent="-203200">
               <a:lnSpc>
-                <a:spcPct val="130000"/>
+                <a:spcPct val="120000"/>
               </a:lnSpc>
               <a:spcAft>
-                <a:spcPts val="800"/>
+                <a:spcPts val="1000"/>
               </a:spcAft>
               <a:buSzPct val="100000"/>
               <a:buChar char="•"/>
             </a:pPr>
             <a:r>
-              <a:rPr lang="en-US" sz="1500" dirty="0">
+              <a:rPr lang="en-US" sz="1800" dirty="0">
                 <a:solidFill>
                   <a:srgbClr val="002050"/>
                 </a:solidFill>
@@ -3199,23 +3303,23 @@
                 <a:ea typeface="Aptos" pitchFamily="34" charset="-122"/>
                 <a:cs typeface="Aptos" pitchFamily="34" charset="-120"/>
               </a:rPr>
-              <a:t>Far greater chances of success — the franchisor supplies goods or services more cheaply than an independent business could source them.</a:t>
-            </a:r>
-            <a:endParaRPr lang="en-US" sz="1500" dirty="0"/>
-          </a:p>
-          <a:p>
-            <a:pPr marL="177800" indent="-177800">
+              <a:t>Far greater chances of success — the franchisor supplies goods or services more cheaply.</a:t>
+            </a:r>
+            <a:endParaRPr lang="en-US" sz="1800" dirty="0"/>
+          </a:p>
+          <a:p>
+            <a:pPr marL="203200" indent="-203200">
               <a:lnSpc>
-                <a:spcPct val="130000"/>
+                <a:spcPct val="120000"/>
               </a:lnSpc>
               <a:spcAft>
-                <a:spcPts val="800"/>
+                <a:spcPts val="1000"/>
               </a:spcAft>
               <a:buSzPct val="100000"/>
               <a:buChar char="•"/>
             </a:pPr>
             <a:r>
-              <a:rPr lang="en-US" sz="1500" dirty="0">
+              <a:rPr lang="en-US" sz="1800" dirty="0">
                 <a:solidFill>
                   <a:srgbClr val="002050"/>
                 </a:solidFill>
@@ -3225,21 +3329,21 @@
               </a:rPr>
               <a:t>The franchisor obtains bigger discounts by buying in bulk for his outlets.</a:t>
             </a:r>
-            <a:endParaRPr lang="en-US" sz="1500" dirty="0"/>
-          </a:p>
-          <a:p>
-            <a:pPr marL="177800" indent="-177800">
+            <a:endParaRPr lang="en-US" sz="1800" dirty="0"/>
+          </a:p>
+          <a:p>
+            <a:pPr marL="203200" indent="-203200">
               <a:lnSpc>
-                <a:spcPct val="130000"/>
+                <a:spcPct val="120000"/>
               </a:lnSpc>
               <a:spcAft>
-                <a:spcPts val="800"/>
+                <a:spcPts val="1000"/>
               </a:spcAft>
               <a:buSzPct val="100000"/>
               <a:buChar char="•"/>
             </a:pPr>
             <a:r>
-              <a:rPr lang="en-US" sz="1500" dirty="0">
+              <a:rPr lang="en-US" sz="1800" dirty="0">
                 <a:solidFill>
                   <a:srgbClr val="002050"/>
                 </a:solidFill>
@@ -3249,21 +3353,21 @@
               </a:rPr>
               <a:t>The franchisee starts with a product or service that has an existing, acceptable image.</a:t>
             </a:r>
-            <a:endParaRPr lang="en-US" sz="1500" dirty="0"/>
-          </a:p>
-          <a:p>
-            <a:pPr marL="177800" indent="-177800">
+            <a:endParaRPr lang="en-US" sz="1800" dirty="0"/>
+          </a:p>
+          <a:p>
+            <a:pPr marL="203200" indent="-203200">
               <a:lnSpc>
-                <a:spcPct val="130000"/>
+                <a:spcPct val="120000"/>
               </a:lnSpc>
               <a:spcAft>
-                <a:spcPts val="800"/>
+                <a:spcPts val="1000"/>
               </a:spcAft>
               <a:buSzPct val="100000"/>
               <a:buChar char="•"/>
             </a:pPr>
             <a:r>
-              <a:rPr lang="en-US" sz="1500" dirty="0">
+              <a:rPr lang="en-US" sz="1800" dirty="0">
                 <a:solidFill>
                   <a:srgbClr val="002050"/>
                 </a:solidFill>
@@ -3271,23 +3375,23 @@
                 <a:ea typeface="Aptos" pitchFamily="34" charset="-122"/>
                 <a:cs typeface="Aptos" pitchFamily="34" charset="-120"/>
               </a:rPr>
-              <a:t>Customers know the business, even if the outlet is new.</a:t>
-            </a:r>
-            <a:endParaRPr lang="en-US" sz="1500" dirty="0"/>
-          </a:p>
-          <a:p>
-            <a:pPr marL="177800" indent="-177800">
+              <a:t>Customers know the business, even if the outlet is new — an accepted brand from the start.</a:t>
+            </a:r>
+            <a:endParaRPr lang="en-US" sz="1800" dirty="0"/>
+          </a:p>
+          <a:p>
+            <a:pPr marL="203200" indent="-203200">
               <a:lnSpc>
-                <a:spcPct val="130000"/>
+                <a:spcPct val="120000"/>
               </a:lnSpc>
               <a:spcAft>
-                <a:spcPts val="800"/>
+                <a:spcPts val="1000"/>
               </a:spcAft>
               <a:buSzPct val="100000"/>
               <a:buChar char="•"/>
             </a:pPr>
             <a:r>
-              <a:rPr lang="en-US" sz="1500" dirty="0">
+              <a:rPr lang="en-US" sz="1800" dirty="0">
                 <a:solidFill>
                   <a:srgbClr val="002050"/>
                 </a:solidFill>
@@ -3295,23 +3399,23 @@
                 <a:ea typeface="Aptos" pitchFamily="34" charset="-122"/>
                 <a:cs typeface="Aptos" pitchFamily="34" charset="-120"/>
               </a:rPr>
-              <a:t>An accepted brand takes years to build — a franchise has it from the start.</a:t>
-            </a:r>
-            <a:endParaRPr lang="en-US" sz="1500" dirty="0"/>
-          </a:p>
-          <a:p>
-            <a:pPr marL="177800" indent="-177800">
+              <a:t>A complete package: operations manual, accounting system, marketing, outlet design, staff training.</a:t>
+            </a:r>
+            <a:endParaRPr lang="en-US" sz="1800" dirty="0"/>
+          </a:p>
+          <a:p>
+            <a:pPr marL="203200" indent="-203200">
               <a:lnSpc>
-                <a:spcPct val="130000"/>
+                <a:spcPct val="120000"/>
               </a:lnSpc>
               <a:spcAft>
-                <a:spcPts val="800"/>
+                <a:spcPts val="1000"/>
               </a:spcAft>
               <a:buSzPct val="100000"/>
               <a:buChar char="•"/>
             </a:pPr>
             <a:r>
-              <a:rPr lang="en-US" sz="1500" dirty="0">
+              <a:rPr lang="en-US" sz="1800" dirty="0">
                 <a:solidFill>
                   <a:srgbClr val="002050"/>
                 </a:solidFill>
@@ -3319,33 +3423,9 @@
                 <a:ea typeface="Aptos" pitchFamily="34" charset="-122"/>
                 <a:cs typeface="Aptos" pitchFamily="34" charset="-120"/>
               </a:rPr>
-              <a:t>Most franchisors offer a complete package: operations manual, accounting system, marketing assistance, outlet design, staff selection and training.</a:t>
-            </a:r>
-            <a:endParaRPr lang="en-US" sz="1500" dirty="0"/>
-          </a:p>
-          <a:p>
-            <a:pPr marL="177800" indent="-177800">
-              <a:lnSpc>
-                <a:spcPct val="130000"/>
-              </a:lnSpc>
-              <a:spcAft>
-                <a:spcPts val="800"/>
-              </a:spcAft>
-              <a:buSzPct val="100000"/>
-              <a:buChar char="•"/>
-            </a:pPr>
-            <a:r>
-              <a:rPr lang="en-US" sz="1500" dirty="0">
-                <a:solidFill>
-                  <a:srgbClr val="002050"/>
-                </a:solidFill>
-                <a:latin typeface="Aptos" pitchFamily="34" charset="0"/>
-                <a:ea typeface="Aptos" pitchFamily="34" charset="-122"/>
-                <a:cs typeface="Aptos" pitchFamily="34" charset="-120"/>
-              </a:rPr>
-              <a:t>Ongoing management advice — it is in the franchisor's own interest that every outlet succeeds.</a:t>
-            </a:r>
-            <a:endParaRPr lang="en-US" sz="1500" dirty="0"/>
+              <a:t>Ongoing management advice — every outlet's success is in the franchisor's own interest.</a:t>
+            </a:r>
+            <a:endParaRPr lang="en-US" sz="1800" dirty="0"/>
           </a:p>
         </p:txBody>
       </p:sp>
@@ -3389,8 +3469,8 @@
         </p:nvSpPr>
         <p:spPr>
           <a:xfrm>
-            <a:off x="502920" y="6473952"/>
-            <a:ext cx="10268712" cy="274320"/>
+            <a:off x="502920" y="6400800"/>
+            <a:ext cx="10268712" cy="347472"/>
           </a:xfrm>
           <a:prstGeom prst="rect">
             <a:avLst/>
@@ -3406,7 +3486,7 @@
               <a:buNone/>
             </a:pPr>
             <a:r>
-              <a:rPr lang="en-US" sz="1000" dirty="0">
+              <a:rPr lang="en-US" sz="1800" dirty="0">
                 <a:solidFill>
                   <a:srgbClr val="6B7280"/>
                 </a:solidFill>
@@ -3414,9 +3494,9 @@
                 <a:ea typeface="Aptos" pitchFamily="34" charset="-122"/>
                 <a:cs typeface="Aptos" pitchFamily="34" charset="-120"/>
               </a:rPr>
-              <a:t>US 114050 — Explain the principles of business and the role of information technology · NQF 5 · 4 credits</a:t>
-            </a:r>
-            <a:endParaRPr lang="en-US" sz="1000" dirty="0"/>
+              <a:t>US 114050 · Principles of business &amp; the role of IT · NQF 5 · 4 credits</a:t>
+            </a:r>
+            <a:endParaRPr lang="en-US" sz="1800" dirty="0"/>
           </a:p>
         </p:txBody>
       </p:sp>
@@ -3428,8 +3508,8 @@
         </p:nvSpPr>
         <p:spPr>
           <a:xfrm>
-            <a:off x="11137392" y="6473952"/>
-            <a:ext cx="548640" cy="274320"/>
+            <a:off x="11045952" y="6400800"/>
+            <a:ext cx="640080" cy="347472"/>
           </a:xfrm>
           <a:prstGeom prst="rect">
             <a:avLst/>
@@ -3445,7 +3525,7 @@
               <a:buNone/>
             </a:pPr>
             <a:r>
-              <a:rPr lang="en-US" sz="1000" dirty="0">
+              <a:rPr lang="en-US" sz="1800" dirty="0">
                 <a:solidFill>
                   <a:srgbClr val="6B7280"/>
                 </a:solidFill>
@@ -3455,7 +3535,7 @@
               </a:rPr>
               <a:t>11</a:t>
             </a:r>
-            <a:endParaRPr lang="en-US" sz="1000" dirty="0"/>
+            <a:endParaRPr lang="en-US" sz="1800" dirty="0"/>
           </a:p>
         </p:txBody>
       </p:sp>
@@ -3487,8 +3567,8 @@
         </p:nvSpPr>
         <p:spPr>
           <a:xfrm>
-            <a:off x="502920" y="274320"/>
-            <a:ext cx="11183112" cy="310896"/>
+            <a:off x="502920" y="237744"/>
+            <a:ext cx="11183112" cy="347472"/>
           </a:xfrm>
           <a:prstGeom prst="rect">
             <a:avLst/>
@@ -3504,7 +3584,7 @@
               <a:buNone/>
             </a:pPr>
             <a:r>
-              <a:rPr lang="en-US" sz="1300" b="1" spc="200" kern="0" dirty="0">
+              <a:rPr lang="en-US" sz="1800" b="1" spc="200" kern="0" dirty="0">
                 <a:solidFill>
                   <a:srgbClr val="0F6CBD"/>
                 </a:solidFill>
@@ -3514,7 +3594,7 @@
               </a:rPr>
               <a:t>FRANCHISING</a:t>
             </a:r>
-            <a:endParaRPr lang="en-US" sz="1300" dirty="0"/>
+            <a:endParaRPr lang="en-US" sz="1800" dirty="0"/>
           </a:p>
         </p:txBody>
       </p:sp>
@@ -3526,8 +3606,8 @@
         </p:nvSpPr>
         <p:spPr>
           <a:xfrm>
-            <a:off x="502920" y="566928"/>
-            <a:ext cx="11183112" cy="731520"/>
+            <a:off x="502920" y="585216"/>
+            <a:ext cx="11183112" cy="603504"/>
           </a:xfrm>
           <a:prstGeom prst="rect">
             <a:avLst/>
@@ -3551,7 +3631,7 @@
                 <a:ea typeface="Aptos Display" pitchFamily="34" charset="-122"/>
                 <a:cs typeface="Aptos Display" pitchFamily="34" charset="-120"/>
               </a:rPr>
-              <a:t>Disadvantages — and what you need to be a franchisee</a:t>
+              <a:t>Disadvantages — and what you need</a:t>
             </a:r>
             <a:endParaRPr lang="en-US" sz="3000" dirty="0"/>
           </a:p>
@@ -3565,12 +3645,12 @@
         </p:nvSpPr>
         <p:spPr>
           <a:xfrm>
-            <a:off x="502920" y="1600200"/>
-            <a:ext cx="5454396" cy="4114800"/>
+            <a:off x="502920" y="1554480"/>
+            <a:ext cx="5454396" cy="4572000"/>
           </a:xfrm>
           <a:prstGeom prst="roundRect">
             <a:avLst>
-              <a:gd name="adj" fmla="val 2000"/>
+              <a:gd name="adj" fmla="val 1800"/>
             </a:avLst>
           </a:prstGeom>
           <a:solidFill>
@@ -3599,8 +3679,8 @@
         </p:nvSpPr>
         <p:spPr>
           <a:xfrm>
-            <a:off x="731520" y="1783080"/>
-            <a:ext cx="4997196" cy="274320"/>
+            <a:off x="731520" y="1737360"/>
+            <a:ext cx="4997196" cy="329184"/>
           </a:xfrm>
           <a:prstGeom prst="rect">
             <a:avLst/>
@@ -3616,7 +3696,7 @@
               <a:buNone/>
             </a:pPr>
             <a:r>
-              <a:rPr lang="en-US" sz="1200" b="1" spc="150" kern="0" dirty="0">
+              <a:rPr lang="en-US" sz="1800" b="1" spc="100" kern="0" dirty="0">
                 <a:solidFill>
                   <a:srgbClr val="0F6CBD"/>
                 </a:solidFill>
@@ -3626,7 +3706,7 @@
               </a:rPr>
               <a:t>DISADVANTAGES</a:t>
             </a:r>
-            <a:endParaRPr lang="en-US" sz="1200" dirty="0"/>
+            <a:endParaRPr lang="en-US" sz="1800" dirty="0"/>
           </a:p>
         </p:txBody>
       </p:sp>
@@ -3639,7 +3719,7 @@
         <p:spPr>
           <a:xfrm>
             <a:off x="731520" y="2103120"/>
-            <a:ext cx="4997196" cy="3474720"/>
+            <a:ext cx="4997196" cy="3840480"/>
           </a:xfrm>
           <a:prstGeom prst="rect">
             <a:avLst/>
@@ -3651,18 +3731,18 @@
           <a:bodyPr wrap="square" rtlCol="0" anchor="t"/>
           <a:lstStyle/>
           <a:p>
-            <a:pPr marL="152400" indent="-152400">
+            <a:pPr marL="177800" indent="-177800">
               <a:lnSpc>
-                <a:spcPct val="125000"/>
+                <a:spcPct val="120000"/>
               </a:lnSpc>
               <a:spcAft>
-                <a:spcPts val="800"/>
+                <a:spcPts val="1000"/>
               </a:spcAft>
               <a:buSzPct val="100000"/>
               <a:buChar char="•"/>
             </a:pPr>
             <a:r>
-              <a:rPr lang="en-US" sz="1350" dirty="0">
+              <a:rPr lang="en-US" sz="1800" dirty="0">
                 <a:solidFill>
                   <a:srgbClr val="002050"/>
                 </a:solidFill>
@@ -3670,23 +3750,23 @@
                 <a:ea typeface="Aptos" pitchFamily="34" charset="-122"/>
                 <a:cs typeface="Aptos" pitchFamily="34" charset="-120"/>
               </a:rPr>
-              <a:t>Selling rights normally restricted to a particular area only</a:t>
-            </a:r>
-            <a:endParaRPr lang="en-US" sz="1350" dirty="0"/>
-          </a:p>
-          <a:p>
-            <a:pPr marL="152400" indent="-152400">
+              <a:t>Selling rights restricted to a particular area only</a:t>
+            </a:r>
+            <a:endParaRPr lang="en-US" sz="1800" dirty="0"/>
+          </a:p>
+          <a:p>
+            <a:pPr marL="177800" indent="-177800">
               <a:lnSpc>
-                <a:spcPct val="125000"/>
+                <a:spcPct val="120000"/>
               </a:lnSpc>
               <a:spcAft>
-                <a:spcPts val="800"/>
+                <a:spcPts val="1000"/>
               </a:spcAft>
               <a:buSzPct val="100000"/>
               <a:buChar char="•"/>
             </a:pPr>
             <a:r>
-              <a:rPr lang="en-US" sz="1350" dirty="0">
+              <a:rPr lang="en-US" sz="1800" dirty="0">
                 <a:solidFill>
                   <a:srgbClr val="002050"/>
                 </a:solidFill>
@@ -3694,23 +3774,23 @@
                 <a:ea typeface="Aptos" pitchFamily="34" charset="-122"/>
                 <a:cs typeface="Aptos" pitchFamily="34" charset="-120"/>
               </a:rPr>
-              <a:t>Strict franchisor controls to keep uniform quality standards and cleanliness</a:t>
-            </a:r>
-            <a:endParaRPr lang="en-US" sz="1350" dirty="0"/>
-          </a:p>
-          <a:p>
-            <a:pPr marL="152400" indent="-152400">
+              <a:t>Strict franchisor controls for uniform quality and cleanliness</a:t>
+            </a:r>
+            <a:endParaRPr lang="en-US" sz="1800" dirty="0"/>
+          </a:p>
+          <a:p>
+            <a:pPr marL="177800" indent="-177800">
               <a:lnSpc>
-                <a:spcPct val="125000"/>
+                <a:spcPct val="120000"/>
               </a:lnSpc>
               <a:spcAft>
-                <a:spcPts val="800"/>
+                <a:spcPts val="1000"/>
               </a:spcAft>
               <a:buSzPct val="100000"/>
               <a:buChar char="•"/>
             </a:pPr>
             <a:r>
-              <a:rPr lang="en-US" sz="1350" dirty="0">
+              <a:rPr lang="en-US" sz="1800" dirty="0">
                 <a:solidFill>
                   <a:srgbClr val="002050"/>
                 </a:solidFill>
@@ -3718,23 +3798,23 @@
                 <a:ea typeface="Aptos" pitchFamily="34" charset="-122"/>
                 <a:cs typeface="Aptos" pitchFamily="34" charset="-120"/>
               </a:rPr>
-              <a:t>Problems can develop if the franchisee becomes too dependent on the franchisor</a:t>
-            </a:r>
-            <a:endParaRPr lang="en-US" sz="1350" dirty="0"/>
-          </a:p>
-          <a:p>
-            <a:pPr marL="152400" indent="-152400">
+              <a:t>Risk of becoming too dependent on the franchisor</a:t>
+            </a:r>
+            <a:endParaRPr lang="en-US" sz="1800" dirty="0"/>
+          </a:p>
+          <a:p>
+            <a:pPr marL="177800" indent="-177800">
               <a:lnSpc>
-                <a:spcPct val="125000"/>
+                <a:spcPct val="120000"/>
               </a:lnSpc>
               <a:spcAft>
-                <a:spcPts val="800"/>
+                <a:spcPts val="1000"/>
               </a:spcAft>
               <a:buSzPct val="100000"/>
               <a:buChar char="•"/>
             </a:pPr>
             <a:r>
-              <a:rPr lang="en-US" sz="1350" dirty="0">
+              <a:rPr lang="en-US" sz="1800" dirty="0">
                 <a:solidFill>
                   <a:srgbClr val="002050"/>
                 </a:solidFill>
@@ -3742,9 +3822,9 @@
                 <a:ea typeface="Aptos" pitchFamily="34" charset="-122"/>
                 <a:cs typeface="Aptos" pitchFamily="34" charset="-120"/>
               </a:rPr>
-              <a:t>It costs money — initial franchise fees plus ongoing royalty fees</a:t>
-            </a:r>
-            <a:endParaRPr lang="en-US" sz="1350" dirty="0"/>
+              <a:t>It costs money — initial franchise fees plus ongoing royalties</a:t>
+            </a:r>
+            <a:endParaRPr lang="en-US" sz="1800" dirty="0"/>
           </a:p>
         </p:txBody>
       </p:sp>
@@ -3756,12 +3836,12 @@
         </p:nvSpPr>
         <p:spPr>
           <a:xfrm>
-            <a:off x="6231636" y="1600200"/>
-            <a:ext cx="5454396" cy="4114800"/>
+            <a:off x="6231636" y="1554480"/>
+            <a:ext cx="5454396" cy="4572000"/>
           </a:xfrm>
           <a:prstGeom prst="roundRect">
             <a:avLst>
-              <a:gd name="adj" fmla="val 2000"/>
+              <a:gd name="adj" fmla="val 1800"/>
             </a:avLst>
           </a:prstGeom>
           <a:solidFill>
@@ -3790,8 +3870,8 @@
         </p:nvSpPr>
         <p:spPr>
           <a:xfrm>
-            <a:off x="6460236" y="1783080"/>
-            <a:ext cx="4997196" cy="274320"/>
+            <a:off x="6460236" y="1737360"/>
+            <a:ext cx="4997196" cy="329184"/>
           </a:xfrm>
           <a:prstGeom prst="rect">
             <a:avLst/>
@@ -3807,7 +3887,7 @@
               <a:buNone/>
             </a:pPr>
             <a:r>
-              <a:rPr lang="en-US" sz="1200" b="1" spc="150" kern="0" dirty="0">
+              <a:rPr lang="en-US" sz="1800" b="1" spc="100" kern="0" dirty="0">
                 <a:solidFill>
                   <a:srgbClr val="0F6CBD"/>
                 </a:solidFill>
@@ -3817,7 +3897,7 @@
               </a:rPr>
               <a:t>WHAT YOU NEED</a:t>
             </a:r>
-            <a:endParaRPr lang="en-US" sz="1200" dirty="0"/>
+            <a:endParaRPr lang="en-US" sz="1800" dirty="0"/>
           </a:p>
         </p:txBody>
       </p:sp>
@@ -3830,7 +3910,7 @@
         <p:spPr>
           <a:xfrm>
             <a:off x="6460236" y="2103120"/>
-            <a:ext cx="4997196" cy="3474720"/>
+            <a:ext cx="4997196" cy="3840480"/>
           </a:xfrm>
           <a:prstGeom prst="rect">
             <a:avLst/>
@@ -3842,18 +3922,18 @@
           <a:bodyPr wrap="square" rtlCol="0" anchor="t"/>
           <a:lstStyle/>
           <a:p>
-            <a:pPr marL="152400" indent="-152400">
+            <a:pPr marL="177800" indent="-177800">
               <a:lnSpc>
-                <a:spcPct val="125000"/>
+                <a:spcPct val="120000"/>
               </a:lnSpc>
               <a:spcAft>
-                <a:spcPts val="800"/>
+                <a:spcPts val="1000"/>
               </a:spcAft>
               <a:buSzPct val="100000"/>
               <a:buChar char="•"/>
             </a:pPr>
             <a:r>
-              <a:rPr lang="en-US" sz="1350" dirty="0">
+              <a:rPr lang="en-US" sz="1800" dirty="0">
                 <a:solidFill>
                   <a:srgbClr val="002050"/>
                 </a:solidFill>
@@ -3863,21 +3943,21 @@
               </a:rPr>
               <a:t>The qualities of a successful entrepreneur</a:t>
             </a:r>
-            <a:endParaRPr lang="en-US" sz="1350" dirty="0"/>
-          </a:p>
-          <a:p>
-            <a:pPr marL="152400" indent="-152400">
+            <a:endParaRPr lang="en-US" sz="1800" dirty="0"/>
+          </a:p>
+          <a:p>
+            <a:pPr marL="177800" indent="-177800">
               <a:lnSpc>
-                <a:spcPct val="125000"/>
+                <a:spcPct val="120000"/>
               </a:lnSpc>
               <a:spcAft>
-                <a:spcPts val="800"/>
+                <a:spcPts val="1000"/>
               </a:spcAft>
               <a:buSzPct val="100000"/>
               <a:buChar char="•"/>
             </a:pPr>
             <a:r>
-              <a:rPr lang="en-US" sz="1350" dirty="0">
+              <a:rPr lang="en-US" sz="1800" dirty="0">
                 <a:solidFill>
                   <a:srgbClr val="002050"/>
                 </a:solidFill>
@@ -3885,23 +3965,23 @@
                 <a:ea typeface="Aptos" pitchFamily="34" charset="-122"/>
                 <a:cs typeface="Aptos" pitchFamily="34" charset="-120"/>
               </a:rPr>
-              <a:t>A thorough investigation of the franchisor — track record, industry growth, satisfied franchisees</a:t>
-            </a:r>
-            <a:endParaRPr lang="en-US" sz="1350" dirty="0"/>
-          </a:p>
-          <a:p>
-            <a:pPr marL="152400" indent="-152400">
+              <a:t>A thorough investigation of the franchisor's track record</a:t>
+            </a:r>
+            <a:endParaRPr lang="en-US" sz="1800" dirty="0"/>
+          </a:p>
+          <a:p>
+            <a:pPr marL="177800" indent="-177800">
               <a:lnSpc>
-                <a:spcPct val="125000"/>
+                <a:spcPct val="120000"/>
               </a:lnSpc>
               <a:spcAft>
-                <a:spcPts val="800"/>
+                <a:spcPts val="1000"/>
               </a:spcAft>
               <a:buSzPct val="100000"/>
               <a:buChar char="•"/>
             </a:pPr>
             <a:r>
-              <a:rPr lang="en-US" sz="1350" dirty="0">
+              <a:rPr lang="en-US" sz="1800" dirty="0">
                 <a:solidFill>
                   <a:srgbClr val="002050"/>
                 </a:solidFill>
@@ -3909,23 +3989,23 @@
                 <a:ea typeface="Aptos" pitchFamily="34" charset="-122"/>
                 <a:cs typeface="Aptos" pitchFamily="34" charset="-120"/>
               </a:rPr>
-              <a:t>Established training provision, and an attorney to scrutinise the franchise agreement</a:t>
-            </a:r>
-            <a:endParaRPr lang="en-US" sz="1350" dirty="0"/>
-          </a:p>
-          <a:p>
-            <a:pPr marL="152400" indent="-152400">
+              <a:t>Contact with existing franchisees; established training</a:t>
+            </a:r>
+            <a:endParaRPr lang="en-US" sz="1800" dirty="0"/>
+          </a:p>
+          <a:p>
+            <a:pPr marL="177800" indent="-177800">
               <a:lnSpc>
-                <a:spcPct val="125000"/>
+                <a:spcPct val="120000"/>
               </a:lnSpc>
               <a:spcAft>
-                <a:spcPts val="800"/>
+                <a:spcPts val="1000"/>
               </a:spcAft>
               <a:buSzPct val="100000"/>
               <a:buChar char="•"/>
             </a:pPr>
             <a:r>
-              <a:rPr lang="en-US" sz="1350" dirty="0">
+              <a:rPr lang="en-US" sz="1800" dirty="0">
                 <a:solidFill>
                   <a:srgbClr val="002050"/>
                 </a:solidFill>
@@ -3933,23 +4013,23 @@
                 <a:ea typeface="Aptos" pitchFamily="34" charset="-122"/>
                 <a:cs typeface="Aptos" pitchFamily="34" charset="-120"/>
               </a:rPr>
-              <a:t>Legal and financial aspects clearly defined and fair to both parties</a:t>
-            </a:r>
-            <a:endParaRPr lang="en-US" sz="1350" dirty="0"/>
-          </a:p>
-          <a:p>
-            <a:pPr marL="152400" indent="-152400">
+              <a:t>An attorney to scrutinise the franchise agreement — fair to both parties</a:t>
+            </a:r>
+            <a:endParaRPr lang="en-US" sz="1800" dirty="0"/>
+          </a:p>
+          <a:p>
+            <a:pPr marL="177800" indent="-177800">
               <a:lnSpc>
-                <a:spcPct val="125000"/>
+                <a:spcPct val="120000"/>
               </a:lnSpc>
               <a:spcAft>
-                <a:spcPts val="800"/>
+                <a:spcPts val="1000"/>
               </a:spcAft>
               <a:buSzPct val="100000"/>
               <a:buChar char="•"/>
             </a:pPr>
             <a:r>
-              <a:rPr lang="en-US" sz="1350" dirty="0">
+              <a:rPr lang="en-US" sz="1800" dirty="0">
                 <a:solidFill>
                   <a:srgbClr val="002050"/>
                 </a:solidFill>
@@ -3957,9 +4037,9 @@
                 <a:ea typeface="Aptos" pitchFamily="34" charset="-122"/>
                 <a:cs typeface="Aptos" pitchFamily="34" charset="-120"/>
               </a:rPr>
-              <a:t>Loans are more readily available to franchises because of the reduced risk</a:t>
-            </a:r>
-            <a:endParaRPr lang="en-US" sz="1350" dirty="0"/>
+              <a:t>Loans come easier to franchises because of the reduced risk</a:t>
+            </a:r>
+            <a:endParaRPr lang="en-US" sz="1800" dirty="0"/>
           </a:p>
         </p:txBody>
       </p:sp>
@@ -4003,8 +4083,8 @@
         </p:nvSpPr>
         <p:spPr>
           <a:xfrm>
-            <a:off x="502920" y="6473952"/>
-            <a:ext cx="10268712" cy="274320"/>
+            <a:off x="502920" y="6400800"/>
+            <a:ext cx="10268712" cy="347472"/>
           </a:xfrm>
           <a:prstGeom prst="rect">
             <a:avLst/>
@@ -4020,7 +4100,7 @@
               <a:buNone/>
             </a:pPr>
             <a:r>
-              <a:rPr lang="en-US" sz="1000" dirty="0">
+              <a:rPr lang="en-US" sz="1800" dirty="0">
                 <a:solidFill>
                   <a:srgbClr val="6B7280"/>
                 </a:solidFill>
@@ -4028,9 +4108,9 @@
                 <a:ea typeface="Aptos" pitchFamily="34" charset="-122"/>
                 <a:cs typeface="Aptos" pitchFamily="34" charset="-120"/>
               </a:rPr>
-              <a:t>US 114050 — Explain the principles of business and the role of information technology · NQF 5 · 4 credits</a:t>
-            </a:r>
-            <a:endParaRPr lang="en-US" sz="1000" dirty="0"/>
+              <a:t>US 114050 · Principles of business &amp; the role of IT · NQF 5 · 4 credits</a:t>
+            </a:r>
+            <a:endParaRPr lang="en-US" sz="1800" dirty="0"/>
           </a:p>
         </p:txBody>
       </p:sp>
@@ -4042,8 +4122,8 @@
         </p:nvSpPr>
         <p:spPr>
           <a:xfrm>
-            <a:off x="11137392" y="6473952"/>
-            <a:ext cx="548640" cy="274320"/>
+            <a:off x="11045952" y="6400800"/>
+            <a:ext cx="640080" cy="347472"/>
           </a:xfrm>
           <a:prstGeom prst="rect">
             <a:avLst/>
@@ -4059,7 +4139,7 @@
               <a:buNone/>
             </a:pPr>
             <a:r>
-              <a:rPr lang="en-US" sz="1000" dirty="0">
+              <a:rPr lang="en-US" sz="1800" dirty="0">
                 <a:solidFill>
                   <a:srgbClr val="6B7280"/>
                 </a:solidFill>
@@ -4069,7 +4149,7 @@
               </a:rPr>
               <a:t>12</a:t>
             </a:r>
-            <a:endParaRPr lang="en-US" sz="1000" dirty="0"/>
+            <a:endParaRPr lang="en-US" sz="1800" dirty="0"/>
           </a:p>
         </p:txBody>
       </p:sp>
@@ -4101,8 +4181,8 @@
         </p:nvSpPr>
         <p:spPr>
           <a:xfrm>
-            <a:off x="502920" y="274320"/>
-            <a:ext cx="11183112" cy="310896"/>
+            <a:off x="502920" y="237744"/>
+            <a:ext cx="11183112" cy="347472"/>
           </a:xfrm>
           <a:prstGeom prst="rect">
             <a:avLst/>
@@ -4118,7 +4198,7 @@
               <a:buNone/>
             </a:pPr>
             <a:r>
-              <a:rPr lang="en-US" sz="1300" b="1" spc="200" kern="0" dirty="0">
+              <a:rPr lang="en-US" sz="1800" b="1" spc="200" kern="0" dirty="0">
                 <a:solidFill>
                   <a:srgbClr val="0F6CBD"/>
                 </a:solidFill>
@@ -4128,7 +4208,7 @@
               </a:rPr>
               <a:t>FRANCHISING</a:t>
             </a:r>
-            <a:endParaRPr lang="en-US" sz="1300" dirty="0"/>
+            <a:endParaRPr lang="en-US" sz="1800" dirty="0"/>
           </a:p>
         </p:txBody>
       </p:sp>
@@ -4140,8 +4220,8 @@
         </p:nvSpPr>
         <p:spPr>
           <a:xfrm>
-            <a:off x="502920" y="566928"/>
-            <a:ext cx="11183112" cy="731520"/>
+            <a:off x="502920" y="585216"/>
+            <a:ext cx="11183112" cy="603504"/>
           </a:xfrm>
           <a:prstGeom prst="rect">
             <a:avLst/>
@@ -4179,8 +4259,8 @@
         </p:nvSpPr>
         <p:spPr>
           <a:xfrm>
-            <a:off x="502920" y="1298448"/>
-            <a:ext cx="11183112" cy="548640"/>
+            <a:off x="502920" y="1280160"/>
+            <a:ext cx="11183112" cy="365760"/>
           </a:xfrm>
           <a:prstGeom prst="rect">
             <a:avLst/>
@@ -4199,7 +4279,7 @@
               <a:buNone/>
             </a:pPr>
             <a:r>
-              <a:rPr lang="en-US" sz="1600" dirty="0">
+              <a:rPr lang="en-US" sz="1800" dirty="0">
                 <a:solidFill>
                   <a:srgbClr val="6B7280"/>
                 </a:solidFill>
@@ -4207,9 +4287,9 @@
                 <a:ea typeface="Aptos" pitchFamily="34" charset="-122"/>
                 <a:cs typeface="Aptos" pitchFamily="34" charset="-120"/>
               </a:rPr>
-              <a:t>Think McDonald's, Steers, Spar, Shoprite — the same name, the same goods, at more or less the same prices.</a:t>
-            </a:r>
-            <a:endParaRPr lang="en-US" sz="1600" dirty="0"/>
+              <a:t>Think McDonald's, Steers, Spar, Shoprite — the same name and goods at the same prices.</a:t>
+            </a:r>
+            <a:endParaRPr lang="en-US" sz="1800" dirty="0"/>
           </a:p>
         </p:txBody>
       </p:sp>
@@ -4221,8 +4301,8 @@
         </p:nvSpPr>
         <p:spPr>
           <a:xfrm>
-            <a:off x="502920" y="1965960"/>
-            <a:ext cx="11183112" cy="3291840"/>
+            <a:off x="502920" y="1874520"/>
+            <a:ext cx="11183112" cy="3931920"/>
           </a:xfrm>
           <a:prstGeom prst="rect">
             <a:avLst/>
@@ -4234,18 +4314,18 @@
           <a:bodyPr wrap="square" rtlCol="0" anchor="t"/>
           <a:lstStyle/>
           <a:p>
-            <a:pPr marL="177800" indent="-177800">
+            <a:pPr marL="203200" indent="-203200">
               <a:lnSpc>
-                <a:spcPct val="130000"/>
+                <a:spcPct val="120000"/>
               </a:lnSpc>
               <a:spcAft>
-                <a:spcPts val="800"/>
+                <a:spcPts val="1000"/>
               </a:spcAft>
               <a:buSzPct val="100000"/>
               <a:buChar char="•"/>
             </a:pPr>
             <a:r>
-              <a:rPr lang="en-US" sz="1500" dirty="0">
+              <a:rPr lang="en-US" sz="1800" dirty="0">
                 <a:solidFill>
                   <a:srgbClr val="002050"/>
                 </a:solidFill>
@@ -4253,23 +4333,23 @@
                 <a:ea typeface="Aptos" pitchFamily="34" charset="-122"/>
                 <a:cs typeface="Aptos" pitchFamily="34" charset="-120"/>
               </a:rPr>
-              <a:t>The largest criteria: every outlet must look uniformly the same and sell the branded products the franchisor suggests.</a:t>
-            </a:r>
-            <a:endParaRPr lang="en-US" sz="1500" dirty="0"/>
-          </a:p>
-          <a:p>
-            <a:pPr marL="177800" indent="-177800">
+              <a:t>The largest criterion: every outlet must look uniformly the same and sell the branded products the franchisor suggests.</a:t>
+            </a:r>
+            <a:endParaRPr lang="en-US" sz="1800" dirty="0"/>
+          </a:p>
+          <a:p>
+            <a:pPr marL="203200" indent="-203200">
               <a:lnSpc>
-                <a:spcPct val="130000"/>
+                <a:spcPct val="120000"/>
               </a:lnSpc>
               <a:spcAft>
-                <a:spcPts val="800"/>
+                <a:spcPts val="1000"/>
               </a:spcAft>
               <a:buSzPct val="100000"/>
               <a:buChar char="•"/>
             </a:pPr>
             <a:r>
-              <a:rPr lang="en-US" sz="1500" dirty="0">
+              <a:rPr lang="en-US" sz="1800" dirty="0">
                 <a:solidFill>
                   <a:srgbClr val="002050"/>
                 </a:solidFill>
@@ -4279,21 +4359,21 @@
               </a:rPr>
               <a:t>Products are increasingly labelled as “house brands” — a building tool for the franchise brand name.</a:t>
             </a:r>
-            <a:endParaRPr lang="en-US" sz="1500" dirty="0"/>
-          </a:p>
-          <a:p>
-            <a:pPr marL="177800" indent="-177800">
+            <a:endParaRPr lang="en-US" sz="1800" dirty="0"/>
+          </a:p>
+          <a:p>
+            <a:pPr marL="203200" indent="-203200">
               <a:lnSpc>
-                <a:spcPct val="130000"/>
+                <a:spcPct val="120000"/>
               </a:lnSpc>
               <a:spcAft>
-                <a:spcPts val="800"/>
+                <a:spcPts val="1000"/>
               </a:spcAft>
               <a:buSzPct val="100000"/>
               <a:buChar char="•"/>
             </a:pPr>
             <a:r>
-              <a:rPr lang="en-US" sz="1500" dirty="0">
+              <a:rPr lang="en-US" sz="1800" dirty="0">
                 <a:solidFill>
                   <a:srgbClr val="002050"/>
                 </a:solidFill>
@@ -4301,23 +4381,23 @@
                 <a:ea typeface="Aptos" pitchFamily="34" charset="-122"/>
                 <a:cs typeface="Aptos" pitchFamily="34" charset="-120"/>
               </a:rPr>
-              <a:t>The brand gives consumers peace of mind: the same quality from one outlet as from the next, wherever they shop.</a:t>
-            </a:r>
-            <a:endParaRPr lang="en-US" sz="1500" dirty="0"/>
-          </a:p>
-          <a:p>
-            <a:pPr marL="177800" indent="-177800">
+              <a:t>The brand gives consumers peace of mind: the same quality from one outlet as from the next.</a:t>
+            </a:r>
+            <a:endParaRPr lang="en-US" sz="1800" dirty="0"/>
+          </a:p>
+          <a:p>
+            <a:pPr marL="203200" indent="-203200">
               <a:lnSpc>
-                <a:spcPct val="130000"/>
+                <a:spcPct val="120000"/>
               </a:lnSpc>
               <a:spcAft>
-                <a:spcPts val="800"/>
+                <a:spcPts val="1000"/>
               </a:spcAft>
               <a:buSzPct val="100000"/>
               <a:buChar char="•"/>
             </a:pPr>
             <a:r>
-              <a:rPr lang="en-US" sz="1500" dirty="0">
+              <a:rPr lang="en-US" sz="1800" dirty="0">
                 <a:solidFill>
                   <a:srgbClr val="002050"/>
                 </a:solidFill>
@@ -4327,7 +4407,7 @@
               </a:rPr>
               <a:t>This is the brand consumers long for — confidence in the quality of the product they are buying.</a:t>
             </a:r>
-            <a:endParaRPr lang="en-US" sz="1500" dirty="0"/>
+            <a:endParaRPr lang="en-US" sz="1800" dirty="0"/>
           </a:p>
         </p:txBody>
       </p:sp>
@@ -4371,8 +4451,8 @@
         </p:nvSpPr>
         <p:spPr>
           <a:xfrm>
-            <a:off x="502920" y="6473952"/>
-            <a:ext cx="10268712" cy="274320"/>
+            <a:off x="502920" y="6400800"/>
+            <a:ext cx="10268712" cy="347472"/>
           </a:xfrm>
           <a:prstGeom prst="rect">
             <a:avLst/>
@@ -4388,7 +4468,7 @@
               <a:buNone/>
             </a:pPr>
             <a:r>
-              <a:rPr lang="en-US" sz="1000" dirty="0">
+              <a:rPr lang="en-US" sz="1800" dirty="0">
                 <a:solidFill>
                   <a:srgbClr val="6B7280"/>
                 </a:solidFill>
@@ -4396,9 +4476,9 @@
                 <a:ea typeface="Aptos" pitchFamily="34" charset="-122"/>
                 <a:cs typeface="Aptos" pitchFamily="34" charset="-120"/>
               </a:rPr>
-              <a:t>US 114050 — Explain the principles of business and the role of information technology · NQF 5 · 4 credits</a:t>
-            </a:r>
-            <a:endParaRPr lang="en-US" sz="1000" dirty="0"/>
+              <a:t>US 114050 · Principles of business &amp; the role of IT · NQF 5 · 4 credits</a:t>
+            </a:r>
+            <a:endParaRPr lang="en-US" sz="1800" dirty="0"/>
           </a:p>
         </p:txBody>
       </p:sp>
@@ -4410,8 +4490,8 @@
         </p:nvSpPr>
         <p:spPr>
           <a:xfrm>
-            <a:off x="11137392" y="6473952"/>
-            <a:ext cx="548640" cy="274320"/>
+            <a:off x="11045952" y="6400800"/>
+            <a:ext cx="640080" cy="347472"/>
           </a:xfrm>
           <a:prstGeom prst="rect">
             <a:avLst/>
@@ -4427,7 +4507,7 @@
               <a:buNone/>
             </a:pPr>
             <a:r>
-              <a:rPr lang="en-US" sz="1000" dirty="0">
+              <a:rPr lang="en-US" sz="1800" dirty="0">
                 <a:solidFill>
                   <a:srgbClr val="6B7280"/>
                 </a:solidFill>
@@ -4437,7 +4517,7 @@
               </a:rPr>
               <a:t>13</a:t>
             </a:r>
-            <a:endParaRPr lang="en-US" sz="1000" dirty="0"/>
+            <a:endParaRPr lang="en-US" sz="1800" dirty="0"/>
           </a:p>
         </p:txBody>
       </p:sp>
@@ -4469,8 +4549,8 @@
         </p:nvSpPr>
         <p:spPr>
           <a:xfrm>
-            <a:off x="502920" y="274320"/>
-            <a:ext cx="11183112" cy="310896"/>
+            <a:off x="502920" y="237744"/>
+            <a:ext cx="11183112" cy="347472"/>
           </a:xfrm>
           <a:prstGeom prst="rect">
             <a:avLst/>
@@ -4486,7 +4566,7 @@
               <a:buNone/>
             </a:pPr>
             <a:r>
-              <a:rPr lang="en-US" sz="1300" b="1" spc="200" kern="0" dirty="0">
+              <a:rPr lang="en-US" sz="1800" b="1" spc="200" kern="0" dirty="0">
                 <a:solidFill>
                   <a:srgbClr val="0F6CBD"/>
                 </a:solidFill>
@@ -4496,7 +4576,7 @@
               </a:rPr>
               <a:t>DIRECTION</a:t>
             </a:r>
-            <a:endParaRPr lang="en-US" sz="1300" dirty="0"/>
+            <a:endParaRPr lang="en-US" sz="1800" dirty="0"/>
           </a:p>
         </p:txBody>
       </p:sp>
@@ -4508,8 +4588,8 @@
         </p:nvSpPr>
         <p:spPr>
           <a:xfrm>
-            <a:off x="502920" y="566928"/>
-            <a:ext cx="11183112" cy="731520"/>
+            <a:off x="502920" y="585216"/>
+            <a:ext cx="11183112" cy="603504"/>
           </a:xfrm>
           <a:prstGeom prst="rect">
             <a:avLst/>
@@ -4547,8 +4627,8 @@
         </p:nvSpPr>
         <p:spPr>
           <a:xfrm>
-            <a:off x="502920" y="1298448"/>
-            <a:ext cx="11183112" cy="548640"/>
+            <a:off x="502920" y="1280160"/>
+            <a:ext cx="11183112" cy="621792"/>
           </a:xfrm>
           <a:prstGeom prst="rect">
             <a:avLst/>
@@ -4567,7 +4647,7 @@
               <a:buNone/>
             </a:pPr>
             <a:r>
-              <a:rPr lang="en-US" sz="1600" dirty="0">
+              <a:rPr lang="en-US" sz="1800" dirty="0">
                 <a:solidFill>
                   <a:srgbClr val="6B7280"/>
                 </a:solidFill>
@@ -4577,7 +4657,7 @@
               </a:rPr>
               <a:t>A sole trader may have unstated aims — like surviving the first year. Others state exactly what they aim to do: Amazon wants to “make history and have fun”.</a:t>
             </a:r>
-            <a:endParaRPr lang="en-US" sz="1600" dirty="0"/>
+            <a:endParaRPr lang="en-US" sz="1800" dirty="0"/>
           </a:p>
         </p:txBody>
       </p:sp>
@@ -4590,11 +4670,11 @@
         <p:spPr>
           <a:xfrm>
             <a:off x="502920" y="2103120"/>
-            <a:ext cx="3605784" cy="2011680"/>
+            <a:ext cx="3605784" cy="2834640"/>
           </a:xfrm>
           <a:prstGeom prst="roundRect">
             <a:avLst>
-              <a:gd name="adj" fmla="val 4091"/>
+              <a:gd name="adj" fmla="val 2903"/>
             </a:avLst>
           </a:prstGeom>
           <a:solidFill>
@@ -4637,8 +4717,8 @@
         </p:blipFill>
         <p:spPr>
           <a:xfrm>
-            <a:off x="667512" y="2267712"/>
-            <a:ext cx="329184" cy="329184"/>
+            <a:off x="667512" y="2286000"/>
+            <a:ext cx="347472" cy="347472"/>
           </a:xfrm>
           <a:prstGeom prst="rect">
             <a:avLst/>
@@ -4653,8 +4733,8 @@
         </p:nvSpPr>
         <p:spPr>
           <a:xfrm>
-            <a:off x="1088136" y="2212848"/>
-            <a:ext cx="2855976" cy="566928"/>
+            <a:off x="1106424" y="2212848"/>
+            <a:ext cx="2837688" cy="777240"/>
           </a:xfrm>
           <a:prstGeom prst="rect">
             <a:avLst/>
@@ -4673,7 +4753,7 @@
               <a:buNone/>
             </a:pPr>
             <a:r>
-              <a:rPr lang="en-US" sz="1450" b="1" dirty="0">
+              <a:rPr lang="en-US" sz="2000" b="1" dirty="0">
                 <a:solidFill>
                   <a:srgbClr val="002050"/>
                 </a:solidFill>
@@ -4683,7 +4763,7 @@
               </a:rPr>
               <a:t>An aim</a:t>
             </a:r>
-            <a:endParaRPr lang="en-US" sz="1450" dirty="0"/>
+            <a:endParaRPr lang="en-US" sz="2000" dirty="0"/>
           </a:p>
         </p:txBody>
       </p:sp>
@@ -4695,8 +4775,8 @@
         </p:nvSpPr>
         <p:spPr>
           <a:xfrm>
-            <a:off x="667512" y="2834640"/>
-            <a:ext cx="3276600" cy="1170432"/>
+            <a:off x="667512" y="3035808"/>
+            <a:ext cx="3276600" cy="1773936"/>
           </a:xfrm>
           <a:prstGeom prst="rect">
             <a:avLst/>
@@ -4715,7 +4795,7 @@
               <a:buNone/>
             </a:pPr>
             <a:r>
-              <a:rPr lang="en-US" sz="1250" dirty="0">
+              <a:rPr lang="en-US" sz="1800" dirty="0">
                 <a:solidFill>
                   <a:srgbClr val="6B7280"/>
                 </a:solidFill>
@@ -4723,9 +4803,9 @@
                 <a:ea typeface="Aptos" pitchFamily="34" charset="-122"/>
                 <a:cs typeface="Aptos" pitchFamily="34" charset="-120"/>
               </a:rPr>
-              <a:t>Where the business wants to go in the future — its goals. A statement of purpose, e.g. “we want to grow the business into Europe.”</a:t>
-            </a:r>
-            <a:endParaRPr lang="en-US" sz="1250" dirty="0"/>
+              <a:t>Where the business wants to go — its goals. E.g. “we want to grow the business into Europe.”</a:t>
+            </a:r>
+            <a:endParaRPr lang="en-US" sz="1800" dirty="0"/>
           </a:p>
         </p:txBody>
       </p:sp>
@@ -4738,11 +4818,11 @@
         <p:spPr>
           <a:xfrm>
             <a:off x="4291584" y="2103120"/>
-            <a:ext cx="3605784" cy="2011680"/>
+            <a:ext cx="3605784" cy="2834640"/>
           </a:xfrm>
           <a:prstGeom prst="roundRect">
             <a:avLst>
-              <a:gd name="adj" fmla="val 4091"/>
+              <a:gd name="adj" fmla="val 2903"/>
             </a:avLst>
           </a:prstGeom>
           <a:solidFill>
@@ -4785,8 +4865,8 @@
         </p:blipFill>
         <p:spPr>
           <a:xfrm>
-            <a:off x="4456176" y="2267712"/>
-            <a:ext cx="329184" cy="329184"/>
+            <a:off x="4456176" y="2286000"/>
+            <a:ext cx="347472" cy="347472"/>
           </a:xfrm>
           <a:prstGeom prst="rect">
             <a:avLst/>
@@ -4801,8 +4881,8 @@
         </p:nvSpPr>
         <p:spPr>
           <a:xfrm>
-            <a:off x="4876800" y="2212848"/>
-            <a:ext cx="2855976" cy="566928"/>
+            <a:off x="4895088" y="2212848"/>
+            <a:ext cx="2837688" cy="777240"/>
           </a:xfrm>
           <a:prstGeom prst="rect">
             <a:avLst/>
@@ -4821,7 +4901,7 @@
               <a:buNone/>
             </a:pPr>
             <a:r>
-              <a:rPr lang="en-US" sz="1450" b="1" dirty="0">
+              <a:rPr lang="en-US" sz="2000" b="1" dirty="0">
                 <a:solidFill>
                   <a:srgbClr val="002050"/>
                 </a:solidFill>
@@ -4829,9 +4909,9 @@
                 <a:ea typeface="Aptos Display" pitchFamily="34" charset="-122"/>
                 <a:cs typeface="Aptos Display" pitchFamily="34" charset="-120"/>
               </a:rPr>
-              <a:t>Business objectives</a:t>
-            </a:r>
-            <a:endParaRPr lang="en-US" sz="1450" dirty="0"/>
+              <a:t>Objectives</a:t>
+            </a:r>
+            <a:endParaRPr lang="en-US" sz="2000" dirty="0"/>
           </a:p>
         </p:txBody>
       </p:sp>
@@ -4843,8 +4923,8 @@
         </p:nvSpPr>
         <p:spPr>
           <a:xfrm>
-            <a:off x="4456176" y="2834640"/>
-            <a:ext cx="3276600" cy="1170432"/>
+            <a:off x="4456176" y="3035808"/>
+            <a:ext cx="3276600" cy="1773936"/>
           </a:xfrm>
           <a:prstGeom prst="rect">
             <a:avLst/>
@@ -4863,7 +4943,7 @@
               <a:buNone/>
             </a:pPr>
             <a:r>
-              <a:rPr lang="en-US" sz="1250" dirty="0">
+              <a:rPr lang="en-US" sz="1800" dirty="0">
                 <a:solidFill>
                   <a:srgbClr val="6B7280"/>
                 </a:solidFill>
@@ -4871,9 +4951,9 @@
                 <a:ea typeface="Aptos" pitchFamily="34" charset="-122"/>
                 <a:cs typeface="Aptos" pitchFamily="34" charset="-120"/>
               </a:rPr>
-              <a:t>The stated, measurable targets of how to achieve the aims — e.g. “sales of €10 million in European markets in 2004.”</a:t>
-            </a:r>
-            <a:endParaRPr lang="en-US" sz="1250" dirty="0"/>
+              <a:t>Stated, measurable targets for achieving the aims — e.g. “€10 million of European sales in 2004.”</a:t>
+            </a:r>
+            <a:endParaRPr lang="en-US" sz="1800" dirty="0"/>
           </a:p>
         </p:txBody>
       </p:sp>
@@ -4886,11 +4966,11 @@
         <p:spPr>
           <a:xfrm>
             <a:off x="8080248" y="2103120"/>
-            <a:ext cx="3605784" cy="2011680"/>
+            <a:ext cx="3605784" cy="2834640"/>
           </a:xfrm>
           <a:prstGeom prst="roundRect">
             <a:avLst>
-              <a:gd name="adj" fmla="val 4091"/>
+              <a:gd name="adj" fmla="val 2903"/>
             </a:avLst>
           </a:prstGeom>
           <a:solidFill>
@@ -4933,8 +5013,8 @@
         </p:blipFill>
         <p:spPr>
           <a:xfrm>
-            <a:off x="8244840" y="2267712"/>
-            <a:ext cx="329184" cy="329184"/>
+            <a:off x="8244840" y="2286000"/>
+            <a:ext cx="347472" cy="347472"/>
           </a:xfrm>
           <a:prstGeom prst="rect">
             <a:avLst/>
@@ -4949,8 +5029,8 @@
         </p:nvSpPr>
         <p:spPr>
           <a:xfrm>
-            <a:off x="8665464" y="2212848"/>
-            <a:ext cx="2855976" cy="566928"/>
+            <a:off x="8683752" y="2212848"/>
+            <a:ext cx="2837688" cy="777240"/>
           </a:xfrm>
           <a:prstGeom prst="rect">
             <a:avLst/>
@@ -4969,7 +5049,7 @@
               <a:buNone/>
             </a:pPr>
             <a:r>
-              <a:rPr lang="en-US" sz="1450" b="1" dirty="0">
+              <a:rPr lang="en-US" sz="2000" b="1" dirty="0">
                 <a:solidFill>
                   <a:srgbClr val="002050"/>
                 </a:solidFill>
@@ -4979,7 +5059,7 @@
               </a:rPr>
               <a:t>A mission statement</a:t>
             </a:r>
-            <a:endParaRPr lang="en-US" sz="1450" dirty="0"/>
+            <a:endParaRPr lang="en-US" sz="2000" dirty="0"/>
           </a:p>
         </p:txBody>
       </p:sp>
@@ -4991,8 +5071,8 @@
         </p:nvSpPr>
         <p:spPr>
           <a:xfrm>
-            <a:off x="8244840" y="2834640"/>
-            <a:ext cx="3276600" cy="1170432"/>
+            <a:off x="8244840" y="3035808"/>
+            <a:ext cx="3276600" cy="1773936"/>
           </a:xfrm>
           <a:prstGeom prst="rect">
             <a:avLst/>
@@ -5011,7 +5091,7 @@
               <a:buNone/>
             </a:pPr>
             <a:r>
-              <a:rPr lang="en-US" sz="1250" dirty="0">
+              <a:rPr lang="en-US" sz="1800" dirty="0">
                 <a:solidFill>
                   <a:srgbClr val="6B7280"/>
                 </a:solidFill>
@@ -5019,9 +5099,9 @@
                 <a:ea typeface="Aptos" pitchFamily="34" charset="-122"/>
                 <a:cs typeface="Aptos" pitchFamily="34" charset="-120"/>
               </a:rPr>
-              <a:t>Sets out the vision and values so employees, managers, customers and even suppliers understand the basis for the business's actions.</a:t>
-            </a:r>
-            <a:endParaRPr lang="en-US" sz="1250" dirty="0"/>
+              <a:t>Sets out the vision and values so staff, customers and suppliers understand the basis for the business's actions.</a:t>
+            </a:r>
+            <a:endParaRPr lang="en-US" sz="1800" dirty="0"/>
           </a:p>
         </p:txBody>
       </p:sp>
@@ -5065,8 +5145,8 @@
         </p:nvSpPr>
         <p:spPr>
           <a:xfrm>
-            <a:off x="502920" y="6473952"/>
-            <a:ext cx="10268712" cy="274320"/>
+            <a:off x="502920" y="6400800"/>
+            <a:ext cx="10268712" cy="347472"/>
           </a:xfrm>
           <a:prstGeom prst="rect">
             <a:avLst/>
@@ -5082,7 +5162,7 @@
               <a:buNone/>
             </a:pPr>
             <a:r>
-              <a:rPr lang="en-US" sz="1000" dirty="0">
+              <a:rPr lang="en-US" sz="1800" dirty="0">
                 <a:solidFill>
                   <a:srgbClr val="6B7280"/>
                 </a:solidFill>
@@ -5090,9 +5170,9 @@
                 <a:ea typeface="Aptos" pitchFamily="34" charset="-122"/>
                 <a:cs typeface="Aptos" pitchFamily="34" charset="-120"/>
               </a:rPr>
-              <a:t>US 114050 — Explain the principles of business and the role of information technology · NQF 5 · 4 credits</a:t>
-            </a:r>
-            <a:endParaRPr lang="en-US" sz="1000" dirty="0"/>
+              <a:t>US 114050 · Principles of business &amp; the role of IT · NQF 5 · 4 credits</a:t>
+            </a:r>
+            <a:endParaRPr lang="en-US" sz="1800" dirty="0"/>
           </a:p>
         </p:txBody>
       </p:sp>
@@ -5104,8 +5184,8 @@
         </p:nvSpPr>
         <p:spPr>
           <a:xfrm>
-            <a:off x="11137392" y="6473952"/>
-            <a:ext cx="548640" cy="274320"/>
+            <a:off x="11045952" y="6400800"/>
+            <a:ext cx="640080" cy="347472"/>
           </a:xfrm>
           <a:prstGeom prst="rect">
             <a:avLst/>
@@ -5121,7 +5201,7 @@
               <a:buNone/>
             </a:pPr>
             <a:r>
-              <a:rPr lang="en-US" sz="1000" dirty="0">
+              <a:rPr lang="en-US" sz="1800" dirty="0">
                 <a:solidFill>
                   <a:srgbClr val="6B7280"/>
                 </a:solidFill>
@@ -5131,7 +5211,7 @@
               </a:rPr>
               <a:t>14</a:t>
             </a:r>
-            <a:endParaRPr lang="en-US" sz="1000" dirty="0"/>
+            <a:endParaRPr lang="en-US" sz="1800" dirty="0"/>
           </a:p>
         </p:txBody>
       </p:sp>
@@ -5163,8 +5243,8 @@
         </p:nvSpPr>
         <p:spPr>
           <a:xfrm>
-            <a:off x="502920" y="274320"/>
-            <a:ext cx="11183112" cy="310896"/>
+            <a:off x="502920" y="237744"/>
+            <a:ext cx="11183112" cy="347472"/>
           </a:xfrm>
           <a:prstGeom prst="rect">
             <a:avLst/>
@@ -5180,7 +5260,7 @@
               <a:buNone/>
             </a:pPr>
             <a:r>
-              <a:rPr lang="en-US" sz="1300" b="1" spc="200" kern="0" dirty="0">
+              <a:rPr lang="en-US" sz="1800" b="1" spc="200" kern="0" dirty="0">
                 <a:solidFill>
                   <a:srgbClr val="0F6CBD"/>
                 </a:solidFill>
@@ -5190,7 +5270,7 @@
               </a:rPr>
               <a:t>BUSINESS OBJECTIVES</a:t>
             </a:r>
-            <a:endParaRPr lang="en-US" sz="1300" dirty="0"/>
+            <a:endParaRPr lang="en-US" sz="1800" dirty="0"/>
           </a:p>
         </p:txBody>
       </p:sp>
@@ -5202,8 +5282,8 @@
         </p:nvSpPr>
         <p:spPr>
           <a:xfrm>
-            <a:off x="502920" y="566928"/>
-            <a:ext cx="11183112" cy="731520"/>
+            <a:off x="502920" y="585216"/>
+            <a:ext cx="11183112" cy="603504"/>
           </a:xfrm>
           <a:prstGeom prst="rect">
             <a:avLst/>
@@ -5241,8 +5321,8 @@
         </p:nvSpPr>
         <p:spPr>
           <a:xfrm>
-            <a:off x="502920" y="1298448"/>
-            <a:ext cx="11183112" cy="548640"/>
+            <a:off x="502920" y="1280160"/>
+            <a:ext cx="11183112" cy="365760"/>
           </a:xfrm>
           <a:prstGeom prst="rect">
             <a:avLst/>
@@ -5261,7 +5341,7 @@
               <a:buNone/>
             </a:pPr>
             <a:r>
-              <a:rPr lang="en-US" sz="1600" dirty="0">
+              <a:rPr lang="en-US" sz="1800" dirty="0">
                 <a:solidFill>
                   <a:srgbClr val="6B7280"/>
                 </a:solidFill>
@@ -5269,9 +5349,9 @@
                 <a:ea typeface="Aptos" pitchFamily="34" charset="-122"/>
                 <a:cs typeface="Aptos" pitchFamily="34" charset="-120"/>
               </a:rPr>
-              <a:t>Objectives give the business a clearly defined target — plans can be made, employees are motivated and progress can be measured.</a:t>
-            </a:r>
-            <a:endParaRPr lang="en-US" sz="1600" dirty="0"/>
+              <a:t>Objectives give a clearly defined target — plans can be made and progress measured.</a:t>
+            </a:r>
+            <a:endParaRPr lang="en-US" sz="1800" dirty="0"/>
           </a:p>
         </p:txBody>
       </p:sp>
@@ -5283,12 +5363,12 @@
         </p:nvSpPr>
         <p:spPr>
           <a:xfrm>
-            <a:off x="502920" y="2103120"/>
-            <a:ext cx="2090318" cy="1965960"/>
+            <a:off x="502920" y="1828800"/>
+            <a:ext cx="3605784" cy="2011680"/>
           </a:xfrm>
           <a:prstGeom prst="roundRect">
             <a:avLst>
-              <a:gd name="adj" fmla="val 4186"/>
+              <a:gd name="adj" fmla="val 4091"/>
             </a:avLst>
           </a:prstGeom>
           <a:solidFill>
@@ -5331,8 +5411,8 @@
         </p:blipFill>
         <p:spPr>
           <a:xfrm>
-            <a:off x="667512" y="2267712"/>
-            <a:ext cx="329184" cy="329184"/>
+            <a:off x="667512" y="2011680"/>
+            <a:ext cx="347472" cy="347472"/>
           </a:xfrm>
           <a:prstGeom prst="rect">
             <a:avLst/>
@@ -5347,8 +5427,8 @@
         </p:nvSpPr>
         <p:spPr>
           <a:xfrm>
-            <a:off x="1088136" y="2212848"/>
-            <a:ext cx="1340510" cy="566928"/>
+            <a:off x="1106424" y="1938528"/>
+            <a:ext cx="2837688" cy="777240"/>
           </a:xfrm>
           <a:prstGeom prst="rect">
             <a:avLst/>
@@ -5367,7 +5447,7 @@
               <a:buNone/>
             </a:pPr>
             <a:r>
-              <a:rPr lang="en-US" sz="1300" b="1" dirty="0">
+              <a:rPr lang="en-US" sz="2000" b="1" dirty="0">
                 <a:solidFill>
                   <a:srgbClr val="002050"/>
                 </a:solidFill>
@@ -5377,7 +5457,7 @@
               </a:rPr>
               <a:t>S — Specific</a:t>
             </a:r>
-            <a:endParaRPr lang="en-US" sz="1300" dirty="0"/>
+            <a:endParaRPr lang="en-US" sz="2000" dirty="0"/>
           </a:p>
         </p:txBody>
       </p:sp>
@@ -5389,8 +5469,8 @@
         </p:nvSpPr>
         <p:spPr>
           <a:xfrm>
-            <a:off x="667512" y="2834640"/>
-            <a:ext cx="1761134" cy="1124712"/>
+            <a:off x="667512" y="2761488"/>
+            <a:ext cx="3276600" cy="950976"/>
           </a:xfrm>
           <a:prstGeom prst="rect">
             <a:avLst/>
@@ -5409,7 +5489,7 @@
               <a:buNone/>
             </a:pPr>
             <a:r>
-              <a:rPr lang="en-US" sz="1100" dirty="0">
+              <a:rPr lang="en-US" sz="1800" dirty="0">
                 <a:solidFill>
                   <a:srgbClr val="6B7280"/>
                 </a:solidFill>
@@ -5417,9 +5497,9 @@
                 <a:ea typeface="Aptos" pitchFamily="34" charset="-122"/>
                 <a:cs typeface="Aptos" pitchFamily="34" charset="-120"/>
               </a:rPr>
-              <a:t>Aimed at what the business does, e.g. a hotel filling 60% of its beds a night during October.</a:t>
-            </a:r>
-            <a:endParaRPr lang="en-US" sz="1100" dirty="0"/>
+              <a:t>Aimed at what the business does, e.g. a hotel filling 60% of its beds a night.</a:t>
+            </a:r>
+            <a:endParaRPr lang="en-US" sz="1800" dirty="0"/>
           </a:p>
         </p:txBody>
       </p:sp>
@@ -5431,12 +5511,12 @@
         </p:nvSpPr>
         <p:spPr>
           <a:xfrm>
-            <a:off x="2776118" y="2103120"/>
-            <a:ext cx="2090318" cy="1965960"/>
+            <a:off x="4291584" y="1828800"/>
+            <a:ext cx="3605784" cy="2011680"/>
           </a:xfrm>
           <a:prstGeom prst="roundRect">
             <a:avLst>
-              <a:gd name="adj" fmla="val 4186"/>
+              <a:gd name="adj" fmla="val 4091"/>
             </a:avLst>
           </a:prstGeom>
           <a:solidFill>
@@ -5479,8 +5559,8 @@
         </p:blipFill>
         <p:spPr>
           <a:xfrm>
-            <a:off x="2940710" y="2267712"/>
-            <a:ext cx="329184" cy="329184"/>
+            <a:off x="4456176" y="2011680"/>
+            <a:ext cx="347472" cy="347472"/>
           </a:xfrm>
           <a:prstGeom prst="rect">
             <a:avLst/>
@@ -5495,8 +5575,8 @@
         </p:nvSpPr>
         <p:spPr>
           <a:xfrm>
-            <a:off x="3361334" y="2212848"/>
-            <a:ext cx="1340510" cy="566928"/>
+            <a:off x="4895088" y="1938528"/>
+            <a:ext cx="2837688" cy="777240"/>
           </a:xfrm>
           <a:prstGeom prst="rect">
             <a:avLst/>
@@ -5515,7 +5595,7 @@
               <a:buNone/>
             </a:pPr>
             <a:r>
-              <a:rPr lang="en-US" sz="1300" b="1" dirty="0">
+              <a:rPr lang="en-US" sz="2000" b="1" dirty="0">
                 <a:solidFill>
                   <a:srgbClr val="002050"/>
                 </a:solidFill>
@@ -5525,7 +5605,7 @@
               </a:rPr>
               <a:t>M — Measurable</a:t>
             </a:r>
-            <a:endParaRPr lang="en-US" sz="1300" dirty="0"/>
+            <a:endParaRPr lang="en-US" sz="2000" dirty="0"/>
           </a:p>
         </p:txBody>
       </p:sp>
@@ -5537,8 +5617,8 @@
         </p:nvSpPr>
         <p:spPr>
           <a:xfrm>
-            <a:off x="2940710" y="2834640"/>
-            <a:ext cx="1761134" cy="1124712"/>
+            <a:off x="4456176" y="2761488"/>
+            <a:ext cx="3276600" cy="950976"/>
           </a:xfrm>
           <a:prstGeom prst="rect">
             <a:avLst/>
@@ -5557,7 +5637,7 @@
               <a:buNone/>
             </a:pPr>
             <a:r>
-              <a:rPr lang="en-US" sz="1100" dirty="0">
+              <a:rPr lang="en-US" sz="1800" dirty="0">
                 <a:solidFill>
                   <a:srgbClr val="6B7280"/>
                 </a:solidFill>
@@ -5565,9 +5645,9 @@
                 <a:ea typeface="Aptos" pitchFamily="34" charset="-122"/>
                 <a:cs typeface="Aptos" pitchFamily="34" charset="-120"/>
               </a:rPr>
-              <a:t>A value can be put on it, e.g. €10,000 in sales in the next half year of trading.</a:t>
-            </a:r>
-            <a:endParaRPr lang="en-US" sz="1100" dirty="0"/>
+              <a:t>A value can be put on it, e.g. €10,000 in sales in the next half year.</a:t>
+            </a:r>
+            <a:endParaRPr lang="en-US" sz="1800" dirty="0"/>
           </a:p>
         </p:txBody>
       </p:sp>
@@ -5579,12 +5659,12 @@
         </p:nvSpPr>
         <p:spPr>
           <a:xfrm>
-            <a:off x="5049317" y="2103120"/>
-            <a:ext cx="2090318" cy="1965960"/>
+            <a:off x="8080248" y="1828800"/>
+            <a:ext cx="3605784" cy="2011680"/>
           </a:xfrm>
           <a:prstGeom prst="roundRect">
             <a:avLst>
-              <a:gd name="adj" fmla="val 4186"/>
+              <a:gd name="adj" fmla="val 4091"/>
             </a:avLst>
           </a:prstGeom>
           <a:solidFill>
@@ -5627,8 +5707,8 @@
         </p:blipFill>
         <p:spPr>
           <a:xfrm>
-            <a:off x="5213909" y="2267712"/>
-            <a:ext cx="329184" cy="329184"/>
+            <a:off x="8244840" y="2011680"/>
+            <a:ext cx="347472" cy="347472"/>
           </a:xfrm>
           <a:prstGeom prst="rect">
             <a:avLst/>
@@ -5643,8 +5723,8 @@
         </p:nvSpPr>
         <p:spPr>
           <a:xfrm>
-            <a:off x="5634533" y="2212848"/>
-            <a:ext cx="1340510" cy="566928"/>
+            <a:off x="8683752" y="1938528"/>
+            <a:ext cx="2837688" cy="777240"/>
           </a:xfrm>
           <a:prstGeom prst="rect">
             <a:avLst/>
@@ -5663,7 +5743,7 @@
               <a:buNone/>
             </a:pPr>
             <a:r>
-              <a:rPr lang="en-US" sz="1300" b="1" dirty="0">
+              <a:rPr lang="en-US" sz="2000" b="1" dirty="0">
                 <a:solidFill>
                   <a:srgbClr val="002050"/>
                 </a:solidFill>
@@ -5673,7 +5753,7 @@
               </a:rPr>
               <a:t>A — Agreed</a:t>
             </a:r>
-            <a:endParaRPr lang="en-US" sz="1300" dirty="0"/>
+            <a:endParaRPr lang="en-US" sz="2000" dirty="0"/>
           </a:p>
         </p:txBody>
       </p:sp>
@@ -5685,8 +5765,8 @@
         </p:nvSpPr>
         <p:spPr>
           <a:xfrm>
-            <a:off x="5213909" y="2834640"/>
-            <a:ext cx="1761134" cy="1124712"/>
+            <a:off x="8244840" y="2761488"/>
+            <a:ext cx="3276600" cy="950976"/>
           </a:xfrm>
           <a:prstGeom prst="rect">
             <a:avLst/>
@@ -5705,7 +5785,7 @@
               <a:buNone/>
             </a:pPr>
             <a:r>
-              <a:rPr lang="en-US" sz="1100" dirty="0">
+              <a:rPr lang="en-US" sz="1800" dirty="0">
                 <a:solidFill>
                   <a:srgbClr val="6B7280"/>
                 </a:solidFill>
@@ -5715,7 +5795,7 @@
               </a:rPr>
               <a:t>By all those concerned in trying to achieve the objective.</a:t>
             </a:r>
-            <a:endParaRPr lang="en-US" sz="1100" dirty="0"/>
+            <a:endParaRPr lang="en-US" sz="1800" dirty="0"/>
           </a:p>
         </p:txBody>
       </p:sp>
@@ -5727,12 +5807,12 @@
         </p:nvSpPr>
         <p:spPr>
           <a:xfrm>
-            <a:off x="7322515" y="2103120"/>
-            <a:ext cx="2090318" cy="1965960"/>
+            <a:off x="502920" y="4023360"/>
+            <a:ext cx="3605784" cy="2011680"/>
           </a:xfrm>
           <a:prstGeom prst="roundRect">
             <a:avLst>
-              <a:gd name="adj" fmla="val 4186"/>
+              <a:gd name="adj" fmla="val 4091"/>
             </a:avLst>
           </a:prstGeom>
           <a:solidFill>
@@ -5775,8 +5855,8 @@
         </p:blipFill>
         <p:spPr>
           <a:xfrm>
-            <a:off x="7487107" y="2267712"/>
-            <a:ext cx="329184" cy="329184"/>
+            <a:off x="667512" y="4206240"/>
+            <a:ext cx="347472" cy="347472"/>
           </a:xfrm>
           <a:prstGeom prst="rect">
             <a:avLst/>
@@ -5791,8 +5871,8 @@
         </p:nvSpPr>
         <p:spPr>
           <a:xfrm>
-            <a:off x="7907731" y="2212848"/>
-            <a:ext cx="1340510" cy="566928"/>
+            <a:off x="1106424" y="4133088"/>
+            <a:ext cx="2837688" cy="777240"/>
           </a:xfrm>
           <a:prstGeom prst="rect">
             <a:avLst/>
@@ -5811,7 +5891,7 @@
               <a:buNone/>
             </a:pPr>
             <a:r>
-              <a:rPr lang="en-US" sz="1300" b="1" dirty="0">
+              <a:rPr lang="en-US" sz="2000" b="1" dirty="0">
                 <a:solidFill>
                   <a:srgbClr val="002050"/>
                 </a:solidFill>
@@ -5821,7 +5901,7 @@
               </a:rPr>
               <a:t>R — Realistic</a:t>
             </a:r>
-            <a:endParaRPr lang="en-US" sz="1300" dirty="0"/>
+            <a:endParaRPr lang="en-US" sz="2000" dirty="0"/>
           </a:p>
         </p:txBody>
       </p:sp>
@@ -5833,8 +5913,8 @@
         </p:nvSpPr>
         <p:spPr>
           <a:xfrm>
-            <a:off x="7487107" y="2834640"/>
-            <a:ext cx="1761134" cy="1124712"/>
+            <a:off x="667512" y="4956048"/>
+            <a:ext cx="3276600" cy="950976"/>
           </a:xfrm>
           <a:prstGeom prst="rect">
             <a:avLst/>
@@ -5853,7 +5933,7 @@
               <a:buNone/>
             </a:pPr>
             <a:r>
-              <a:rPr lang="en-US" sz="1100" dirty="0">
+              <a:rPr lang="en-US" sz="1800" dirty="0">
                 <a:solidFill>
                   <a:srgbClr val="6B7280"/>
                 </a:solidFill>
@@ -5863,7 +5943,7 @@
               </a:rPr>
               <a:t>Challenging, but achievable with the resources available.</a:t>
             </a:r>
-            <a:endParaRPr lang="en-US" sz="1100" dirty="0"/>
+            <a:endParaRPr lang="en-US" sz="1800" dirty="0"/>
           </a:p>
         </p:txBody>
       </p:sp>
@@ -5875,12 +5955,12 @@
         </p:nvSpPr>
         <p:spPr>
           <a:xfrm>
-            <a:off x="9595714" y="2103120"/>
-            <a:ext cx="2090318" cy="1965960"/>
+            <a:off x="4291584" y="4023360"/>
+            <a:ext cx="3605784" cy="2011680"/>
           </a:xfrm>
           <a:prstGeom prst="roundRect">
             <a:avLst>
-              <a:gd name="adj" fmla="val 4186"/>
+              <a:gd name="adj" fmla="val 4091"/>
             </a:avLst>
           </a:prstGeom>
           <a:solidFill>
@@ -5923,8 +6003,8 @@
         </p:blipFill>
         <p:spPr>
           <a:xfrm>
-            <a:off x="9760306" y="2267712"/>
-            <a:ext cx="329184" cy="329184"/>
+            <a:off x="4456176" y="4206240"/>
+            <a:ext cx="347472" cy="347472"/>
           </a:xfrm>
           <a:prstGeom prst="rect">
             <a:avLst/>
@@ -5939,8 +6019,8 @@
         </p:nvSpPr>
         <p:spPr>
           <a:xfrm>
-            <a:off x="10180930" y="2212848"/>
-            <a:ext cx="1340510" cy="566928"/>
+            <a:off x="4895088" y="4133088"/>
+            <a:ext cx="2837688" cy="777240"/>
           </a:xfrm>
           <a:prstGeom prst="rect">
             <a:avLst/>
@@ -5959,7 +6039,7 @@
               <a:buNone/>
             </a:pPr>
             <a:r>
-              <a:rPr lang="en-US" sz="1300" b="1" dirty="0">
+              <a:rPr lang="en-US" sz="2000" b="1" dirty="0">
                 <a:solidFill>
                   <a:srgbClr val="002050"/>
                 </a:solidFill>
@@ -5969,7 +6049,7 @@
               </a:rPr>
               <a:t>T — Time specific</a:t>
             </a:r>
-            <a:endParaRPr lang="en-US" sz="1300" dirty="0"/>
+            <a:endParaRPr lang="en-US" sz="2000" dirty="0"/>
           </a:p>
         </p:txBody>
       </p:sp>
@@ -5981,8 +6061,8 @@
         </p:nvSpPr>
         <p:spPr>
           <a:xfrm>
-            <a:off x="9760306" y="2834640"/>
-            <a:ext cx="1761134" cy="1124712"/>
+            <a:off x="4456176" y="4956048"/>
+            <a:ext cx="3276600" cy="950976"/>
           </a:xfrm>
           <a:prstGeom prst="rect">
             <a:avLst/>
@@ -6001,7 +6081,7 @@
               <a:buNone/>
             </a:pPr>
             <a:r>
-              <a:rPr lang="en-US" sz="1100" dirty="0">
+              <a:rPr lang="en-US" sz="1800" dirty="0">
                 <a:solidFill>
                   <a:srgbClr val="6B7280"/>
                 </a:solidFill>
@@ -6011,7 +6091,7 @@
               </a:rPr>
               <a:t>A time limit for achievement, e.g. by the end of the year.</a:t>
             </a:r>
-            <a:endParaRPr lang="en-US" sz="1100" dirty="0"/>
+            <a:endParaRPr lang="en-US" sz="1800" dirty="0"/>
           </a:p>
         </p:txBody>
       </p:sp>
@@ -6055,8 +6135,8 @@
         </p:nvSpPr>
         <p:spPr>
           <a:xfrm>
-            <a:off x="502920" y="6473952"/>
-            <a:ext cx="10268712" cy="274320"/>
+            <a:off x="502920" y="6400800"/>
+            <a:ext cx="10268712" cy="347472"/>
           </a:xfrm>
           <a:prstGeom prst="rect">
             <a:avLst/>
@@ -6072,7 +6152,7 @@
               <a:buNone/>
             </a:pPr>
             <a:r>
-              <a:rPr lang="en-US" sz="1000" dirty="0">
+              <a:rPr lang="en-US" sz="1800" dirty="0">
                 <a:solidFill>
                   <a:srgbClr val="6B7280"/>
                 </a:solidFill>
@@ -6080,9 +6160,9 @@
                 <a:ea typeface="Aptos" pitchFamily="34" charset="-122"/>
                 <a:cs typeface="Aptos" pitchFamily="34" charset="-120"/>
               </a:rPr>
-              <a:t>US 114050 — Explain the principles of business and the role of information technology · NQF 5 · 4 credits</a:t>
-            </a:r>
-            <a:endParaRPr lang="en-US" sz="1000" dirty="0"/>
+              <a:t>US 114050 · Principles of business &amp; the role of IT · NQF 5 · 4 credits</a:t>
+            </a:r>
+            <a:endParaRPr lang="en-US" sz="1800" dirty="0"/>
           </a:p>
         </p:txBody>
       </p:sp>
@@ -6094,8 +6174,8 @@
         </p:nvSpPr>
         <p:spPr>
           <a:xfrm>
-            <a:off x="11137392" y="6473952"/>
-            <a:ext cx="548640" cy="274320"/>
+            <a:off x="11045952" y="6400800"/>
+            <a:ext cx="640080" cy="347472"/>
           </a:xfrm>
           <a:prstGeom prst="rect">
             <a:avLst/>
@@ -6111,7 +6191,7 @@
               <a:buNone/>
             </a:pPr>
             <a:r>
-              <a:rPr lang="en-US" sz="1000" dirty="0">
+              <a:rPr lang="en-US" sz="1800" dirty="0">
                 <a:solidFill>
                   <a:srgbClr val="6B7280"/>
                 </a:solidFill>
@@ -6121,7 +6201,7 @@
               </a:rPr>
               <a:t>15</a:t>
             </a:r>
-            <a:endParaRPr lang="en-US" sz="1000" dirty="0"/>
+            <a:endParaRPr lang="en-US" sz="1800" dirty="0"/>
           </a:p>
         </p:txBody>
       </p:sp>
@@ -6153,8 +6233,8 @@
         </p:nvSpPr>
         <p:spPr>
           <a:xfrm>
-            <a:off x="502920" y="274320"/>
-            <a:ext cx="11183112" cy="310896"/>
+            <a:off x="502920" y="237744"/>
+            <a:ext cx="11183112" cy="347472"/>
           </a:xfrm>
           <a:prstGeom prst="rect">
             <a:avLst/>
@@ -6170,7 +6250,7 @@
               <a:buNone/>
             </a:pPr>
             <a:r>
-              <a:rPr lang="en-US" sz="1300" b="1" spc="200" kern="0" dirty="0">
+              <a:rPr lang="en-US" sz="1800" b="1" spc="200" kern="0" dirty="0">
                 <a:solidFill>
                   <a:srgbClr val="0F6CBD"/>
                 </a:solidFill>
@@ -6180,7 +6260,7 @@
               </a:rPr>
               <a:t>BUSINESS OBJECTIVES</a:t>
             </a:r>
-            <a:endParaRPr lang="en-US" sz="1300" dirty="0"/>
+            <a:endParaRPr lang="en-US" sz="1800" dirty="0"/>
           </a:p>
         </p:txBody>
       </p:sp>
@@ -6192,8 +6272,8 @@
         </p:nvSpPr>
         <p:spPr>
           <a:xfrm>
-            <a:off x="502920" y="566928"/>
-            <a:ext cx="11183112" cy="731520"/>
+            <a:off x="502920" y="585216"/>
+            <a:ext cx="11183112" cy="603504"/>
           </a:xfrm>
           <a:prstGeom prst="rect">
             <a:avLst/>
@@ -6231,12 +6311,12 @@
         </p:nvSpPr>
         <p:spPr>
           <a:xfrm>
-            <a:off x="502920" y="1737360"/>
-            <a:ext cx="2658618" cy="1965960"/>
+            <a:off x="502920" y="1600200"/>
+            <a:ext cx="5500116" cy="2148840"/>
           </a:xfrm>
           <a:prstGeom prst="roundRect">
             <a:avLst>
-              <a:gd name="adj" fmla="val 4186"/>
+              <a:gd name="adj" fmla="val 3830"/>
             </a:avLst>
           </a:prstGeom>
           <a:solidFill>
@@ -6279,8 +6359,8 @@
         </p:blipFill>
         <p:spPr>
           <a:xfrm>
-            <a:off x="667512" y="1901952"/>
-            <a:ext cx="329184" cy="329184"/>
+            <a:off x="667512" y="1783080"/>
+            <a:ext cx="347472" cy="347472"/>
           </a:xfrm>
           <a:prstGeom prst="rect">
             <a:avLst/>
@@ -6295,8 +6375,8 @@
         </p:nvSpPr>
         <p:spPr>
           <a:xfrm>
-            <a:off x="1088136" y="1847088"/>
-            <a:ext cx="1908810" cy="566928"/>
+            <a:off x="1106424" y="1709928"/>
+            <a:ext cx="4732020" cy="777240"/>
           </a:xfrm>
           <a:prstGeom prst="rect">
             <a:avLst/>
@@ -6315,7 +6395,7 @@
               <a:buNone/>
             </a:pPr>
             <a:r>
-              <a:rPr lang="en-US" sz="1400" b="1" dirty="0">
+              <a:rPr lang="en-US" sz="2000" b="1" dirty="0">
                 <a:solidFill>
                   <a:srgbClr val="002050"/>
                 </a:solidFill>
@@ -6325,7 +6405,7 @@
               </a:rPr>
               <a:t>Survival</a:t>
             </a:r>
-            <a:endParaRPr lang="en-US" sz="1400" dirty="0"/>
+            <a:endParaRPr lang="en-US" sz="2000" dirty="0"/>
           </a:p>
         </p:txBody>
       </p:sp>
@@ -6337,8 +6417,8 @@
         </p:nvSpPr>
         <p:spPr>
           <a:xfrm>
-            <a:off x="667512" y="2468880"/>
-            <a:ext cx="2329434" cy="1124712"/>
+            <a:off x="667512" y="2532888"/>
+            <a:ext cx="5170932" cy="1088136"/>
           </a:xfrm>
           <a:prstGeom prst="rect">
             <a:avLst/>
@@ -6357,7 +6437,7 @@
               <a:buNone/>
             </a:pPr>
             <a:r>
-              <a:rPr lang="en-US" sz="1200" dirty="0">
+              <a:rPr lang="en-US" sz="1800" dirty="0">
                 <a:solidFill>
                   <a:srgbClr val="6B7280"/>
                 </a:solidFill>
@@ -6365,9 +6445,9 @@
                 <a:ea typeface="Aptos" pitchFamily="34" charset="-122"/>
                 <a:cs typeface="Aptos" pitchFamily="34" charset="-120"/>
               </a:rPr>
-              <a:t>Short-term — small businesses starting out, new entrants to a market, or a time of crisis.</a:t>
-            </a:r>
-            <a:endParaRPr lang="en-US" sz="1200" dirty="0"/>
+              <a:t>Short-term — new businesses, new entrants to a market, or a time of crisis.</a:t>
+            </a:r>
+            <a:endParaRPr lang="en-US" sz="1800" dirty="0"/>
           </a:p>
         </p:txBody>
       </p:sp>
@@ -6379,12 +6459,12 @@
         </p:nvSpPr>
         <p:spPr>
           <a:xfrm>
-            <a:off x="3344418" y="1737360"/>
-            <a:ext cx="2658618" cy="1965960"/>
+            <a:off x="6185916" y="1600200"/>
+            <a:ext cx="5500116" cy="2148840"/>
           </a:xfrm>
           <a:prstGeom prst="roundRect">
             <a:avLst>
-              <a:gd name="adj" fmla="val 4186"/>
+              <a:gd name="adj" fmla="val 3830"/>
             </a:avLst>
           </a:prstGeom>
           <a:solidFill>
@@ -6427,8 +6507,8 @@
         </p:blipFill>
         <p:spPr>
           <a:xfrm>
-            <a:off x="3509010" y="1901952"/>
-            <a:ext cx="329184" cy="329184"/>
+            <a:off x="6350508" y="1783080"/>
+            <a:ext cx="347472" cy="347472"/>
           </a:xfrm>
           <a:prstGeom prst="rect">
             <a:avLst/>
@@ -6443,8 +6523,8 @@
         </p:nvSpPr>
         <p:spPr>
           <a:xfrm>
-            <a:off x="3929634" y="1847088"/>
-            <a:ext cx="1908810" cy="566928"/>
+            <a:off x="6789420" y="1709928"/>
+            <a:ext cx="4732020" cy="777240"/>
           </a:xfrm>
           <a:prstGeom prst="rect">
             <a:avLst/>
@@ -6463,7 +6543,7 @@
               <a:buNone/>
             </a:pPr>
             <a:r>
-              <a:rPr lang="en-US" sz="1400" b="1" dirty="0">
+              <a:rPr lang="en-US" sz="2000" b="1" dirty="0">
                 <a:solidFill>
                   <a:srgbClr val="002050"/>
                 </a:solidFill>
@@ -6473,7 +6553,7 @@
               </a:rPr>
               <a:t>Profit maximisation</a:t>
             </a:r>
-            <a:endParaRPr lang="en-US" sz="1400" dirty="0"/>
+            <a:endParaRPr lang="en-US" sz="2000" dirty="0"/>
           </a:p>
         </p:txBody>
       </p:sp>
@@ -6485,8 +6565,8 @@
         </p:nvSpPr>
         <p:spPr>
           <a:xfrm>
-            <a:off x="3509010" y="2468880"/>
-            <a:ext cx="2329434" cy="1124712"/>
+            <a:off x="6350508" y="2532888"/>
+            <a:ext cx="5170932" cy="1088136"/>
           </a:xfrm>
           <a:prstGeom prst="rect">
             <a:avLst/>
@@ -6505,7 +6585,7 @@
               <a:buNone/>
             </a:pPr>
             <a:r>
-              <a:rPr lang="en-US" sz="1200" dirty="0">
+              <a:rPr lang="en-US" sz="1800" dirty="0">
                 <a:solidFill>
                   <a:srgbClr val="6B7280"/>
                 </a:solidFill>
@@ -6513,9 +6593,9 @@
                 <a:ea typeface="Aptos" pitchFamily="34" charset="-122"/>
                 <a:cs typeface="Aptos" pitchFamily="34" charset="-120"/>
               </a:rPr>
-              <a:t>Make the most profit possible — most likely the aim of the owners and shareholders.</a:t>
-            </a:r>
-            <a:endParaRPr lang="en-US" sz="1200" dirty="0"/>
+              <a:t>Make the most profit possible — the likely aim of the owners and shareholders.</a:t>
+            </a:r>
+            <a:endParaRPr lang="en-US" sz="1800" dirty="0"/>
           </a:p>
         </p:txBody>
       </p:sp>
@@ -6527,12 +6607,12 @@
         </p:nvSpPr>
         <p:spPr>
           <a:xfrm>
-            <a:off x="6185916" y="1737360"/>
-            <a:ext cx="2658618" cy="1965960"/>
+            <a:off x="502920" y="3931920"/>
+            <a:ext cx="5500116" cy="2148840"/>
           </a:xfrm>
           <a:prstGeom prst="roundRect">
             <a:avLst>
-              <a:gd name="adj" fmla="val 4186"/>
+              <a:gd name="adj" fmla="val 3830"/>
             </a:avLst>
           </a:prstGeom>
           <a:solidFill>
@@ -6575,8 +6655,8 @@
         </p:blipFill>
         <p:spPr>
           <a:xfrm>
-            <a:off x="6350508" y="1901952"/>
-            <a:ext cx="329184" cy="329184"/>
+            <a:off x="667512" y="4114800"/>
+            <a:ext cx="347472" cy="347472"/>
           </a:xfrm>
           <a:prstGeom prst="rect">
             <a:avLst/>
@@ -6591,8 +6671,8 @@
         </p:nvSpPr>
         <p:spPr>
           <a:xfrm>
-            <a:off x="6771132" y="1847088"/>
-            <a:ext cx="1908810" cy="566928"/>
+            <a:off x="1106424" y="4041648"/>
+            <a:ext cx="4732020" cy="777240"/>
           </a:xfrm>
           <a:prstGeom prst="rect">
             <a:avLst/>
@@ -6611,7 +6691,7 @@
               <a:buNone/>
             </a:pPr>
             <a:r>
-              <a:rPr lang="en-US" sz="1400" b="1" dirty="0">
+              <a:rPr lang="en-US" sz="2000" b="1" dirty="0">
                 <a:solidFill>
                   <a:srgbClr val="002050"/>
                 </a:solidFill>
@@ -6621,7 +6701,7 @@
               </a:rPr>
               <a:t>Profit satisfying</a:t>
             </a:r>
-            <a:endParaRPr lang="en-US" sz="1400" dirty="0"/>
+            <a:endParaRPr lang="en-US" sz="2000" dirty="0"/>
           </a:p>
         </p:txBody>
       </p:sp>
@@ -6633,8 +6713,8 @@
         </p:nvSpPr>
         <p:spPr>
           <a:xfrm>
-            <a:off x="6350508" y="2468880"/>
-            <a:ext cx="2329434" cy="1124712"/>
+            <a:off x="667512" y="4864608"/>
+            <a:ext cx="5170932" cy="1088136"/>
           </a:xfrm>
           <a:prstGeom prst="rect">
             <a:avLst/>
@@ -6653,7 +6733,7 @@
               <a:buNone/>
             </a:pPr>
             <a:r>
-              <a:rPr lang="en-US" sz="1200" dirty="0">
+              <a:rPr lang="en-US" sz="1800" dirty="0">
                 <a:solidFill>
                   <a:srgbClr val="6B7280"/>
                 </a:solidFill>
@@ -6661,9 +6741,9 @@
                 <a:ea typeface="Aptos" pitchFamily="34" charset="-122"/>
                 <a:cs typeface="Aptos" pitchFamily="34" charset="-120"/>
               </a:rPr>
-              <a:t>Enough profit to keep the owners comfortable — smaller businesses whose owners don't want longer hours.</a:t>
-            </a:r>
-            <a:endParaRPr lang="en-US" sz="1200" dirty="0"/>
+              <a:t>Enough profit to keep the owners comfortable — without working longer hours.</a:t>
+            </a:r>
+            <a:endParaRPr lang="en-US" sz="1800" dirty="0"/>
           </a:p>
         </p:txBody>
       </p:sp>
@@ -6675,12 +6755,12 @@
         </p:nvSpPr>
         <p:spPr>
           <a:xfrm>
-            <a:off x="9027414" y="1737360"/>
-            <a:ext cx="2658618" cy="1965960"/>
+            <a:off x="6185916" y="3931920"/>
+            <a:ext cx="5500116" cy="2148840"/>
           </a:xfrm>
           <a:prstGeom prst="roundRect">
             <a:avLst>
-              <a:gd name="adj" fmla="val 4186"/>
+              <a:gd name="adj" fmla="val 3830"/>
             </a:avLst>
           </a:prstGeom>
           <a:solidFill>
@@ -6723,8 +6803,8 @@
         </p:blipFill>
         <p:spPr>
           <a:xfrm>
-            <a:off x="9192006" y="1901952"/>
-            <a:ext cx="329184" cy="329184"/>
+            <a:off x="6350508" y="4114800"/>
+            <a:ext cx="347472" cy="347472"/>
           </a:xfrm>
           <a:prstGeom prst="rect">
             <a:avLst/>
@@ -6739,8 +6819,8 @@
         </p:nvSpPr>
         <p:spPr>
           <a:xfrm>
-            <a:off x="9612630" y="1847088"/>
-            <a:ext cx="1908810" cy="566928"/>
+            <a:off x="6789420" y="4041648"/>
+            <a:ext cx="4732020" cy="777240"/>
           </a:xfrm>
           <a:prstGeom prst="rect">
             <a:avLst/>
@@ -6759,7 +6839,7 @@
               <a:buNone/>
             </a:pPr>
             <a:r>
-              <a:rPr lang="en-US" sz="1400" b="1" dirty="0">
+              <a:rPr lang="en-US" sz="2000" b="1" dirty="0">
                 <a:solidFill>
                   <a:srgbClr val="002050"/>
                 </a:solidFill>
@@ -6769,7 +6849,7 @@
               </a:rPr>
               <a:t>Sales growth</a:t>
             </a:r>
-            <a:endParaRPr lang="en-US" sz="1400" dirty="0"/>
+            <a:endParaRPr lang="en-US" sz="2000" dirty="0"/>
           </a:p>
         </p:txBody>
       </p:sp>
@@ -6781,8 +6861,8 @@
         </p:nvSpPr>
         <p:spPr>
           <a:xfrm>
-            <a:off x="9192006" y="2468880"/>
-            <a:ext cx="2329434" cy="1124712"/>
+            <a:off x="6350508" y="4864608"/>
+            <a:ext cx="5170932" cy="1088136"/>
           </a:xfrm>
           <a:prstGeom prst="rect">
             <a:avLst/>
@@ -6801,7 +6881,7 @@
               <a:buNone/>
             </a:pPr>
             <a:r>
-              <a:rPr lang="en-US" sz="1200" dirty="0">
+              <a:rPr lang="en-US" sz="1800" dirty="0">
                 <a:solidFill>
                   <a:srgbClr val="6B7280"/>
                 </a:solidFill>
@@ -6809,124 +6889,9 @@
                 <a:ea typeface="Aptos" pitchFamily="34" charset="-122"/>
                 <a:cs typeface="Aptos" pitchFamily="34" charset="-120"/>
               </a:rPr>
-              <a:t>Make as many sales as possible — survival through size, plus economies of scale.</a:t>
-            </a:r>
-            <a:endParaRPr lang="en-US" sz="1200" dirty="0"/>
-          </a:p>
-        </p:txBody>
-      </p:sp>
-      <p:sp>
-        <p:nvSpPr>
-          <p:cNvPr id="23" name="Shape 17"/>
-          <p:cNvSpPr/>
-          <p:nvPr/>
-        </p:nvSpPr>
-        <p:spPr>
-          <a:xfrm>
-            <a:off x="502920" y="4023360"/>
-            <a:ext cx="11183112" cy="1737360"/>
-          </a:xfrm>
-          <a:prstGeom prst="roundRect">
-            <a:avLst>
-              <a:gd name="adj" fmla="val 4737"/>
-            </a:avLst>
-          </a:prstGeom>
-          <a:solidFill>
-            <a:srgbClr val="EAF4FF"/>
-          </a:solidFill>
-          <a:ln w="12700">
-            <a:solidFill>
-              <a:srgbClr val="D5E3F2"/>
-            </a:solidFill>
-            <a:prstDash val="solid"/>
-          </a:ln>
-          <a:effectLst>
-            <a:outerShdw sx="100000" sy="100000" kx="0" ky="0" algn="bl" rotWithShape="0" blurRad="7.168131233268186e+119" dist="2.0480374952194813e+119" dir="3.3161087958110005e+140">
-              <a:srgbClr val="9AB4CC">
-                <a:alpha val="2.9999999999999996e+144"/>
-              </a:srgbClr>
-            </a:outerShdw>
-          </a:effectLst>
-        </p:spPr>
-      </p:sp>
-      <p:sp>
-        <p:nvSpPr>
-          <p:cNvPr id="24" name="Text 18"/>
-          <p:cNvSpPr/>
-          <p:nvPr/>
-        </p:nvSpPr>
-        <p:spPr>
-          <a:xfrm>
-            <a:off x="731520" y="4206240"/>
-            <a:ext cx="10725912" cy="274320"/>
-          </a:xfrm>
-          <a:prstGeom prst="rect">
-            <a:avLst/>
-          </a:prstGeom>
-          <a:noFill/>
-          <a:ln/>
-        </p:spPr>
-        <p:txBody>
-          <a:bodyPr wrap="square" rtlCol="0" anchor="ctr"/>
-          <a:lstStyle/>
-          <a:p>
-            <a:pPr indent="0" marL="0">
-              <a:buNone/>
-            </a:pPr>
-            <a:r>
-              <a:rPr lang="en-US" sz="1200" b="1" spc="150" kern="0" dirty="0">
-                <a:solidFill>
-                  <a:srgbClr val="0F6CBD"/>
-                </a:solidFill>
-                <a:latin typeface="Aptos" pitchFamily="34" charset="0"/>
-                <a:ea typeface="Aptos" pitchFamily="34" charset="-122"/>
-                <a:cs typeface="Aptos" pitchFamily="34" charset="-120"/>
-              </a:rPr>
-              <a:t>WHEN OBJECTIVES CONFLICT</a:t>
-            </a:r>
-            <a:endParaRPr lang="en-US" sz="1200" dirty="0"/>
-          </a:p>
-        </p:txBody>
-      </p:sp>
-      <p:sp>
-        <p:nvSpPr>
-          <p:cNvPr id="25" name="Text 19"/>
-          <p:cNvSpPr/>
-          <p:nvPr/>
-        </p:nvSpPr>
-        <p:spPr>
-          <a:xfrm>
-            <a:off x="731520" y="4526280"/>
-            <a:ext cx="10725912" cy="1097280"/>
-          </a:xfrm>
-          <a:prstGeom prst="rect">
-            <a:avLst/>
-          </a:prstGeom>
-          <a:noFill/>
-          <a:ln/>
-        </p:spPr>
-        <p:txBody>
-          <a:bodyPr wrap="square" rtlCol="0" anchor="ctr"/>
-          <a:lstStyle/>
-          <a:p>
-            <a:pPr indent="0" marL="0">
-              <a:lnSpc>
-                <a:spcPct val="130000"/>
-              </a:lnSpc>
-              <a:buNone/>
-            </a:pPr>
-            <a:r>
-              <a:rPr lang="en-US" sz="1350" dirty="0">
-                <a:solidFill>
-                  <a:srgbClr val="002050"/>
-                </a:solidFill>
-                <a:latin typeface="Aptos" pitchFamily="34" charset="0"/>
-                <a:ea typeface="Aptos" pitchFamily="34" charset="-122"/>
-                <a:cs typeface="Aptos" pitchFamily="34" charset="-120"/>
-              </a:rPr>
-              <a:t>Growth vs profit: higher short-term sales (e.g. price cuts) reduce short-term profit.  ·  Short-term vs long-term: lower cash flows now while investing in new products, plant and equipment.  ·  Large Stock Exchange investors are often accused of chasing short-term performance instead of investing for the long term.</a:t>
-            </a:r>
-            <a:endParaRPr lang="en-US" sz="1350" dirty="0"/>
+              <a:t>Make as many sales as possible — survival through size and economies of scale.</a:t>
+            </a:r>
+            <a:endParaRPr lang="en-US" sz="1800" dirty="0"/>
           </a:p>
         </p:txBody>
       </p:sp>
@@ -6970,8 +6935,8 @@
         </p:nvSpPr>
         <p:spPr>
           <a:xfrm>
-            <a:off x="502920" y="6473952"/>
-            <a:ext cx="10268712" cy="274320"/>
+            <a:off x="502920" y="6400800"/>
+            <a:ext cx="10268712" cy="347472"/>
           </a:xfrm>
           <a:prstGeom prst="rect">
             <a:avLst/>
@@ -6987,7 +6952,7 @@
               <a:buNone/>
             </a:pPr>
             <a:r>
-              <a:rPr lang="en-US" sz="1000" dirty="0">
+              <a:rPr lang="en-US" sz="1800" dirty="0">
                 <a:solidFill>
                   <a:srgbClr val="6B7280"/>
                 </a:solidFill>
@@ -6995,9 +6960,9 @@
                 <a:ea typeface="Aptos" pitchFamily="34" charset="-122"/>
                 <a:cs typeface="Aptos" pitchFamily="34" charset="-120"/>
               </a:rPr>
-              <a:t>US 114050 — Explain the principles of business and the role of information technology · NQF 5 · 4 credits</a:t>
-            </a:r>
-            <a:endParaRPr lang="en-US" sz="1000" dirty="0"/>
+              <a:t>US 114050 · Principles of business &amp; the role of IT · NQF 5 · 4 credits</a:t>
+            </a:r>
+            <a:endParaRPr lang="en-US" sz="1800" dirty="0"/>
           </a:p>
         </p:txBody>
       </p:sp>
@@ -7009,8 +6974,8 @@
         </p:nvSpPr>
         <p:spPr>
           <a:xfrm>
-            <a:off x="11137392" y="6473952"/>
-            <a:ext cx="548640" cy="274320"/>
+            <a:off x="11045952" y="6400800"/>
+            <a:ext cx="640080" cy="347472"/>
           </a:xfrm>
           <a:prstGeom prst="rect">
             <a:avLst/>
@@ -7026,7 +6991,7 @@
               <a:buNone/>
             </a:pPr>
             <a:r>
-              <a:rPr lang="en-US" sz="1000" dirty="0">
+              <a:rPr lang="en-US" sz="1800" dirty="0">
                 <a:solidFill>
                   <a:srgbClr val="6B7280"/>
                 </a:solidFill>
@@ -7036,7 +7001,7 @@
               </a:rPr>
               <a:t>16</a:t>
             </a:r>
-            <a:endParaRPr lang="en-US" sz="1000" dirty="0"/>
+            <a:endParaRPr lang="en-US" sz="1800" dirty="0"/>
           </a:p>
         </p:txBody>
       </p:sp>
@@ -7068,8 +7033,8 @@
         </p:nvSpPr>
         <p:spPr>
           <a:xfrm>
-            <a:off x="502920" y="274320"/>
-            <a:ext cx="11183112" cy="310896"/>
+            <a:off x="502920" y="237744"/>
+            <a:ext cx="11183112" cy="347472"/>
           </a:xfrm>
           <a:prstGeom prst="rect">
             <a:avLst/>
@@ -7085,7 +7050,7 @@
               <a:buNone/>
             </a:pPr>
             <a:r>
-              <a:rPr lang="en-US" sz="1300" b="1" spc="200" kern="0" dirty="0">
+              <a:rPr lang="en-US" sz="1800" b="1" spc="200" kern="0" dirty="0">
                 <a:solidFill>
                   <a:srgbClr val="0F6CBD"/>
                 </a:solidFill>
@@ -7093,9 +7058,9 @@
                 <a:ea typeface="Aptos" pitchFamily="34" charset="-122"/>
                 <a:cs typeface="Aptos" pitchFamily="34" charset="-120"/>
               </a:rPr>
-              <a:t>ALTERNATIVE AIMS AND OBJECTIVES</a:t>
-            </a:r>
-            <a:endParaRPr lang="en-US" sz="1300" dirty="0"/>
+              <a:t>BUSINESS OBJECTIVES</a:t>
+            </a:r>
+            <a:endParaRPr lang="en-US" sz="1800" dirty="0"/>
           </a:p>
         </p:txBody>
       </p:sp>
@@ -7107,8 +7072,8 @@
         </p:nvSpPr>
         <p:spPr>
           <a:xfrm>
-            <a:off x="502920" y="566928"/>
-            <a:ext cx="11183112" cy="731520"/>
+            <a:off x="502920" y="585216"/>
+            <a:ext cx="11183112" cy="603504"/>
           </a:xfrm>
           <a:prstGeom prst="rect">
             <a:avLst/>
@@ -7132,7 +7097,7 @@
                 <a:ea typeface="Aptos Display" pitchFamily="34" charset="-122"/>
                 <a:cs typeface="Aptos Display" pitchFamily="34" charset="-120"/>
               </a:rPr>
-              <a:t>Not all businesses seek profit or growth</a:t>
+              <a:t>When objectives conflict — and why they change</a:t>
             </a:r>
             <a:endParaRPr lang="en-US" sz="3000" dirty="0"/>
           </a:p>
@@ -7146,12 +7111,179 @@
         </p:nvSpPr>
         <p:spPr>
           <a:xfrm>
-            <a:off x="502920" y="1737360"/>
-            <a:ext cx="2090318" cy="2148840"/>
+            <a:off x="502920" y="1600200"/>
+            <a:ext cx="11183112" cy="2103120"/>
           </a:xfrm>
           <a:prstGeom prst="roundRect">
             <a:avLst>
-              <a:gd name="adj" fmla="val 3937"/>
+              <a:gd name="adj" fmla="val 3913"/>
+            </a:avLst>
+          </a:prstGeom>
+          <a:solidFill>
+            <a:srgbClr val="EAF4FF"/>
+          </a:solidFill>
+          <a:ln w="12700">
+            <a:solidFill>
+              <a:srgbClr val="D5E3F2"/>
+            </a:solidFill>
+            <a:prstDash val="solid"/>
+          </a:ln>
+          <a:effectLst>
+            <a:outerShdw sx="100000" sy="100000" kx="0" ky="0" algn="bl" rotWithShape="0" blurRad="7.168131233268186e+119" dist="2.0480374952194813e+119" dir="3.3161087958110005e+140">
+              <a:srgbClr val="9AB4CC">
+                <a:alpha val="2.9999999999999996e+144"/>
+              </a:srgbClr>
+            </a:outerShdw>
+          </a:effectLst>
+        </p:spPr>
+      </p:sp>
+      <p:sp>
+        <p:nvSpPr>
+          <p:cNvPr id="8" name="Text 6"/>
+          <p:cNvSpPr/>
+          <p:nvPr/>
+        </p:nvSpPr>
+        <p:spPr>
+          <a:xfrm>
+            <a:off x="731520" y="1783080"/>
+            <a:ext cx="10725912" cy="329184"/>
+          </a:xfrm>
+          <a:prstGeom prst="rect">
+            <a:avLst/>
+          </a:prstGeom>
+          <a:noFill/>
+          <a:ln/>
+        </p:spPr>
+        <p:txBody>
+          <a:bodyPr wrap="square" rtlCol="0" anchor="ctr"/>
+          <a:lstStyle/>
+          <a:p>
+            <a:pPr indent="0" marL="0">
+              <a:buNone/>
+            </a:pPr>
+            <a:r>
+              <a:rPr lang="en-US" sz="1800" b="1" spc="100" kern="0" dirty="0">
+                <a:solidFill>
+                  <a:srgbClr val="0F6CBD"/>
+                </a:solidFill>
+                <a:latin typeface="Aptos" pitchFamily="34" charset="0"/>
+                <a:ea typeface="Aptos" pitchFamily="34" charset="-122"/>
+                <a:cs typeface="Aptos" pitchFamily="34" charset="-120"/>
+              </a:rPr>
+              <a:t>WHEN OBJECTIVES CONFLICT</a:t>
+            </a:r>
+            <a:endParaRPr lang="en-US" sz="1800" dirty="0"/>
+          </a:p>
+        </p:txBody>
+      </p:sp>
+      <p:sp>
+        <p:nvSpPr>
+          <p:cNvPr id="9" name="Text 7"/>
+          <p:cNvSpPr/>
+          <p:nvPr/>
+        </p:nvSpPr>
+        <p:spPr>
+          <a:xfrm>
+            <a:off x="731520" y="2176272"/>
+            <a:ext cx="10725912" cy="1417320"/>
+          </a:xfrm>
+          <a:prstGeom prst="rect">
+            <a:avLst/>
+          </a:prstGeom>
+          <a:noFill/>
+          <a:ln/>
+        </p:spPr>
+        <p:txBody>
+          <a:bodyPr wrap="square" rtlCol="0" anchor="t"/>
+          <a:lstStyle/>
+          <a:p>
+            <a:pPr marL="177800" indent="-177800">
+              <a:lnSpc>
+                <a:spcPct val="120000"/>
+              </a:lnSpc>
+              <a:spcAft>
+                <a:spcPts val="800"/>
+              </a:spcAft>
+              <a:buSzPct val="100000"/>
+              <a:buChar char="•"/>
+            </a:pPr>
+            <a:r>
+              <a:rPr lang="en-US" sz="1800" dirty="0">
+                <a:solidFill>
+                  <a:srgbClr val="002050"/>
+                </a:solidFill>
+                <a:latin typeface="Aptos" pitchFamily="34" charset="0"/>
+                <a:ea typeface="Aptos" pitchFamily="34" charset="-122"/>
+                <a:cs typeface="Aptos" pitchFamily="34" charset="-120"/>
+              </a:rPr>
+              <a:t>Growth vs profit: price cuts lift short-term sales but reduce short-term profit.</a:t>
+            </a:r>
+            <a:endParaRPr lang="en-US" sz="1800" dirty="0"/>
+          </a:p>
+          <a:p>
+            <a:pPr marL="177800" indent="-177800">
+              <a:lnSpc>
+                <a:spcPct val="120000"/>
+              </a:lnSpc>
+              <a:spcAft>
+                <a:spcPts val="800"/>
+              </a:spcAft>
+              <a:buSzPct val="100000"/>
+              <a:buChar char="•"/>
+            </a:pPr>
+            <a:r>
+              <a:rPr lang="en-US" sz="1800" dirty="0">
+                <a:solidFill>
+                  <a:srgbClr val="002050"/>
+                </a:solidFill>
+                <a:latin typeface="Aptos" pitchFamily="34" charset="0"/>
+                <a:ea typeface="Aptos" pitchFamily="34" charset="-122"/>
+                <a:cs typeface="Aptos" pitchFamily="34" charset="-120"/>
+              </a:rPr>
+              <a:t>Short term vs long term: cash flow drops now while investing in new products and equipment.</a:t>
+            </a:r>
+            <a:endParaRPr lang="en-US" sz="1800" dirty="0"/>
+          </a:p>
+          <a:p>
+            <a:pPr marL="177800" indent="-177800">
+              <a:lnSpc>
+                <a:spcPct val="120000"/>
+              </a:lnSpc>
+              <a:spcAft>
+                <a:spcPts val="800"/>
+              </a:spcAft>
+              <a:buSzPct val="100000"/>
+              <a:buChar char="•"/>
+            </a:pPr>
+            <a:r>
+              <a:rPr lang="en-US" sz="1800" dirty="0">
+                <a:solidFill>
+                  <a:srgbClr val="002050"/>
+                </a:solidFill>
+                <a:latin typeface="Aptos" pitchFamily="34" charset="0"/>
+                <a:ea typeface="Aptos" pitchFamily="34" charset="-122"/>
+                <a:cs typeface="Aptos" pitchFamily="34" charset="-120"/>
+              </a:rPr>
+              <a:t>Large Stock Exchange investors are often accused of chasing short-term performance.</a:t>
+            </a:r>
+            <a:endParaRPr lang="en-US" sz="1800" dirty="0"/>
+          </a:p>
+        </p:txBody>
+      </p:sp>
+      <p:sp>
+        <p:nvSpPr>
+          <p:cNvPr id="10" name="Shape 8"/>
+          <p:cNvSpPr/>
+          <p:nvPr/>
+        </p:nvSpPr>
+        <p:spPr>
+          <a:xfrm>
+            <a:off x="502920" y="3931920"/>
+            <a:ext cx="11183112" cy="2103120"/>
+          </a:xfrm>
+          <a:prstGeom prst="roundRect">
+            <a:avLst>
+              <a:gd name="adj" fmla="val 3913"/>
             </a:avLst>
           </a:prstGeom>
           <a:solidFill>
@@ -7172,46 +7304,16 @@
           </a:effectLst>
         </p:spPr>
       </p:sp>
-      <p:pic>
-        <p:nvPicPr>
-          <p:cNvPr id="8" name="Image 0" descr="preencoded.png">    </p:cNvPr>
-          <p:cNvPicPr>
-            <a:picLocks noChangeAspect="1"/>
-          </p:cNvPicPr>
-          <p:nvPr/>
-        </p:nvPicPr>
-        <p:blipFill>
-          <a:blip r:embed="rId1">
-            <a:extLst>
-              <a:ext uri="{96DAC541-7B7A-43D3-8B79-37D633B846F1}">
-                <asvg:svgBlip xmlns:asvg="http://schemas.microsoft.com/office/drawing/2016/SVG/main" r:embed="rId2"/>
-              </a:ext>
-            </a:extLst>
-          </a:blip>
-          <a:stretch>
-            <a:fillRect/>
-          </a:stretch>
-        </p:blipFill>
-        <p:spPr>
-          <a:xfrm>
-            <a:off x="667512" y="1901952"/>
-            <a:ext cx="329184" cy="329184"/>
-          </a:xfrm>
-          <a:prstGeom prst="rect">
-            <a:avLst/>
-          </a:prstGeom>
-        </p:spPr>
-      </p:pic>
-      <p:sp>
-        <p:nvSpPr>
-          <p:cNvPr id="9" name="Text 6"/>
-          <p:cNvSpPr/>
-          <p:nvPr/>
-        </p:nvSpPr>
-        <p:spPr>
-          <a:xfrm>
-            <a:off x="1088136" y="1847088"/>
-            <a:ext cx="1340510" cy="566928"/>
+      <p:sp>
+        <p:nvSpPr>
+          <p:cNvPr id="11" name="Text 9"/>
+          <p:cNvSpPr/>
+          <p:nvPr/>
+        </p:nvSpPr>
+        <p:spPr>
+          <a:xfrm>
+            <a:off x="731520" y="4114800"/>
+            <a:ext cx="10725912" cy="329184"/>
           </a:xfrm>
           <a:prstGeom prst="rect">
             <a:avLst/>
@@ -7224,772 +7326,114 @@
           <a:lstStyle/>
           <a:p>
             <a:pPr indent="0" marL="0">
-              <a:lnSpc>
-                <a:spcPct val="100000"/>
-              </a:lnSpc>
-              <a:buNone/>
-            </a:pPr>
-            <a:r>
-              <a:rPr lang="en-US" sz="1250" b="1" dirty="0">
-                <a:solidFill>
-                  <a:srgbClr val="002050"/>
-                </a:solidFill>
-                <a:latin typeface="Aptos Display" pitchFamily="34" charset="0"/>
-                <a:ea typeface="Aptos Display" pitchFamily="34" charset="-122"/>
-                <a:cs typeface="Aptos Display" pitchFamily="34" charset="-120"/>
-              </a:rPr>
-              <a:t>Ethical &amp; socially responsible</a:t>
-            </a:r>
-            <a:endParaRPr lang="en-US" sz="1250" dirty="0"/>
-          </a:p>
-        </p:txBody>
-      </p:sp>
-      <p:sp>
-        <p:nvSpPr>
-          <p:cNvPr id="10" name="Text 7"/>
-          <p:cNvSpPr/>
-          <p:nvPr/>
-        </p:nvSpPr>
-        <p:spPr>
-          <a:xfrm>
-            <a:off x="667512" y="2468880"/>
-            <a:ext cx="1761134" cy="1307592"/>
-          </a:xfrm>
-          <a:prstGeom prst="rect">
-            <a:avLst/>
-          </a:prstGeom>
-          <a:noFill/>
-          <a:ln/>
-        </p:spPr>
-        <p:txBody>
-          <a:bodyPr wrap="square" rtlCol="0" anchor="t"/>
-          <a:lstStyle/>
-          <a:p>
-            <a:pPr indent="0" marL="0">
-              <a:lnSpc>
-                <a:spcPct val="110000"/>
-              </a:lnSpc>
-              <a:buNone/>
-            </a:pPr>
-            <a:r>
-              <a:rPr lang="en-US" sz="1050" dirty="0">
-                <a:solidFill>
-                  <a:srgbClr val="6B7280"/>
+              <a:buNone/>
+            </a:pPr>
+            <a:r>
+              <a:rPr lang="en-US" sz="1800" b="1" spc="100" kern="0" dirty="0">
+                <a:solidFill>
+                  <a:srgbClr val="0F6CBD"/>
                 </a:solidFill>
                 <a:latin typeface="Aptos" pitchFamily="34" charset="0"/>
                 <a:ea typeface="Aptos" pitchFamily="34" charset="-122"/>
                 <a:cs typeface="Aptos" pitchFamily="34" charset="-120"/>
               </a:rPr>
-              <a:t>The Co-op, the Body Shop — objectives based on beliefs about the environment and the less fortunate.</a:t>
-            </a:r>
-            <a:endParaRPr lang="en-US" sz="1050" dirty="0"/>
-          </a:p>
-        </p:txBody>
-      </p:sp>
-      <p:sp>
-        <p:nvSpPr>
-          <p:cNvPr id="11" name="Shape 8"/>
-          <p:cNvSpPr/>
-          <p:nvPr/>
-        </p:nvSpPr>
-        <p:spPr>
-          <a:xfrm>
-            <a:off x="2776118" y="1737360"/>
-            <a:ext cx="2090318" cy="2148840"/>
-          </a:xfrm>
-          <a:prstGeom prst="roundRect">
-            <a:avLst>
-              <a:gd name="adj" fmla="val 3937"/>
-            </a:avLst>
-          </a:prstGeom>
-          <a:solidFill>
-            <a:srgbClr val="FFFFFF"/>
-          </a:solidFill>
-          <a:ln w="12700">
-            <a:solidFill>
-              <a:srgbClr val="D5E3F2"/>
-            </a:solidFill>
-            <a:prstDash val="solid"/>
-          </a:ln>
-          <a:effectLst>
-            <a:outerShdw sx="100000" sy="100000" kx="0" ky="0" algn="bl" rotWithShape="0" blurRad="1.1561478866138256e+128" dist="3.303279676039501e+127" dir="1.1937991664919603e+150">
-              <a:srgbClr val="9AB4CC">
-                <a:alpha val="2.9999999999999997e+154"/>
-              </a:srgbClr>
-            </a:outerShdw>
-          </a:effectLst>
-        </p:spPr>
-      </p:sp>
-      <p:pic>
-        <p:nvPicPr>
-          <p:cNvPr id="12" name="Image 1" descr="preencoded.png">    </p:cNvPr>
-          <p:cNvPicPr>
-            <a:picLocks noChangeAspect="1"/>
-          </p:cNvPicPr>
-          <p:nvPr/>
-        </p:nvPicPr>
-        <p:blipFill>
-          <a:blip r:embed="rId3">
-            <a:extLst>
-              <a:ext uri="{96DAC541-7B7A-43D3-8B79-37D633B846F1}">
-                <asvg:svgBlip xmlns:asvg="http://schemas.microsoft.com/office/drawing/2016/SVG/main" r:embed="rId4"/>
-              </a:ext>
-            </a:extLst>
-          </a:blip>
-          <a:stretch>
-            <a:fillRect/>
-          </a:stretch>
-        </p:blipFill>
-        <p:spPr>
-          <a:xfrm>
-            <a:off x="2940710" y="1901952"/>
-            <a:ext cx="329184" cy="329184"/>
-          </a:xfrm>
-          <a:prstGeom prst="rect">
-            <a:avLst/>
-          </a:prstGeom>
-        </p:spPr>
-      </p:pic>
-      <p:sp>
-        <p:nvSpPr>
-          <p:cNvPr id="13" name="Text 9"/>
-          <p:cNvSpPr/>
-          <p:nvPr/>
-        </p:nvSpPr>
-        <p:spPr>
-          <a:xfrm>
-            <a:off x="3361334" y="1847088"/>
-            <a:ext cx="1340510" cy="566928"/>
-          </a:xfrm>
-          <a:prstGeom prst="rect">
-            <a:avLst/>
-          </a:prstGeom>
-          <a:noFill/>
-          <a:ln/>
-        </p:spPr>
-        <p:txBody>
-          <a:bodyPr wrap="square" rtlCol="0" anchor="ctr"/>
-          <a:lstStyle/>
-          <a:p>
-            <a:pPr indent="0" marL="0">
+              <a:t>WHY OBJECTIVES CHANGE</a:t>
+            </a:r>
+            <a:endParaRPr lang="en-US" sz="1800" dirty="0"/>
+          </a:p>
+        </p:txBody>
+      </p:sp>
+      <p:sp>
+        <p:nvSpPr>
+          <p:cNvPr id="12" name="Text 10"/>
+          <p:cNvSpPr/>
+          <p:nvPr/>
+        </p:nvSpPr>
+        <p:spPr>
+          <a:xfrm>
+            <a:off x="731520" y="4507992"/>
+            <a:ext cx="10725912" cy="1417320"/>
+          </a:xfrm>
+          <a:prstGeom prst="rect">
+            <a:avLst/>
+          </a:prstGeom>
+          <a:noFill/>
+          <a:ln/>
+        </p:spPr>
+        <p:txBody>
+          <a:bodyPr wrap="square" rtlCol="0" anchor="t"/>
+          <a:lstStyle/>
+          <a:p>
+            <a:pPr marL="177800" indent="-177800">
               <a:lnSpc>
-                <a:spcPct val="100000"/>
+                <a:spcPct val="120000"/>
               </a:lnSpc>
-              <a:buNone/>
-            </a:pPr>
-            <a:r>
-              <a:rPr lang="en-US" sz="1250" b="1" dirty="0">
+              <a:spcAft>
+                <a:spcPts val="800"/>
+              </a:spcAft>
+              <a:buSzPct val="100000"/>
+              <a:buChar char="•"/>
+            </a:pPr>
+            <a:r>
+              <a:rPr lang="en-US" sz="1800" dirty="0">
                 <a:solidFill>
                   <a:srgbClr val="002050"/>
-                </a:solidFill>
-                <a:latin typeface="Aptos Display" pitchFamily="34" charset="0"/>
-                <a:ea typeface="Aptos Display" pitchFamily="34" charset="-122"/>
-                <a:cs typeface="Aptos Display" pitchFamily="34" charset="-120"/>
-              </a:rPr>
-              <a:t>Public sector corporations</a:t>
-            </a:r>
-            <a:endParaRPr lang="en-US" sz="1250" dirty="0"/>
-          </a:p>
-        </p:txBody>
-      </p:sp>
-      <p:sp>
-        <p:nvSpPr>
-          <p:cNvPr id="14" name="Text 10"/>
-          <p:cNvSpPr/>
-          <p:nvPr/>
-        </p:nvSpPr>
-        <p:spPr>
-          <a:xfrm>
-            <a:off x="2940710" y="2468880"/>
-            <a:ext cx="1761134" cy="1307592"/>
-          </a:xfrm>
-          <a:prstGeom prst="rect">
-            <a:avLst/>
-          </a:prstGeom>
-          <a:noFill/>
-          <a:ln/>
-        </p:spPr>
-        <p:txBody>
-          <a:bodyPr wrap="square" rtlCol="0" anchor="t"/>
-          <a:lstStyle/>
-          <a:p>
-            <a:pPr indent="0" marL="0">
-              <a:lnSpc>
-                <a:spcPct val="110000"/>
-              </a:lnSpc>
-              <a:buNone/>
-            </a:pPr>
-            <a:r>
-              <a:rPr lang="en-US" sz="1050" dirty="0">
-                <a:solidFill>
-                  <a:srgbClr val="6B7280"/>
                 </a:solidFill>
                 <a:latin typeface="Aptos" pitchFamily="34" charset="0"/>
                 <a:ea typeface="Aptos" pitchFamily="34" charset="-122"/>
                 <a:cs typeface="Aptos" pitchFamily="34" charset="-120"/>
               </a:rPr>
-              <a:t>Profit plus a public service — meeting the needs of the less well off, e.g. cheap and accessible transport.</a:t>
-            </a:r>
-            <a:endParaRPr lang="en-US" sz="1050" dirty="0"/>
-          </a:p>
-        </p:txBody>
-      </p:sp>
-      <p:sp>
-        <p:nvSpPr>
-          <p:cNvPr id="15" name="Shape 11"/>
-          <p:cNvSpPr/>
-          <p:nvPr/>
-        </p:nvSpPr>
-        <p:spPr>
-          <a:xfrm>
-            <a:off x="5049317" y="1737360"/>
-            <a:ext cx="2090318" cy="2148840"/>
-          </a:xfrm>
-          <a:prstGeom prst="roundRect">
-            <a:avLst>
-              <a:gd name="adj" fmla="val 3937"/>
-            </a:avLst>
-          </a:prstGeom>
-          <a:solidFill>
-            <a:srgbClr val="FFFFFF"/>
-          </a:solidFill>
-          <a:ln w="12700">
-            <a:solidFill>
-              <a:srgbClr val="D5E3F2"/>
-            </a:solidFill>
-            <a:prstDash val="solid"/>
-          </a:ln>
-          <a:effectLst>
-            <a:outerShdw sx="100000" sy="100000" kx="0" ky="0" algn="bl" rotWithShape="0" blurRad="1.4683078159995586e+132" dist="4.195165188570166e+131" dir="7.162794998951762e+154">
-              <a:srgbClr val="9AB4CC">
-                <a:alpha val="2.9999999999999998e+159"/>
-              </a:srgbClr>
-            </a:outerShdw>
-          </a:effectLst>
-        </p:spPr>
-      </p:sp>
-      <p:pic>
-        <p:nvPicPr>
-          <p:cNvPr id="16" name="Image 2" descr="preencoded.png">    </p:cNvPr>
-          <p:cNvPicPr>
-            <a:picLocks noChangeAspect="1"/>
-          </p:cNvPicPr>
-          <p:nvPr/>
-        </p:nvPicPr>
-        <p:blipFill>
-          <a:blip r:embed="rId5">
-            <a:extLst>
-              <a:ext uri="{96DAC541-7B7A-43D3-8B79-37D633B846F1}">
-                <asvg:svgBlip xmlns:asvg="http://schemas.microsoft.com/office/drawing/2016/SVG/main" r:embed="rId6"/>
-              </a:ext>
-            </a:extLst>
-          </a:blip>
-          <a:stretch>
-            <a:fillRect/>
-          </a:stretch>
-        </p:blipFill>
-        <p:spPr>
-          <a:xfrm>
-            <a:off x="5213909" y="1901952"/>
-            <a:ext cx="329184" cy="329184"/>
-          </a:xfrm>
-          <a:prstGeom prst="rect">
-            <a:avLst/>
-          </a:prstGeom>
-        </p:spPr>
-      </p:pic>
-      <p:sp>
-        <p:nvSpPr>
-          <p:cNvPr id="17" name="Text 12"/>
-          <p:cNvSpPr/>
-          <p:nvPr/>
-        </p:nvSpPr>
-        <p:spPr>
-          <a:xfrm>
-            <a:off x="5634533" y="1847088"/>
-            <a:ext cx="1340510" cy="566928"/>
-          </a:xfrm>
-          <a:prstGeom prst="rect">
-            <a:avLst/>
-          </a:prstGeom>
-          <a:noFill/>
-          <a:ln/>
-        </p:spPr>
-        <p:txBody>
-          <a:bodyPr wrap="square" rtlCol="0" anchor="ctr"/>
-          <a:lstStyle/>
-          <a:p>
-            <a:pPr indent="0" marL="0">
+              <a:t>An objective is achieved and a new one is needed — survival in year one, profit in year two.</a:t>
+            </a:r>
+            <a:endParaRPr lang="en-US" sz="1800" dirty="0"/>
+          </a:p>
+          <a:p>
+            <a:pPr marL="177800" indent="-177800">
               <a:lnSpc>
-                <a:spcPct val="100000"/>
+                <a:spcPct val="120000"/>
               </a:lnSpc>
-              <a:buNone/>
-            </a:pPr>
-            <a:r>
-              <a:rPr lang="en-US" sz="1250" b="1" dirty="0">
+              <a:spcAft>
+                <a:spcPts val="800"/>
+              </a:spcAft>
+              <a:buSzPct val="100000"/>
+              <a:buChar char="•"/>
+            </a:pPr>
+            <a:r>
+              <a:rPr lang="en-US" sz="1800" dirty="0">
                 <a:solidFill>
                   <a:srgbClr val="002050"/>
-                </a:solidFill>
-                <a:latin typeface="Aptos Display" pitchFamily="34" charset="0"/>
-                <a:ea typeface="Aptos Display" pitchFamily="34" charset="-122"/>
-                <a:cs typeface="Aptos Display" pitchFamily="34" charset="-120"/>
-              </a:rPr>
-              <a:t>Public sector regulators</a:t>
-            </a:r>
-            <a:endParaRPr lang="en-US" sz="1250" dirty="0"/>
-          </a:p>
-        </p:txBody>
-      </p:sp>
-      <p:sp>
-        <p:nvSpPr>
-          <p:cNvPr id="18" name="Text 13"/>
-          <p:cNvSpPr/>
-          <p:nvPr/>
-        </p:nvSpPr>
-        <p:spPr>
-          <a:xfrm>
-            <a:off x="5213909" y="2468880"/>
-            <a:ext cx="1761134" cy="1307592"/>
-          </a:xfrm>
-          <a:prstGeom prst="rect">
-            <a:avLst/>
-          </a:prstGeom>
-          <a:noFill/>
-          <a:ln/>
-        </p:spPr>
-        <p:txBody>
-          <a:bodyPr wrap="square" rtlCol="0" anchor="t"/>
-          <a:lstStyle/>
-          <a:p>
-            <a:pPr indent="0" marL="0">
-              <a:lnSpc>
-                <a:spcPct val="110000"/>
-              </a:lnSpc>
-              <a:buNone/>
-            </a:pPr>
-            <a:r>
-              <a:rPr lang="en-US" sz="1050" dirty="0">
-                <a:solidFill>
-                  <a:srgbClr val="6B7280"/>
                 </a:solidFill>
                 <a:latin typeface="Aptos" pitchFamily="34" charset="0"/>
                 <a:ea typeface="Aptos" pitchFamily="34" charset="-122"/>
                 <a:cs typeface="Aptos" pitchFamily="34" charset="-120"/>
               </a:rPr>
-              <a:t>Monitor or control private sector activities — ensuring businesses comply with the laws laid down.</a:t>
-            </a:r>
-            <a:endParaRPr lang="en-US" sz="1050" dirty="0"/>
-          </a:p>
-        </p:txBody>
-      </p:sp>
-      <p:sp>
-        <p:nvSpPr>
-          <p:cNvPr id="19" name="Shape 14"/>
-          <p:cNvSpPr/>
-          <p:nvPr/>
-        </p:nvSpPr>
-        <p:spPr>
-          <a:xfrm>
-            <a:off x="7322515" y="1737360"/>
-            <a:ext cx="2090318" cy="2148840"/>
-          </a:xfrm>
-          <a:prstGeom prst="roundRect">
-            <a:avLst>
-              <a:gd name="adj" fmla="val 3937"/>
-            </a:avLst>
-          </a:prstGeom>
-          <a:solidFill>
-            <a:srgbClr val="FFFFFF"/>
-          </a:solidFill>
-          <a:ln w="12700">
-            <a:solidFill>
-              <a:srgbClr val="D5E3F2"/>
-            </a:solidFill>
-            <a:prstDash val="solid"/>
-          </a:ln>
-          <a:effectLst>
-            <a:outerShdw sx="100000" sy="100000" kx="0" ky="0" algn="bl" rotWithShape="0" blurRad="1.8647509263194394e+136" dist="5.327859789484111e+135" dir="4.297676999371057e+159">
-              <a:srgbClr val="9AB4CC">
-                <a:alpha val="3e+164"/>
-              </a:srgbClr>
-            </a:outerShdw>
-          </a:effectLst>
-        </p:spPr>
-      </p:sp>
-      <p:pic>
-        <p:nvPicPr>
-          <p:cNvPr id="20" name="Image 3" descr="preencoded.png">    </p:cNvPr>
-          <p:cNvPicPr>
-            <a:picLocks noChangeAspect="1"/>
-          </p:cNvPicPr>
-          <p:nvPr/>
-        </p:nvPicPr>
-        <p:blipFill>
-          <a:blip r:embed="rId7">
-            <a:extLst>
-              <a:ext uri="{96DAC541-7B7A-43D3-8B79-37D633B846F1}">
-                <asvg:svgBlip xmlns:asvg="http://schemas.microsoft.com/office/drawing/2016/SVG/main" r:embed="rId8"/>
-              </a:ext>
-            </a:extLst>
-          </a:blip>
-          <a:stretch>
-            <a:fillRect/>
-          </a:stretch>
-        </p:blipFill>
-        <p:spPr>
-          <a:xfrm>
-            <a:off x="7487107" y="1901952"/>
-            <a:ext cx="329184" cy="329184"/>
-          </a:xfrm>
-          <a:prstGeom prst="rect">
-            <a:avLst/>
-          </a:prstGeom>
-        </p:spPr>
-      </p:pic>
-      <p:sp>
-        <p:nvSpPr>
-          <p:cNvPr id="21" name="Text 15"/>
-          <p:cNvSpPr/>
-          <p:nvPr/>
-        </p:nvSpPr>
-        <p:spPr>
-          <a:xfrm>
-            <a:off x="7907731" y="1847088"/>
-            <a:ext cx="1340510" cy="566928"/>
-          </a:xfrm>
-          <a:prstGeom prst="rect">
-            <a:avLst/>
-          </a:prstGeom>
-          <a:noFill/>
-          <a:ln/>
-        </p:spPr>
-        <p:txBody>
-          <a:bodyPr wrap="square" rtlCol="0" anchor="ctr"/>
-          <a:lstStyle/>
-          <a:p>
-            <a:pPr indent="0" marL="0">
+              <a:t>Competitors launch new products or cut prices, so targets must be revised.</a:t>
+            </a:r>
+            <a:endParaRPr lang="en-US" sz="1800" dirty="0"/>
+          </a:p>
+          <a:p>
+            <a:pPr marL="177800" indent="-177800">
               <a:lnSpc>
-                <a:spcPct val="100000"/>
+                <a:spcPct val="120000"/>
               </a:lnSpc>
-              <a:buNone/>
-            </a:pPr>
-            <a:r>
-              <a:rPr lang="en-US" sz="1250" b="1" dirty="0">
+              <a:spcAft>
+                <a:spcPts val="800"/>
+              </a:spcAft>
+              <a:buSzPct val="100000"/>
+              <a:buChar char="•"/>
+            </a:pPr>
+            <a:r>
+              <a:rPr lang="en-US" sz="1800" dirty="0">
                 <a:solidFill>
                   <a:srgbClr val="002050"/>
-                </a:solidFill>
-                <a:latin typeface="Aptos Display" pitchFamily="34" charset="0"/>
-                <a:ea typeface="Aptos Display" pitchFamily="34" charset="-122"/>
-                <a:cs typeface="Aptos Display" pitchFamily="34" charset="-120"/>
-              </a:rPr>
-              <a:t>Health care &amp; education</a:t>
-            </a:r>
-            <a:endParaRPr lang="en-US" sz="1250" dirty="0"/>
-          </a:p>
-        </p:txBody>
-      </p:sp>
-      <p:sp>
-        <p:nvSpPr>
-          <p:cNvPr id="22" name="Text 16"/>
-          <p:cNvSpPr/>
-          <p:nvPr/>
-        </p:nvSpPr>
-        <p:spPr>
-          <a:xfrm>
-            <a:off x="7487107" y="2468880"/>
-            <a:ext cx="1761134" cy="1307592"/>
-          </a:xfrm>
-          <a:prstGeom prst="rect">
-            <a:avLst/>
-          </a:prstGeom>
-          <a:noFill/>
-          <a:ln/>
-        </p:spPr>
-        <p:txBody>
-          <a:bodyPr wrap="square" rtlCol="0" anchor="t"/>
-          <a:lstStyle/>
-          <a:p>
-            <a:pPr indent="0" marL="0">
-              <a:lnSpc>
-                <a:spcPct val="110000"/>
-              </a:lnSpc>
-              <a:buNone/>
-            </a:pPr>
-            <a:r>
-              <a:rPr lang="en-US" sz="1050" dirty="0">
-                <a:solidFill>
-                  <a:srgbClr val="6B7280"/>
                 </a:solidFill>
                 <a:latin typeface="Aptos" pitchFamily="34" charset="0"/>
                 <a:ea typeface="Aptos" pitchFamily="34" charset="-122"/>
                 <a:cs typeface="Aptos" pitchFamily="34" charset="-120"/>
               </a:rPr>
-              <a:t>Provide a service — most private schools have charitable status; the aim is the enhancement of pupils through education.</a:t>
-            </a:r>
-            <a:endParaRPr lang="en-US" sz="1050" dirty="0"/>
-          </a:p>
-        </p:txBody>
-      </p:sp>
-      <p:sp>
-        <p:nvSpPr>
-          <p:cNvPr id="23" name="Shape 17"/>
-          <p:cNvSpPr/>
-          <p:nvPr/>
-        </p:nvSpPr>
-        <p:spPr>
-          <a:xfrm>
-            <a:off x="9595714" y="1737360"/>
-            <a:ext cx="2090318" cy="2148840"/>
-          </a:xfrm>
-          <a:prstGeom prst="roundRect">
-            <a:avLst>
-              <a:gd name="adj" fmla="val 3937"/>
-            </a:avLst>
-          </a:prstGeom>
-          <a:solidFill>
-            <a:srgbClr val="FFFFFF"/>
-          </a:solidFill>
-          <a:ln w="12700">
-            <a:solidFill>
-              <a:srgbClr val="D5E3F2"/>
-            </a:solidFill>
-            <a:prstDash val="solid"/>
-          </a:ln>
-          <a:effectLst>
-            <a:outerShdw sx="100000" sy="100000" kx="0" ky="0" algn="bl" rotWithShape="0" blurRad="2.368233676425688e+140" dist="6.766381932644821e+139" dir="2.5786061996226343e+164">
-              <a:srgbClr val="9AB4CC">
-                <a:alpha val="3e+169"/>
-              </a:srgbClr>
-            </a:outerShdw>
-          </a:effectLst>
-        </p:spPr>
-      </p:sp>
-      <p:pic>
-        <p:nvPicPr>
-          <p:cNvPr id="24" name="Image 4" descr="preencoded.png">    </p:cNvPr>
-          <p:cNvPicPr>
-            <a:picLocks noChangeAspect="1"/>
-          </p:cNvPicPr>
-          <p:nvPr/>
-        </p:nvPicPr>
-        <p:blipFill>
-          <a:blip r:embed="rId9">
-            <a:extLst>
-              <a:ext uri="{96DAC541-7B7A-43D3-8B79-37D633B846F1}">
-                <asvg:svgBlip xmlns:asvg="http://schemas.microsoft.com/office/drawing/2016/SVG/main" r:embed="rId10"/>
-              </a:ext>
-            </a:extLst>
-          </a:blip>
-          <a:stretch>
-            <a:fillRect/>
-          </a:stretch>
-        </p:blipFill>
-        <p:spPr>
-          <a:xfrm>
-            <a:off x="9760306" y="1901952"/>
-            <a:ext cx="329184" cy="329184"/>
-          </a:xfrm>
-          <a:prstGeom prst="rect">
-            <a:avLst/>
-          </a:prstGeom>
-        </p:spPr>
-      </p:pic>
-      <p:sp>
-        <p:nvSpPr>
-          <p:cNvPr id="25" name="Text 18"/>
-          <p:cNvSpPr/>
-          <p:nvPr/>
-        </p:nvSpPr>
-        <p:spPr>
-          <a:xfrm>
-            <a:off x="10180930" y="1847088"/>
-            <a:ext cx="1340510" cy="566928"/>
-          </a:xfrm>
-          <a:prstGeom prst="rect">
-            <a:avLst/>
-          </a:prstGeom>
-          <a:noFill/>
-          <a:ln/>
-        </p:spPr>
-        <p:txBody>
-          <a:bodyPr wrap="square" rtlCol="0" anchor="ctr"/>
-          <a:lstStyle/>
-          <a:p>
-            <a:pPr indent="0" marL="0">
-              <a:lnSpc>
-                <a:spcPct val="100000"/>
-              </a:lnSpc>
-              <a:buNone/>
-            </a:pPr>
-            <a:r>
-              <a:rPr lang="en-US" sz="1250" b="1" dirty="0">
-                <a:solidFill>
-                  <a:srgbClr val="002050"/>
-                </a:solidFill>
-                <a:latin typeface="Aptos Display" pitchFamily="34" charset="0"/>
-                <a:ea typeface="Aptos Display" pitchFamily="34" charset="-122"/>
-                <a:cs typeface="Aptos Display" pitchFamily="34" charset="-120"/>
-              </a:rPr>
-              <a:t>Charities &amp; voluntary bodies</a:t>
-            </a:r>
-            <a:endParaRPr lang="en-US" sz="1250" dirty="0"/>
-          </a:p>
-        </p:txBody>
-      </p:sp>
-      <p:sp>
-        <p:nvSpPr>
-          <p:cNvPr id="26" name="Text 19"/>
-          <p:cNvSpPr/>
-          <p:nvPr/>
-        </p:nvSpPr>
-        <p:spPr>
-          <a:xfrm>
-            <a:off x="9760306" y="2468880"/>
-            <a:ext cx="1761134" cy="1307592"/>
-          </a:xfrm>
-          <a:prstGeom prst="rect">
-            <a:avLst/>
-          </a:prstGeom>
-          <a:noFill/>
-          <a:ln/>
-        </p:spPr>
-        <p:txBody>
-          <a:bodyPr wrap="square" rtlCol="0" anchor="t"/>
-          <a:lstStyle/>
-          <a:p>
-            <a:pPr indent="0" marL="0">
-              <a:lnSpc>
-                <a:spcPct val="110000"/>
-              </a:lnSpc>
-              <a:buNone/>
-            </a:pPr>
-            <a:r>
-              <a:rPr lang="en-US" sz="1050" dirty="0">
-                <a:solidFill>
-                  <a:srgbClr val="6B7280"/>
-                </a:solidFill>
-                <a:latin typeface="Aptos" pitchFamily="34" charset="0"/>
-                <a:ea typeface="Aptos" pitchFamily="34" charset="-122"/>
-                <a:cs typeface="Aptos" pitchFamily="34" charset="-120"/>
-              </a:rPr>
-              <a:t>Aims and objectives led by the beliefs they stand for.</a:t>
-            </a:r>
-            <a:endParaRPr lang="en-US" sz="1050" dirty="0"/>
-          </a:p>
-        </p:txBody>
-      </p:sp>
-      <p:sp>
-        <p:nvSpPr>
-          <p:cNvPr id="27" name="Shape 20"/>
-          <p:cNvSpPr/>
-          <p:nvPr/>
-        </p:nvSpPr>
-        <p:spPr>
-          <a:xfrm>
-            <a:off x="502920" y="4206240"/>
-            <a:ext cx="11183112" cy="1371600"/>
-          </a:xfrm>
-          <a:prstGeom prst="roundRect">
-            <a:avLst>
-              <a:gd name="adj" fmla="val 6000"/>
-            </a:avLst>
-          </a:prstGeom>
-          <a:solidFill>
-            <a:srgbClr val="EAF4FF"/>
-          </a:solidFill>
-          <a:ln w="12700">
-            <a:solidFill>
-              <a:srgbClr val="D5E3F2"/>
-            </a:solidFill>
-            <a:prstDash val="solid"/>
-          </a:ln>
-          <a:effectLst>
-            <a:outerShdw sx="100000" sy="100000" kx="0" ky="0" algn="bl" rotWithShape="0" blurRad="3.0076567690606238e+144" dist="8.593305054458923e+143" dir="1.5471637197735807e+169">
-              <a:srgbClr val="9AB4CC">
-                <a:alpha val="3e+174"/>
-              </a:srgbClr>
-            </a:outerShdw>
-          </a:effectLst>
-        </p:spPr>
-      </p:sp>
-      <p:sp>
-        <p:nvSpPr>
-          <p:cNvPr id="28" name="Text 21"/>
-          <p:cNvSpPr/>
-          <p:nvPr/>
-        </p:nvSpPr>
-        <p:spPr>
-          <a:xfrm>
-            <a:off x="731520" y="4370832"/>
-            <a:ext cx="10725912" cy="274320"/>
-          </a:xfrm>
-          <a:prstGeom prst="rect">
-            <a:avLst/>
-          </a:prstGeom>
-          <a:noFill/>
-          <a:ln/>
-        </p:spPr>
-        <p:txBody>
-          <a:bodyPr wrap="square" rtlCol="0" anchor="ctr"/>
-          <a:lstStyle/>
-          <a:p>
-            <a:pPr indent="0" marL="0">
-              <a:buNone/>
-            </a:pPr>
-            <a:r>
-              <a:rPr lang="en-US" sz="1200" b="1" spc="150" kern="0" dirty="0">
-                <a:solidFill>
-                  <a:srgbClr val="0F6CBD"/>
-                </a:solidFill>
-                <a:latin typeface="Aptos" pitchFamily="34" charset="0"/>
-                <a:ea typeface="Aptos" pitchFamily="34" charset="-122"/>
-                <a:cs typeface="Aptos" pitchFamily="34" charset="-120"/>
-              </a:rPr>
-              <a:t>WHY OBJECTIVES CHANGE</a:t>
-            </a:r>
-            <a:endParaRPr lang="en-US" sz="1200" dirty="0"/>
-          </a:p>
-        </p:txBody>
-      </p:sp>
-      <p:sp>
-        <p:nvSpPr>
-          <p:cNvPr id="29" name="Text 22"/>
-          <p:cNvSpPr/>
-          <p:nvPr/>
-        </p:nvSpPr>
-        <p:spPr>
-          <a:xfrm>
-            <a:off x="731520" y="4681728"/>
-            <a:ext cx="10725912" cy="777240"/>
-          </a:xfrm>
-          <a:prstGeom prst="rect">
-            <a:avLst/>
-          </a:prstGeom>
-          <a:noFill/>
-          <a:ln/>
-        </p:spPr>
-        <p:txBody>
-          <a:bodyPr wrap="square" rtlCol="0" anchor="ctr"/>
-          <a:lstStyle/>
-          <a:p>
-            <a:pPr indent="0" marL="0">
-              <a:lnSpc>
-                <a:spcPct val="130000"/>
-              </a:lnSpc>
-              <a:buNone/>
-            </a:pPr>
-            <a:r>
-              <a:rPr lang="en-US" sz="1350" dirty="0">
-                <a:solidFill>
-                  <a:srgbClr val="002050"/>
-                </a:solidFill>
-                <a:latin typeface="Aptos" pitchFamily="34" charset="0"/>
-                <a:ea typeface="Aptos" pitchFamily="34" charset="-122"/>
-                <a:cs typeface="Aptos" pitchFamily="34" charset="-120"/>
-              </a:rPr>
-              <a:t>An objective is achieved and a new one is needed (survival year one → profit year two)  ·  competitors launch new products  ·  technology changes product designs, so sales and production targets must change.</a:t>
-            </a:r>
-            <a:endParaRPr lang="en-US" sz="1350" dirty="0"/>
+              <a:t>Technology changes product designs, so sales and production targets change too.</a:t>
+            </a:r>
+            <a:endParaRPr lang="en-US" sz="1800" dirty="0"/>
           </a:p>
         </p:txBody>
       </p:sp>
@@ -8033,8 +7477,8 @@
         </p:nvSpPr>
         <p:spPr>
           <a:xfrm>
-            <a:off x="502920" y="6473952"/>
-            <a:ext cx="10268712" cy="274320"/>
+            <a:off x="502920" y="6400800"/>
+            <a:ext cx="10268712" cy="347472"/>
           </a:xfrm>
           <a:prstGeom prst="rect">
             <a:avLst/>
@@ -8050,7 +7494,7 @@
               <a:buNone/>
             </a:pPr>
             <a:r>
-              <a:rPr lang="en-US" sz="1000" dirty="0">
+              <a:rPr lang="en-US" sz="1800" dirty="0">
                 <a:solidFill>
                   <a:srgbClr val="6B7280"/>
                 </a:solidFill>
@@ -8058,9 +7502,9 @@
                 <a:ea typeface="Aptos" pitchFamily="34" charset="-122"/>
                 <a:cs typeface="Aptos" pitchFamily="34" charset="-120"/>
               </a:rPr>
-              <a:t>US 114050 — Explain the principles of business and the role of information technology · NQF 5 · 4 credits</a:t>
-            </a:r>
-            <a:endParaRPr lang="en-US" sz="1000" dirty="0"/>
+              <a:t>US 114050 · Principles of business &amp; the role of IT · NQF 5 · 4 credits</a:t>
+            </a:r>
+            <a:endParaRPr lang="en-US" sz="1800" dirty="0"/>
           </a:p>
         </p:txBody>
       </p:sp>
@@ -8072,8 +7516,8 @@
         </p:nvSpPr>
         <p:spPr>
           <a:xfrm>
-            <a:off x="11137392" y="6473952"/>
-            <a:ext cx="548640" cy="274320"/>
+            <a:off x="11045952" y="6400800"/>
+            <a:ext cx="640080" cy="347472"/>
           </a:xfrm>
           <a:prstGeom prst="rect">
             <a:avLst/>
@@ -8089,7 +7533,7 @@
               <a:buNone/>
             </a:pPr>
             <a:r>
-              <a:rPr lang="en-US" sz="1000" dirty="0">
+              <a:rPr lang="en-US" sz="1800" dirty="0">
                 <a:solidFill>
                   <a:srgbClr val="6B7280"/>
                 </a:solidFill>
@@ -8099,7 +7543,7 @@
               </a:rPr>
               <a:t>17</a:t>
             </a:r>
-            <a:endParaRPr lang="en-US" sz="1000" dirty="0"/>
+            <a:endParaRPr lang="en-US" sz="1800" dirty="0"/>
           </a:p>
         </p:txBody>
       </p:sp>
@@ -8131,8 +7575,8 @@
         </p:nvSpPr>
         <p:spPr>
           <a:xfrm>
-            <a:off x="502920" y="274320"/>
-            <a:ext cx="11183112" cy="310896"/>
+            <a:off x="502920" y="237744"/>
+            <a:ext cx="11183112" cy="347472"/>
           </a:xfrm>
           <a:prstGeom prst="rect">
             <a:avLst/>
@@ -8148,7 +7592,7 @@
               <a:buNone/>
             </a:pPr>
             <a:r>
-              <a:rPr lang="en-US" sz="1300" b="1" spc="200" kern="0" dirty="0">
+              <a:rPr lang="en-US" sz="1800" b="1" spc="200" kern="0" dirty="0">
                 <a:solidFill>
                   <a:srgbClr val="0F6CBD"/>
                 </a:solidFill>
@@ -8156,9 +7600,9 @@
                 <a:ea typeface="Aptos" pitchFamily="34" charset="-122"/>
                 <a:cs typeface="Aptos" pitchFamily="34" charset="-120"/>
               </a:rPr>
-              <a:t>NOW PROVE IT</a:t>
-            </a:r>
-            <a:endParaRPr lang="en-US" sz="1300" dirty="0"/>
+              <a:t>ALTERNATIVE AIMS AND OBJECTIVES</a:t>
+            </a:r>
+            <a:endParaRPr lang="en-US" sz="1800" dirty="0"/>
           </a:p>
         </p:txBody>
       </p:sp>
@@ -8170,8 +7614,8 @@
         </p:nvSpPr>
         <p:spPr>
           <a:xfrm>
-            <a:off x="502920" y="566928"/>
-            <a:ext cx="11183112" cy="731520"/>
+            <a:off x="502920" y="585216"/>
+            <a:ext cx="11183112" cy="603504"/>
           </a:xfrm>
           <a:prstGeom prst="rect">
             <a:avLst/>
@@ -8195,6 +7639,954 @@
                 <a:ea typeface="Aptos Display" pitchFamily="34" charset="-122"/>
                 <a:cs typeface="Aptos Display" pitchFamily="34" charset="-120"/>
               </a:rPr>
+              <a:t>Not all businesses seek profit or growth</a:t>
+            </a:r>
+            <a:endParaRPr lang="en-US" sz="3000" dirty="0"/>
+          </a:p>
+        </p:txBody>
+      </p:sp>
+      <p:sp>
+        <p:nvSpPr>
+          <p:cNvPr id="7" name="Shape 5"/>
+          <p:cNvSpPr/>
+          <p:nvPr/>
+        </p:nvSpPr>
+        <p:spPr>
+          <a:xfrm>
+            <a:off x="502920" y="1600200"/>
+            <a:ext cx="3605784" cy="2103120"/>
+          </a:xfrm>
+          <a:prstGeom prst="roundRect">
+            <a:avLst>
+              <a:gd name="adj" fmla="val 3913"/>
+            </a:avLst>
+          </a:prstGeom>
+          <a:solidFill>
+            <a:srgbClr val="FFFFFF"/>
+          </a:solidFill>
+          <a:ln w="12700">
+            <a:solidFill>
+              <a:srgbClr val="D5E3F2"/>
+            </a:solidFill>
+            <a:prstDash val="solid"/>
+          </a:ln>
+          <a:effectLst>
+            <a:outerShdw sx="100000" sy="100000" kx="0" ky="0" algn="bl" rotWithShape="0" blurRad="1.1561478866138256e+128" dist="3.303279676039501e+127" dir="1.1937991664919603e+150">
+              <a:srgbClr val="9AB4CC">
+                <a:alpha val="2.9999999999999997e+154"/>
+              </a:srgbClr>
+            </a:outerShdw>
+          </a:effectLst>
+        </p:spPr>
+      </p:sp>
+      <p:pic>
+        <p:nvPicPr>
+          <p:cNvPr id="8" name="Image 0" descr="preencoded.png">    </p:cNvPr>
+          <p:cNvPicPr>
+            <a:picLocks noChangeAspect="1"/>
+          </p:cNvPicPr>
+          <p:nvPr/>
+        </p:nvPicPr>
+        <p:blipFill>
+          <a:blip r:embed="rId1">
+            <a:extLst>
+              <a:ext uri="{96DAC541-7B7A-43D3-8B79-37D633B846F1}">
+                <asvg:svgBlip xmlns:asvg="http://schemas.microsoft.com/office/drawing/2016/SVG/main" r:embed="rId2"/>
+              </a:ext>
+            </a:extLst>
+          </a:blip>
+          <a:stretch>
+            <a:fillRect/>
+          </a:stretch>
+        </p:blipFill>
+        <p:spPr>
+          <a:xfrm>
+            <a:off x="667512" y="1783080"/>
+            <a:ext cx="347472" cy="347472"/>
+          </a:xfrm>
+          <a:prstGeom prst="rect">
+            <a:avLst/>
+          </a:prstGeom>
+        </p:spPr>
+      </p:pic>
+      <p:sp>
+        <p:nvSpPr>
+          <p:cNvPr id="9" name="Text 6"/>
+          <p:cNvSpPr/>
+          <p:nvPr/>
+        </p:nvSpPr>
+        <p:spPr>
+          <a:xfrm>
+            <a:off x="1106424" y="1709928"/>
+            <a:ext cx="2837688" cy="777240"/>
+          </a:xfrm>
+          <a:prstGeom prst="rect">
+            <a:avLst/>
+          </a:prstGeom>
+          <a:noFill/>
+          <a:ln/>
+        </p:spPr>
+        <p:txBody>
+          <a:bodyPr wrap="square" rtlCol="0" anchor="ctr"/>
+          <a:lstStyle/>
+          <a:p>
+            <a:pPr indent="0" marL="0">
+              <a:lnSpc>
+                <a:spcPct val="100000"/>
+              </a:lnSpc>
+              <a:buNone/>
+            </a:pPr>
+            <a:r>
+              <a:rPr lang="en-US" sz="2000" b="1" dirty="0">
+                <a:solidFill>
+                  <a:srgbClr val="002050"/>
+                </a:solidFill>
+                <a:latin typeface="Aptos Display" pitchFamily="34" charset="0"/>
+                <a:ea typeface="Aptos Display" pitchFamily="34" charset="-122"/>
+                <a:cs typeface="Aptos Display" pitchFamily="34" charset="-120"/>
+              </a:rPr>
+              <a:t>Ethical businesses</a:t>
+            </a:r>
+            <a:endParaRPr lang="en-US" sz="2000" dirty="0"/>
+          </a:p>
+        </p:txBody>
+      </p:sp>
+      <p:sp>
+        <p:nvSpPr>
+          <p:cNvPr id="10" name="Text 7"/>
+          <p:cNvSpPr/>
+          <p:nvPr/>
+        </p:nvSpPr>
+        <p:spPr>
+          <a:xfrm>
+            <a:off x="667512" y="2532888"/>
+            <a:ext cx="3276600" cy="1042416"/>
+          </a:xfrm>
+          <a:prstGeom prst="rect">
+            <a:avLst/>
+          </a:prstGeom>
+          <a:noFill/>
+          <a:ln/>
+        </p:spPr>
+        <p:txBody>
+          <a:bodyPr wrap="square" rtlCol="0" anchor="t"/>
+          <a:lstStyle/>
+          <a:p>
+            <a:pPr indent="0" marL="0">
+              <a:lnSpc>
+                <a:spcPct val="110000"/>
+              </a:lnSpc>
+              <a:buNone/>
+            </a:pPr>
+            <a:r>
+              <a:rPr lang="en-US" sz="1800" dirty="0">
+                <a:solidFill>
+                  <a:srgbClr val="6B7280"/>
+                </a:solidFill>
+                <a:latin typeface="Aptos" pitchFamily="34" charset="0"/>
+                <a:ea typeface="Aptos" pitchFamily="34" charset="-122"/>
+                <a:cs typeface="Aptos" pitchFamily="34" charset="-120"/>
+              </a:rPr>
+              <a:t>The Co-op, the Body Shop — led by beliefs about the environment and people.</a:t>
+            </a:r>
+            <a:endParaRPr lang="en-US" sz="1800" dirty="0"/>
+          </a:p>
+        </p:txBody>
+      </p:sp>
+      <p:sp>
+        <p:nvSpPr>
+          <p:cNvPr id="11" name="Shape 8"/>
+          <p:cNvSpPr/>
+          <p:nvPr/>
+        </p:nvSpPr>
+        <p:spPr>
+          <a:xfrm>
+            <a:off x="4291584" y="1600200"/>
+            <a:ext cx="3605784" cy="2103120"/>
+          </a:xfrm>
+          <a:prstGeom prst="roundRect">
+            <a:avLst>
+              <a:gd name="adj" fmla="val 3913"/>
+            </a:avLst>
+          </a:prstGeom>
+          <a:solidFill>
+            <a:srgbClr val="FFFFFF"/>
+          </a:solidFill>
+          <a:ln w="12700">
+            <a:solidFill>
+              <a:srgbClr val="D5E3F2"/>
+            </a:solidFill>
+            <a:prstDash val="solid"/>
+          </a:ln>
+          <a:effectLst>
+            <a:outerShdw sx="100000" sy="100000" kx="0" ky="0" algn="bl" rotWithShape="0" blurRad="1.4683078159995586e+132" dist="4.195165188570166e+131" dir="7.162794998951762e+154">
+              <a:srgbClr val="9AB4CC">
+                <a:alpha val="2.9999999999999998e+159"/>
+              </a:srgbClr>
+            </a:outerShdw>
+          </a:effectLst>
+        </p:spPr>
+      </p:sp>
+      <p:pic>
+        <p:nvPicPr>
+          <p:cNvPr id="12" name="Image 1" descr="preencoded.png">    </p:cNvPr>
+          <p:cNvPicPr>
+            <a:picLocks noChangeAspect="1"/>
+          </p:cNvPicPr>
+          <p:nvPr/>
+        </p:nvPicPr>
+        <p:blipFill>
+          <a:blip r:embed="rId3">
+            <a:extLst>
+              <a:ext uri="{96DAC541-7B7A-43D3-8B79-37D633B846F1}">
+                <asvg:svgBlip xmlns:asvg="http://schemas.microsoft.com/office/drawing/2016/SVG/main" r:embed="rId4"/>
+              </a:ext>
+            </a:extLst>
+          </a:blip>
+          <a:stretch>
+            <a:fillRect/>
+          </a:stretch>
+        </p:blipFill>
+        <p:spPr>
+          <a:xfrm>
+            <a:off x="4456176" y="1783080"/>
+            <a:ext cx="347472" cy="347472"/>
+          </a:xfrm>
+          <a:prstGeom prst="rect">
+            <a:avLst/>
+          </a:prstGeom>
+        </p:spPr>
+      </p:pic>
+      <p:sp>
+        <p:nvSpPr>
+          <p:cNvPr id="13" name="Text 9"/>
+          <p:cNvSpPr/>
+          <p:nvPr/>
+        </p:nvSpPr>
+        <p:spPr>
+          <a:xfrm>
+            <a:off x="4895088" y="1709928"/>
+            <a:ext cx="2837688" cy="777240"/>
+          </a:xfrm>
+          <a:prstGeom prst="rect">
+            <a:avLst/>
+          </a:prstGeom>
+          <a:noFill/>
+          <a:ln/>
+        </p:spPr>
+        <p:txBody>
+          <a:bodyPr wrap="square" rtlCol="0" anchor="ctr"/>
+          <a:lstStyle/>
+          <a:p>
+            <a:pPr indent="0" marL="0">
+              <a:lnSpc>
+                <a:spcPct val="100000"/>
+              </a:lnSpc>
+              <a:buNone/>
+            </a:pPr>
+            <a:r>
+              <a:rPr lang="en-US" sz="2000" b="1" dirty="0">
+                <a:solidFill>
+                  <a:srgbClr val="002050"/>
+                </a:solidFill>
+                <a:latin typeface="Aptos Display" pitchFamily="34" charset="0"/>
+                <a:ea typeface="Aptos Display" pitchFamily="34" charset="-122"/>
+                <a:cs typeface="Aptos Display" pitchFamily="34" charset="-120"/>
+              </a:rPr>
+              <a:t>Public corporations</a:t>
+            </a:r>
+            <a:endParaRPr lang="en-US" sz="2000" dirty="0"/>
+          </a:p>
+        </p:txBody>
+      </p:sp>
+      <p:sp>
+        <p:nvSpPr>
+          <p:cNvPr id="14" name="Text 10"/>
+          <p:cNvSpPr/>
+          <p:nvPr/>
+        </p:nvSpPr>
+        <p:spPr>
+          <a:xfrm>
+            <a:off x="4456176" y="2532888"/>
+            <a:ext cx="3276600" cy="1042416"/>
+          </a:xfrm>
+          <a:prstGeom prst="rect">
+            <a:avLst/>
+          </a:prstGeom>
+          <a:noFill/>
+          <a:ln/>
+        </p:spPr>
+        <p:txBody>
+          <a:bodyPr wrap="square" rtlCol="0" anchor="t"/>
+          <a:lstStyle/>
+          <a:p>
+            <a:pPr indent="0" marL="0">
+              <a:lnSpc>
+                <a:spcPct val="110000"/>
+              </a:lnSpc>
+              <a:buNone/>
+            </a:pPr>
+            <a:r>
+              <a:rPr lang="en-US" sz="1800" dirty="0">
+                <a:solidFill>
+                  <a:srgbClr val="6B7280"/>
+                </a:solidFill>
+                <a:latin typeface="Aptos" pitchFamily="34" charset="0"/>
+                <a:ea typeface="Aptos" pitchFamily="34" charset="-122"/>
+                <a:cs typeface="Aptos" pitchFamily="34" charset="-120"/>
+              </a:rPr>
+              <a:t>Profit plus a public service — e.g. cheap, accessible transport.</a:t>
+            </a:r>
+            <a:endParaRPr lang="en-US" sz="1800" dirty="0"/>
+          </a:p>
+        </p:txBody>
+      </p:sp>
+      <p:sp>
+        <p:nvSpPr>
+          <p:cNvPr id="15" name="Shape 11"/>
+          <p:cNvSpPr/>
+          <p:nvPr/>
+        </p:nvSpPr>
+        <p:spPr>
+          <a:xfrm>
+            <a:off x="8080248" y="1600200"/>
+            <a:ext cx="3605784" cy="2103120"/>
+          </a:xfrm>
+          <a:prstGeom prst="roundRect">
+            <a:avLst>
+              <a:gd name="adj" fmla="val 3913"/>
+            </a:avLst>
+          </a:prstGeom>
+          <a:solidFill>
+            <a:srgbClr val="FFFFFF"/>
+          </a:solidFill>
+          <a:ln w="12700">
+            <a:solidFill>
+              <a:srgbClr val="D5E3F2"/>
+            </a:solidFill>
+            <a:prstDash val="solid"/>
+          </a:ln>
+          <a:effectLst>
+            <a:outerShdw sx="100000" sy="100000" kx="0" ky="0" algn="bl" rotWithShape="0" blurRad="1.8647509263194394e+136" dist="5.327859789484111e+135" dir="4.297676999371057e+159">
+              <a:srgbClr val="9AB4CC">
+                <a:alpha val="3e+164"/>
+              </a:srgbClr>
+            </a:outerShdw>
+          </a:effectLst>
+        </p:spPr>
+      </p:sp>
+      <p:pic>
+        <p:nvPicPr>
+          <p:cNvPr id="16" name="Image 2" descr="preencoded.png">    </p:cNvPr>
+          <p:cNvPicPr>
+            <a:picLocks noChangeAspect="1"/>
+          </p:cNvPicPr>
+          <p:nvPr/>
+        </p:nvPicPr>
+        <p:blipFill>
+          <a:blip r:embed="rId5">
+            <a:extLst>
+              <a:ext uri="{96DAC541-7B7A-43D3-8B79-37D633B846F1}">
+                <asvg:svgBlip xmlns:asvg="http://schemas.microsoft.com/office/drawing/2016/SVG/main" r:embed="rId6"/>
+              </a:ext>
+            </a:extLst>
+          </a:blip>
+          <a:stretch>
+            <a:fillRect/>
+          </a:stretch>
+        </p:blipFill>
+        <p:spPr>
+          <a:xfrm>
+            <a:off x="8244840" y="1783080"/>
+            <a:ext cx="347472" cy="347472"/>
+          </a:xfrm>
+          <a:prstGeom prst="rect">
+            <a:avLst/>
+          </a:prstGeom>
+        </p:spPr>
+      </p:pic>
+      <p:sp>
+        <p:nvSpPr>
+          <p:cNvPr id="17" name="Text 12"/>
+          <p:cNvSpPr/>
+          <p:nvPr/>
+        </p:nvSpPr>
+        <p:spPr>
+          <a:xfrm>
+            <a:off x="8683752" y="1709928"/>
+            <a:ext cx="2837688" cy="777240"/>
+          </a:xfrm>
+          <a:prstGeom prst="rect">
+            <a:avLst/>
+          </a:prstGeom>
+          <a:noFill/>
+          <a:ln/>
+        </p:spPr>
+        <p:txBody>
+          <a:bodyPr wrap="square" rtlCol="0" anchor="ctr"/>
+          <a:lstStyle/>
+          <a:p>
+            <a:pPr indent="0" marL="0">
+              <a:lnSpc>
+                <a:spcPct val="100000"/>
+              </a:lnSpc>
+              <a:buNone/>
+            </a:pPr>
+            <a:r>
+              <a:rPr lang="en-US" sz="2000" b="1" dirty="0">
+                <a:solidFill>
+                  <a:srgbClr val="002050"/>
+                </a:solidFill>
+                <a:latin typeface="Aptos Display" pitchFamily="34" charset="0"/>
+                <a:ea typeface="Aptos Display" pitchFamily="34" charset="-122"/>
+                <a:cs typeface="Aptos Display" pitchFamily="34" charset="-120"/>
+              </a:rPr>
+              <a:t>Public regulators</a:t>
+            </a:r>
+            <a:endParaRPr lang="en-US" sz="2000" dirty="0"/>
+          </a:p>
+        </p:txBody>
+      </p:sp>
+      <p:sp>
+        <p:nvSpPr>
+          <p:cNvPr id="18" name="Text 13"/>
+          <p:cNvSpPr/>
+          <p:nvPr/>
+        </p:nvSpPr>
+        <p:spPr>
+          <a:xfrm>
+            <a:off x="8244840" y="2532888"/>
+            <a:ext cx="3276600" cy="1042416"/>
+          </a:xfrm>
+          <a:prstGeom prst="rect">
+            <a:avLst/>
+          </a:prstGeom>
+          <a:noFill/>
+          <a:ln/>
+        </p:spPr>
+        <p:txBody>
+          <a:bodyPr wrap="square" rtlCol="0" anchor="t"/>
+          <a:lstStyle/>
+          <a:p>
+            <a:pPr indent="0" marL="0">
+              <a:lnSpc>
+                <a:spcPct val="110000"/>
+              </a:lnSpc>
+              <a:buNone/>
+            </a:pPr>
+            <a:r>
+              <a:rPr lang="en-US" sz="1800" dirty="0">
+                <a:solidFill>
+                  <a:srgbClr val="6B7280"/>
+                </a:solidFill>
+                <a:latin typeface="Aptos" pitchFamily="34" charset="0"/>
+                <a:ea typeface="Aptos" pitchFamily="34" charset="-122"/>
+                <a:cs typeface="Aptos" pitchFamily="34" charset="-120"/>
+              </a:rPr>
+              <a:t>Monitor the private sector — ensuring businesses comply with the law.</a:t>
+            </a:r>
+            <a:endParaRPr lang="en-US" sz="1800" dirty="0"/>
+          </a:p>
+        </p:txBody>
+      </p:sp>
+      <p:sp>
+        <p:nvSpPr>
+          <p:cNvPr id="19" name="Shape 14"/>
+          <p:cNvSpPr/>
+          <p:nvPr/>
+        </p:nvSpPr>
+        <p:spPr>
+          <a:xfrm>
+            <a:off x="502920" y="3886200"/>
+            <a:ext cx="3605784" cy="2103120"/>
+          </a:xfrm>
+          <a:prstGeom prst="roundRect">
+            <a:avLst>
+              <a:gd name="adj" fmla="val 3913"/>
+            </a:avLst>
+          </a:prstGeom>
+          <a:solidFill>
+            <a:srgbClr val="FFFFFF"/>
+          </a:solidFill>
+          <a:ln w="12700">
+            <a:solidFill>
+              <a:srgbClr val="D5E3F2"/>
+            </a:solidFill>
+            <a:prstDash val="solid"/>
+          </a:ln>
+          <a:effectLst>
+            <a:outerShdw sx="100000" sy="100000" kx="0" ky="0" algn="bl" rotWithShape="0" blurRad="2.368233676425688e+140" dist="6.766381932644821e+139" dir="2.5786061996226343e+164">
+              <a:srgbClr val="9AB4CC">
+                <a:alpha val="3e+169"/>
+              </a:srgbClr>
+            </a:outerShdw>
+          </a:effectLst>
+        </p:spPr>
+      </p:sp>
+      <p:pic>
+        <p:nvPicPr>
+          <p:cNvPr id="20" name="Image 3" descr="preencoded.png">    </p:cNvPr>
+          <p:cNvPicPr>
+            <a:picLocks noChangeAspect="1"/>
+          </p:cNvPicPr>
+          <p:nvPr/>
+        </p:nvPicPr>
+        <p:blipFill>
+          <a:blip r:embed="rId7">
+            <a:extLst>
+              <a:ext uri="{96DAC541-7B7A-43D3-8B79-37D633B846F1}">
+                <asvg:svgBlip xmlns:asvg="http://schemas.microsoft.com/office/drawing/2016/SVG/main" r:embed="rId8"/>
+              </a:ext>
+            </a:extLst>
+          </a:blip>
+          <a:stretch>
+            <a:fillRect/>
+          </a:stretch>
+        </p:blipFill>
+        <p:spPr>
+          <a:xfrm>
+            <a:off x="667512" y="4069080"/>
+            <a:ext cx="347472" cy="347472"/>
+          </a:xfrm>
+          <a:prstGeom prst="rect">
+            <a:avLst/>
+          </a:prstGeom>
+        </p:spPr>
+      </p:pic>
+      <p:sp>
+        <p:nvSpPr>
+          <p:cNvPr id="21" name="Text 15"/>
+          <p:cNvSpPr/>
+          <p:nvPr/>
+        </p:nvSpPr>
+        <p:spPr>
+          <a:xfrm>
+            <a:off x="1106424" y="3995928"/>
+            <a:ext cx="2837688" cy="777240"/>
+          </a:xfrm>
+          <a:prstGeom prst="rect">
+            <a:avLst/>
+          </a:prstGeom>
+          <a:noFill/>
+          <a:ln/>
+        </p:spPr>
+        <p:txBody>
+          <a:bodyPr wrap="square" rtlCol="0" anchor="ctr"/>
+          <a:lstStyle/>
+          <a:p>
+            <a:pPr indent="0" marL="0">
+              <a:lnSpc>
+                <a:spcPct val="100000"/>
+              </a:lnSpc>
+              <a:buNone/>
+            </a:pPr>
+            <a:r>
+              <a:rPr lang="en-US" sz="2000" b="1" dirty="0">
+                <a:solidFill>
+                  <a:srgbClr val="002050"/>
+                </a:solidFill>
+                <a:latin typeface="Aptos Display" pitchFamily="34" charset="0"/>
+                <a:ea typeface="Aptos Display" pitchFamily="34" charset="-122"/>
+                <a:cs typeface="Aptos Display" pitchFamily="34" charset="-120"/>
+              </a:rPr>
+              <a:t>Health &amp; education</a:t>
+            </a:r>
+            <a:endParaRPr lang="en-US" sz="2000" dirty="0"/>
+          </a:p>
+        </p:txBody>
+      </p:sp>
+      <p:sp>
+        <p:nvSpPr>
+          <p:cNvPr id="22" name="Text 16"/>
+          <p:cNvSpPr/>
+          <p:nvPr/>
+        </p:nvSpPr>
+        <p:spPr>
+          <a:xfrm>
+            <a:off x="667512" y="4818888"/>
+            <a:ext cx="3276600" cy="1042416"/>
+          </a:xfrm>
+          <a:prstGeom prst="rect">
+            <a:avLst/>
+          </a:prstGeom>
+          <a:noFill/>
+          <a:ln/>
+        </p:spPr>
+        <p:txBody>
+          <a:bodyPr wrap="square" rtlCol="0" anchor="t"/>
+          <a:lstStyle/>
+          <a:p>
+            <a:pPr indent="0" marL="0">
+              <a:lnSpc>
+                <a:spcPct val="110000"/>
+              </a:lnSpc>
+              <a:buNone/>
+            </a:pPr>
+            <a:r>
+              <a:rPr lang="en-US" sz="1800" dirty="0">
+                <a:solidFill>
+                  <a:srgbClr val="6B7280"/>
+                </a:solidFill>
+                <a:latin typeface="Aptos" pitchFamily="34" charset="0"/>
+                <a:ea typeface="Aptos" pitchFamily="34" charset="-122"/>
+                <a:cs typeface="Aptos" pitchFamily="34" charset="-120"/>
+              </a:rPr>
+              <a:t>Most private schools have charitable status; the aim is educating pupils.</a:t>
+            </a:r>
+            <a:endParaRPr lang="en-US" sz="1800" dirty="0"/>
+          </a:p>
+        </p:txBody>
+      </p:sp>
+      <p:sp>
+        <p:nvSpPr>
+          <p:cNvPr id="23" name="Shape 17"/>
+          <p:cNvSpPr/>
+          <p:nvPr/>
+        </p:nvSpPr>
+        <p:spPr>
+          <a:xfrm>
+            <a:off x="4291584" y="3886200"/>
+            <a:ext cx="3605784" cy="2103120"/>
+          </a:xfrm>
+          <a:prstGeom prst="roundRect">
+            <a:avLst>
+              <a:gd name="adj" fmla="val 3913"/>
+            </a:avLst>
+          </a:prstGeom>
+          <a:solidFill>
+            <a:srgbClr val="FFFFFF"/>
+          </a:solidFill>
+          <a:ln w="12700">
+            <a:solidFill>
+              <a:srgbClr val="D5E3F2"/>
+            </a:solidFill>
+            <a:prstDash val="solid"/>
+          </a:ln>
+          <a:effectLst>
+            <a:outerShdw sx="100000" sy="100000" kx="0" ky="0" algn="bl" rotWithShape="0" blurRad="3.0076567690606238e+144" dist="8.593305054458923e+143" dir="1.5471637197735807e+169">
+              <a:srgbClr val="9AB4CC">
+                <a:alpha val="3e+174"/>
+              </a:srgbClr>
+            </a:outerShdw>
+          </a:effectLst>
+        </p:spPr>
+      </p:sp>
+      <p:pic>
+        <p:nvPicPr>
+          <p:cNvPr id="24" name="Image 4" descr="preencoded.png">    </p:cNvPr>
+          <p:cNvPicPr>
+            <a:picLocks noChangeAspect="1"/>
+          </p:cNvPicPr>
+          <p:nvPr/>
+        </p:nvPicPr>
+        <p:blipFill>
+          <a:blip r:embed="rId9">
+            <a:extLst>
+              <a:ext uri="{96DAC541-7B7A-43D3-8B79-37D633B846F1}">
+                <asvg:svgBlip xmlns:asvg="http://schemas.microsoft.com/office/drawing/2016/SVG/main" r:embed="rId10"/>
+              </a:ext>
+            </a:extLst>
+          </a:blip>
+          <a:stretch>
+            <a:fillRect/>
+          </a:stretch>
+        </p:blipFill>
+        <p:spPr>
+          <a:xfrm>
+            <a:off x="4456176" y="4069080"/>
+            <a:ext cx="347472" cy="347472"/>
+          </a:xfrm>
+          <a:prstGeom prst="rect">
+            <a:avLst/>
+          </a:prstGeom>
+        </p:spPr>
+      </p:pic>
+      <p:sp>
+        <p:nvSpPr>
+          <p:cNvPr id="25" name="Text 18"/>
+          <p:cNvSpPr/>
+          <p:nvPr/>
+        </p:nvSpPr>
+        <p:spPr>
+          <a:xfrm>
+            <a:off x="4895088" y="3995928"/>
+            <a:ext cx="2837688" cy="777240"/>
+          </a:xfrm>
+          <a:prstGeom prst="rect">
+            <a:avLst/>
+          </a:prstGeom>
+          <a:noFill/>
+          <a:ln/>
+        </p:spPr>
+        <p:txBody>
+          <a:bodyPr wrap="square" rtlCol="0" anchor="ctr"/>
+          <a:lstStyle/>
+          <a:p>
+            <a:pPr indent="0" marL="0">
+              <a:lnSpc>
+                <a:spcPct val="100000"/>
+              </a:lnSpc>
+              <a:buNone/>
+            </a:pPr>
+            <a:r>
+              <a:rPr lang="en-US" sz="2000" b="1" dirty="0">
+                <a:solidFill>
+                  <a:srgbClr val="002050"/>
+                </a:solidFill>
+                <a:latin typeface="Aptos Display" pitchFamily="34" charset="0"/>
+                <a:ea typeface="Aptos Display" pitchFamily="34" charset="-122"/>
+                <a:cs typeface="Aptos Display" pitchFamily="34" charset="-120"/>
+              </a:rPr>
+              <a:t>Charities &amp; voluntary</a:t>
+            </a:r>
+            <a:endParaRPr lang="en-US" sz="2000" dirty="0"/>
+          </a:p>
+        </p:txBody>
+      </p:sp>
+      <p:sp>
+        <p:nvSpPr>
+          <p:cNvPr id="26" name="Text 19"/>
+          <p:cNvSpPr/>
+          <p:nvPr/>
+        </p:nvSpPr>
+        <p:spPr>
+          <a:xfrm>
+            <a:off x="4456176" y="4818888"/>
+            <a:ext cx="3276600" cy="1042416"/>
+          </a:xfrm>
+          <a:prstGeom prst="rect">
+            <a:avLst/>
+          </a:prstGeom>
+          <a:noFill/>
+          <a:ln/>
+        </p:spPr>
+        <p:txBody>
+          <a:bodyPr wrap="square" rtlCol="0" anchor="t"/>
+          <a:lstStyle/>
+          <a:p>
+            <a:pPr indent="0" marL="0">
+              <a:lnSpc>
+                <a:spcPct val="110000"/>
+              </a:lnSpc>
+              <a:buNone/>
+            </a:pPr>
+            <a:r>
+              <a:rPr lang="en-US" sz="1800" dirty="0">
+                <a:solidFill>
+                  <a:srgbClr val="6B7280"/>
+                </a:solidFill>
+                <a:latin typeface="Aptos" pitchFamily="34" charset="0"/>
+                <a:ea typeface="Aptos" pitchFamily="34" charset="-122"/>
+                <a:cs typeface="Aptos" pitchFamily="34" charset="-120"/>
+              </a:rPr>
+              <a:t>Aims and objectives led by the beliefs they stand for.</a:t>
+            </a:r>
+            <a:endParaRPr lang="en-US" sz="1800" dirty="0"/>
+          </a:p>
+        </p:txBody>
+      </p:sp>
+    </p:spTree>
+  </p:cSld>
+  <p:clrMapOvr>
+    <a:masterClrMapping/>
+  </p:clrMapOvr>
+</p:sld>
+</file>
+
+<file path=ppt/slides/slide18.xml><?xml version="1.0" encoding="utf-8"?>
+<p:sld xmlns:a="http://schemas.openxmlformats.org/drawingml/2006/main" xmlns:r="http://schemas.openxmlformats.org/officeDocument/2006/relationships" xmlns:p="http://schemas.openxmlformats.org/presentationml/2006/main">
+  <p:cSld name="Slide 18">
+    <p:bg>
+      <p:bgPr>
+        <a:solidFill>
+          <a:srgbClr val="FFFFFF"/>
+        </a:solidFill>
+      </p:bgPr>
+    </p:bg>
+    <p:spTree>
+      <p:nvGrpSpPr>
+        <p:cNvPr id="1" name=""/>
+        <p:cNvGrpSpPr/>
+        <p:nvPr/>
+      </p:nvGrpSpPr>
+      <p:grpSpPr>
+        <a:xfrm>
+          <a:off x="0" y="0"/>
+          <a:ext cx="0" cy="0"/>
+          <a:chOff x="0" y="0"/>
+          <a:chExt cx="0" cy="0"/>
+        </a:xfrm>
+      </p:grpSpPr>
+      <p:sp>
+        <p:nvSpPr>
+          <p:cNvPr id="2" name="Text 0"/>
+          <p:cNvSpPr/>
+          <p:nvPr/>
+        </p:nvSpPr>
+        <p:spPr>
+          <a:xfrm>
+            <a:off x="502920" y="6400800"/>
+            <a:ext cx="10268712" cy="347472"/>
+          </a:xfrm>
+          <a:prstGeom prst="rect">
+            <a:avLst/>
+          </a:prstGeom>
+          <a:noFill/>
+          <a:ln/>
+        </p:spPr>
+        <p:txBody>
+          <a:bodyPr wrap="square" rtlCol="0" anchor="ctr"/>
+          <a:lstStyle/>
+          <a:p>
+            <a:pPr indent="0" marL="0">
+              <a:buNone/>
+            </a:pPr>
+            <a:r>
+              <a:rPr lang="en-US" sz="1800" dirty="0">
+                <a:solidFill>
+                  <a:srgbClr val="6B7280"/>
+                </a:solidFill>
+                <a:latin typeface="Aptos" pitchFamily="34" charset="0"/>
+                <a:ea typeface="Aptos" pitchFamily="34" charset="-122"/>
+                <a:cs typeface="Aptos" pitchFamily="34" charset="-120"/>
+              </a:rPr>
+              <a:t>US 114050 · Principles of business &amp; the role of IT · NQF 5 · 4 credits</a:t>
+            </a:r>
+            <a:endParaRPr lang="en-US" sz="1800" dirty="0"/>
+          </a:p>
+        </p:txBody>
+      </p:sp>
+      <p:sp>
+        <p:nvSpPr>
+          <p:cNvPr id="3" name="Text 1"/>
+          <p:cNvSpPr/>
+          <p:nvPr/>
+        </p:nvSpPr>
+        <p:spPr>
+          <a:xfrm>
+            <a:off x="11045952" y="6400800"/>
+            <a:ext cx="640080" cy="347472"/>
+          </a:xfrm>
+          <a:prstGeom prst="rect">
+            <a:avLst/>
+          </a:prstGeom>
+          <a:noFill/>
+          <a:ln/>
+        </p:spPr>
+        <p:txBody>
+          <a:bodyPr wrap="square" rtlCol="0" anchor="ctr"/>
+          <a:lstStyle/>
+          <a:p>
+            <a:pPr algn="r" indent="0" marL="0">
+              <a:buNone/>
+            </a:pPr>
+            <a:r>
+              <a:rPr lang="en-US" sz="1800" dirty="0">
+                <a:solidFill>
+                  <a:srgbClr val="6B7280"/>
+                </a:solidFill>
+                <a:latin typeface="Aptos" pitchFamily="34" charset="0"/>
+                <a:ea typeface="Aptos" pitchFamily="34" charset="-122"/>
+                <a:cs typeface="Aptos" pitchFamily="34" charset="-120"/>
+              </a:rPr>
+              <a:t>18</a:t>
+            </a:r>
+            <a:endParaRPr lang="en-US" sz="1800" dirty="0"/>
+          </a:p>
+        </p:txBody>
+      </p:sp>
+      <p:sp>
+        <p:nvSpPr>
+          <p:cNvPr id="4" name="Shape 2"/>
+          <p:cNvSpPr/>
+          <p:nvPr/>
+        </p:nvSpPr>
+        <p:spPr>
+          <a:xfrm>
+            <a:off x="0" y="0"/>
+            <a:ext cx="12188952" cy="82296"/>
+          </a:xfrm>
+          <a:prstGeom prst="rect">
+            <a:avLst/>
+          </a:prstGeom>
+          <a:solidFill>
+            <a:srgbClr val="0F6CBD"/>
+          </a:solidFill>
+          <a:ln/>
+        </p:spPr>
+      </p:sp>
+      <p:sp>
+        <p:nvSpPr>
+          <p:cNvPr id="5" name="Text 3"/>
+          <p:cNvSpPr/>
+          <p:nvPr/>
+        </p:nvSpPr>
+        <p:spPr>
+          <a:xfrm>
+            <a:off x="502920" y="237744"/>
+            <a:ext cx="11183112" cy="347472"/>
+          </a:xfrm>
+          <a:prstGeom prst="rect">
+            <a:avLst/>
+          </a:prstGeom>
+          <a:noFill/>
+          <a:ln/>
+        </p:spPr>
+        <p:txBody>
+          <a:bodyPr wrap="square" rtlCol="0" anchor="ctr"/>
+          <a:lstStyle/>
+          <a:p>
+            <a:pPr indent="0" marL="0">
+              <a:buNone/>
+            </a:pPr>
+            <a:r>
+              <a:rPr lang="en-US" sz="1800" b="1" spc="200" kern="0" dirty="0">
+                <a:solidFill>
+                  <a:srgbClr val="0F6CBD"/>
+                </a:solidFill>
+                <a:latin typeface="Aptos" pitchFamily="34" charset="0"/>
+                <a:ea typeface="Aptos" pitchFamily="34" charset="-122"/>
+                <a:cs typeface="Aptos" pitchFamily="34" charset="-120"/>
+              </a:rPr>
+              <a:t>NOW PROVE IT</a:t>
+            </a:r>
+            <a:endParaRPr lang="en-US" sz="1800" dirty="0"/>
+          </a:p>
+        </p:txBody>
+      </p:sp>
+      <p:sp>
+        <p:nvSpPr>
+          <p:cNvPr id="6" name="Text 4"/>
+          <p:cNvSpPr/>
+          <p:nvPr/>
+        </p:nvSpPr>
+        <p:spPr>
+          <a:xfrm>
+            <a:off x="502920" y="585216"/>
+            <a:ext cx="11183112" cy="603504"/>
+          </a:xfrm>
+          <a:prstGeom prst="rect">
+            <a:avLst/>
+          </a:prstGeom>
+          <a:noFill/>
+          <a:ln/>
+        </p:spPr>
+        <p:txBody>
+          <a:bodyPr wrap="square" rtlCol="0" anchor="ctr"/>
+          <a:lstStyle/>
+          <a:p>
+            <a:pPr indent="0" marL="0">
+              <a:buNone/>
+            </a:pPr>
+            <a:r>
+              <a:rPr lang="en-US" sz="3000" b="1" dirty="0">
+                <a:solidFill>
+                  <a:srgbClr val="002050"/>
+                </a:solidFill>
+                <a:latin typeface="Aptos Display" pitchFamily="34" charset="0"/>
+                <a:ea typeface="Aptos Display" pitchFamily="34" charset="-122"/>
+                <a:cs typeface="Aptos Display" pitchFamily="34" charset="-120"/>
+              </a:rPr>
               <a:t>Your work for this unit standard</a:t>
             </a:r>
             <a:endParaRPr lang="en-US" sz="3000" dirty="0"/>
@@ -8209,8 +8601,8 @@
         </p:nvSpPr>
         <p:spPr>
           <a:xfrm>
-            <a:off x="502920" y="1828800"/>
-            <a:ext cx="2658618" cy="2148840"/>
+            <a:off x="502920" y="1600200"/>
+            <a:ext cx="5500116" cy="2148840"/>
           </a:xfrm>
           <a:prstGeom prst="roundRect">
             <a:avLst>
@@ -8257,8 +8649,8 @@
         </p:blipFill>
         <p:spPr>
           <a:xfrm>
-            <a:off x="667512" y="1993392"/>
-            <a:ext cx="329184" cy="329184"/>
+            <a:off x="667512" y="1783080"/>
+            <a:ext cx="347472" cy="347472"/>
           </a:xfrm>
           <a:prstGeom prst="rect">
             <a:avLst/>
@@ -8273,8 +8665,8 @@
         </p:nvSpPr>
         <p:spPr>
           <a:xfrm>
-            <a:off x="1088136" y="1938528"/>
-            <a:ext cx="1908810" cy="566928"/>
+            <a:off x="1106424" y="1709928"/>
+            <a:ext cx="4732020" cy="777240"/>
           </a:xfrm>
           <a:prstGeom prst="rect">
             <a:avLst/>
@@ -8293,7 +8685,7 @@
               <a:buNone/>
             </a:pPr>
             <a:r>
-              <a:rPr lang="en-US" sz="1350" b="1" dirty="0">
+              <a:rPr lang="en-US" sz="2000" b="1" dirty="0">
                 <a:solidFill>
                   <a:srgbClr val="002050"/>
                 </a:solidFill>
@@ -8303,7 +8695,7 @@
               </a:rPr>
               <a:t>Questioning session</a:t>
             </a:r>
-            <a:endParaRPr lang="en-US" sz="1350" dirty="0"/>
+            <a:endParaRPr lang="en-US" sz="2000" dirty="0"/>
           </a:p>
         </p:txBody>
       </p:sp>
@@ -8315,8 +8707,8 @@
         </p:nvSpPr>
         <p:spPr>
           <a:xfrm>
-            <a:off x="667512" y="2560320"/>
-            <a:ext cx="2329434" cy="1307592"/>
+            <a:off x="667512" y="2532888"/>
+            <a:ext cx="5170932" cy="1088136"/>
           </a:xfrm>
           <a:prstGeom prst="rect">
             <a:avLst/>
@@ -8335,7 +8727,7 @@
               <a:buNone/>
             </a:pPr>
             <a:r>
-              <a:rPr lang="en-US" sz="1150" dirty="0">
+              <a:rPr lang="en-US" sz="1800" dirty="0">
                 <a:solidFill>
                   <a:srgbClr val="6B7280"/>
                 </a:solidFill>
@@ -8343,9 +8735,9 @@
                 <a:ea typeface="Aptos" pitchFamily="34" charset="-122"/>
                 <a:cs typeface="Aptos" pitchFamily="34" charset="-120"/>
               </a:rPr>
-              <a:t>Distinguish the forms of enterprise, outline the common objectives and describe the business environment — typed answers, AI-marked.</a:t>
-            </a:r>
-            <a:endParaRPr lang="en-US" sz="1150" dirty="0"/>
+              <a:t>Distinguish the forms of enterprise and outline the objectives — typed answers, AI-marked.</a:t>
+            </a:r>
+            <a:endParaRPr lang="en-US" sz="1800" dirty="0"/>
           </a:p>
         </p:txBody>
       </p:sp>
@@ -8357,8 +8749,8 @@
         </p:nvSpPr>
         <p:spPr>
           <a:xfrm>
-            <a:off x="3344418" y="1828800"/>
-            <a:ext cx="2658618" cy="2148840"/>
+            <a:off x="6185916" y="1600200"/>
+            <a:ext cx="5500116" cy="2148840"/>
           </a:xfrm>
           <a:prstGeom prst="roundRect">
             <a:avLst>
@@ -8405,8 +8797,8 @@
         </p:blipFill>
         <p:spPr>
           <a:xfrm>
-            <a:off x="3509010" y="1993392"/>
-            <a:ext cx="329184" cy="329184"/>
+            <a:off x="6350508" y="1783080"/>
+            <a:ext cx="347472" cy="347472"/>
           </a:xfrm>
           <a:prstGeom prst="rect">
             <a:avLst/>
@@ -8421,8 +8813,8 @@
         </p:nvSpPr>
         <p:spPr>
           <a:xfrm>
-            <a:off x="3929634" y="1938528"/>
-            <a:ext cx="1908810" cy="566928"/>
+            <a:off x="6789420" y="1709928"/>
+            <a:ext cx="4732020" cy="777240"/>
           </a:xfrm>
           <a:prstGeom prst="rect">
             <a:avLst/>
@@ -8441,7 +8833,7 @@
               <a:buNone/>
             </a:pPr>
             <a:r>
-              <a:rPr lang="en-US" sz="1350" b="1" dirty="0">
+              <a:rPr lang="en-US" sz="2000" b="1" dirty="0">
                 <a:solidFill>
                   <a:srgbClr val="002050"/>
                 </a:solidFill>
@@ -8451,7 +8843,7 @@
               </a:rPr>
               <a:t>Knowledge check quiz</a:t>
             </a:r>
-            <a:endParaRPr lang="en-US" sz="1350" dirty="0"/>
+            <a:endParaRPr lang="en-US" sz="2000" dirty="0"/>
           </a:p>
         </p:txBody>
       </p:sp>
@@ -8463,8 +8855,8 @@
         </p:nvSpPr>
         <p:spPr>
           <a:xfrm>
-            <a:off x="3509010" y="2560320"/>
-            <a:ext cx="2329434" cy="1307592"/>
+            <a:off x="6350508" y="2532888"/>
+            <a:ext cx="5170932" cy="1088136"/>
           </a:xfrm>
           <a:prstGeom prst="rect">
             <a:avLst/>
@@ -8483,7 +8875,7 @@
               <a:buNone/>
             </a:pPr>
             <a:r>
-              <a:rPr lang="en-US" sz="1150" dirty="0">
+              <a:rPr lang="en-US" sz="1800" dirty="0">
                 <a:solidFill>
                   <a:srgbClr val="6B7280"/>
                 </a:solidFill>
@@ -8491,9 +8883,9 @@
                 <a:ea typeface="Aptos" pitchFamily="34" charset="-122"/>
                 <a:cs typeface="Aptos" pitchFamily="34" charset="-120"/>
               </a:rPr>
-              <a:t>10 questions on everything covered in this lesson. 80%+ is competent.</a:t>
-            </a:r>
-            <a:endParaRPr lang="en-US" sz="1150" dirty="0"/>
+              <a:t>10 questions on everything in this lesson. 80%+ is competent.</a:t>
+            </a:r>
+            <a:endParaRPr lang="en-US" sz="1800" dirty="0"/>
           </a:p>
         </p:txBody>
       </p:sp>
@@ -8505,8 +8897,8 @@
         </p:nvSpPr>
         <p:spPr>
           <a:xfrm>
-            <a:off x="6185916" y="1828800"/>
-            <a:ext cx="2658618" cy="2148840"/>
+            <a:off x="502920" y="3931920"/>
+            <a:ext cx="5500116" cy="2148840"/>
           </a:xfrm>
           <a:prstGeom prst="roundRect">
             <a:avLst>
@@ -8553,8 +8945,8 @@
         </p:blipFill>
         <p:spPr>
           <a:xfrm>
-            <a:off x="6350508" y="1993392"/>
-            <a:ext cx="329184" cy="329184"/>
+            <a:off x="667512" y="4114800"/>
+            <a:ext cx="347472" cy="347472"/>
           </a:xfrm>
           <a:prstGeom prst="rect">
             <a:avLst/>
@@ -8569,8 +8961,8 @@
         </p:nvSpPr>
         <p:spPr>
           <a:xfrm>
-            <a:off x="6771132" y="1938528"/>
-            <a:ext cx="1908810" cy="566928"/>
+            <a:off x="1106424" y="4041648"/>
+            <a:ext cx="4732020" cy="777240"/>
           </a:xfrm>
           <a:prstGeom prst="rect">
             <a:avLst/>
@@ -8589,7 +8981,7 @@
               <a:buNone/>
             </a:pPr>
             <a:r>
-              <a:rPr lang="en-US" sz="1350" b="1" dirty="0">
+              <a:rPr lang="en-US" sz="2000" b="1" dirty="0">
                 <a:solidFill>
                   <a:srgbClr val="002050"/>
                 </a:solidFill>
@@ -8599,7 +8991,7 @@
               </a:rPr>
               <a:t>Self assessment</a:t>
             </a:r>
-            <a:endParaRPr lang="en-US" sz="1350" dirty="0"/>
+            <a:endParaRPr lang="en-US" sz="2000" dirty="0"/>
           </a:p>
         </p:txBody>
       </p:sp>
@@ -8611,8 +9003,8 @@
         </p:nvSpPr>
         <p:spPr>
           <a:xfrm>
-            <a:off x="6350508" y="2560320"/>
-            <a:ext cx="2329434" cy="1307592"/>
+            <a:off x="667512" y="4864608"/>
+            <a:ext cx="5170932" cy="1088136"/>
           </a:xfrm>
           <a:prstGeom prst="rect">
             <a:avLst/>
@@ -8631,7 +9023,7 @@
               <a:buNone/>
             </a:pPr>
             <a:r>
-              <a:rPr lang="en-US" sz="1150" dirty="0">
+              <a:rPr lang="en-US" sz="1800" dirty="0">
                 <a:solidFill>
                   <a:srgbClr val="6B7280"/>
                 </a:solidFill>
@@ -8639,9 +9031,9 @@
                 <a:ea typeface="Aptos" pitchFamily="34" charset="-122"/>
                 <a:cs typeface="Aptos" pitchFamily="34" charset="-120"/>
               </a:rPr>
-              <a:t>Be honest with yourself — tick what you can do, write goals for what you can't.</a:t>
-            </a:r>
-            <a:endParaRPr lang="en-US" sz="1150" dirty="0"/>
+              <a:t>Be honest with yourself — tick what you can do, write goals for the rest.</a:t>
+            </a:r>
+            <a:endParaRPr lang="en-US" sz="1800" dirty="0"/>
           </a:p>
         </p:txBody>
       </p:sp>
@@ -8653,8 +9045,8 @@
         </p:nvSpPr>
         <p:spPr>
           <a:xfrm>
-            <a:off x="9027414" y="1828800"/>
-            <a:ext cx="2658618" cy="2148840"/>
+            <a:off x="6185916" y="3931920"/>
+            <a:ext cx="5500116" cy="2148840"/>
           </a:xfrm>
           <a:prstGeom prst="roundRect">
             <a:avLst>
@@ -8701,8 +9093,8 @@
         </p:blipFill>
         <p:spPr>
           <a:xfrm>
-            <a:off x="9192006" y="1993392"/>
-            <a:ext cx="329184" cy="329184"/>
+            <a:off x="6350508" y="4114800"/>
+            <a:ext cx="347472" cy="347472"/>
           </a:xfrm>
           <a:prstGeom prst="rect">
             <a:avLst/>
@@ -8717,8 +9109,8 @@
         </p:nvSpPr>
         <p:spPr>
           <a:xfrm>
-            <a:off x="9612630" y="1938528"/>
-            <a:ext cx="1908810" cy="566928"/>
+            <a:off x="6789420" y="4041648"/>
+            <a:ext cx="4732020" cy="777240"/>
           </a:xfrm>
           <a:prstGeom prst="rect">
             <a:avLst/>
@@ -8737,7 +9129,7 @@
               <a:buNone/>
             </a:pPr>
             <a:r>
-              <a:rPr lang="en-US" sz="1350" b="1" dirty="0">
+              <a:rPr lang="en-US" sz="2000" b="1" dirty="0">
                 <a:solidFill>
                   <a:srgbClr val="002050"/>
                 </a:solidFill>
@@ -8747,7 +9139,7 @@
               </a:rPr>
               <a:t>Logbook project — Research</a:t>
             </a:r>
-            <a:endParaRPr lang="en-US" sz="1350" dirty="0"/>
+            <a:endParaRPr lang="en-US" sz="2000" dirty="0"/>
           </a:p>
         </p:txBody>
       </p:sp>
@@ -8759,8 +9151,8 @@
         </p:nvSpPr>
         <p:spPr>
           <a:xfrm>
-            <a:off x="9192006" y="2560320"/>
-            <a:ext cx="2329434" cy="1307592"/>
+            <a:off x="6350508" y="4864608"/>
+            <a:ext cx="5170932" cy="1088136"/>
           </a:xfrm>
           <a:prstGeom prst="rect">
             <a:avLst/>
@@ -8779,7 +9171,7 @@
               <a:buNone/>
             </a:pPr>
             <a:r>
-              <a:rPr lang="en-US" sz="1150" dirty="0">
+              <a:rPr lang="en-US" sz="1800" dirty="0">
                 <a:solidFill>
                   <a:srgbClr val="6B7280"/>
                 </a:solidFill>
@@ -8787,9 +9179,9 @@
                 <a:ea typeface="Aptos" pitchFamily="34" charset="-122"/>
                 <a:cs typeface="Aptos" pitchFamily="34" charset="-120"/>
               </a:rPr>
-              <a:t>Compile a project demonstrating how IT is used in everyday business. Use articles, pictures and other media. Mark it 114050.</a:t>
-            </a:r>
-            <a:endParaRPr lang="en-US" sz="1150" dirty="0"/>
+              <a:t>Compile a project showing how IT is used in everyday business. Mark it 114050.</a:t>
+            </a:r>
+            <a:endParaRPr lang="en-US" sz="1800" dirty="0"/>
           </a:p>
         </p:txBody>
       </p:sp>
@@ -8801,9 +9193,9 @@
 </p:sld>
 </file>
 
-<file path=ppt/slides/slide18.xml><?xml version="1.0" encoding="utf-8"?>
+<file path=ppt/slides/slide19.xml><?xml version="1.0" encoding="utf-8"?>
 <p:sld xmlns:a="http://schemas.openxmlformats.org/drawingml/2006/main" xmlns:r="http://schemas.openxmlformats.org/officeDocument/2006/relationships" xmlns:p="http://schemas.openxmlformats.org/presentationml/2006/main">
-  <p:cSld name="Slide 18">
+  <p:cSld name="Slide 19">
     <p:bg>
       <p:bgPr>
         <a:solidFill>
@@ -8833,8 +9225,8 @@
         </p:nvSpPr>
         <p:spPr>
           <a:xfrm>
-            <a:off x="502920" y="6473952"/>
-            <a:ext cx="10268712" cy="274320"/>
+            <a:off x="502920" y="6400800"/>
+            <a:ext cx="10268712" cy="347472"/>
           </a:xfrm>
           <a:prstGeom prst="rect">
             <a:avLst/>
@@ -8850,7 +9242,7 @@
               <a:buNone/>
             </a:pPr>
             <a:r>
-              <a:rPr lang="en-US" sz="1000" dirty="0">
+              <a:rPr lang="en-US" sz="1800" dirty="0">
                 <a:solidFill>
                   <a:srgbClr val="6B7280"/>
                 </a:solidFill>
@@ -8858,9 +9250,9 @@
                 <a:ea typeface="Aptos" pitchFamily="34" charset="-122"/>
                 <a:cs typeface="Aptos" pitchFamily="34" charset="-120"/>
               </a:rPr>
-              <a:t>US 114050 — Explain the principles of business and the role of information technology · NQF 5 · 4 credits</a:t>
-            </a:r>
-            <a:endParaRPr lang="en-US" sz="1000" dirty="0"/>
+              <a:t>US 114050 · Principles of business &amp; the role of IT · NQF 5 · 4 credits</a:t>
+            </a:r>
+            <a:endParaRPr lang="en-US" sz="1800" dirty="0"/>
           </a:p>
         </p:txBody>
       </p:sp>
@@ -8872,8 +9264,8 @@
         </p:nvSpPr>
         <p:spPr>
           <a:xfrm>
-            <a:off x="11137392" y="6473952"/>
-            <a:ext cx="548640" cy="274320"/>
+            <a:off x="11045952" y="6400800"/>
+            <a:ext cx="640080" cy="347472"/>
           </a:xfrm>
           <a:prstGeom prst="rect">
             <a:avLst/>
@@ -8889,7 +9281,7 @@
               <a:buNone/>
             </a:pPr>
             <a:r>
-              <a:rPr lang="en-US" sz="1000" dirty="0">
+              <a:rPr lang="en-US" sz="1800" dirty="0">
                 <a:solidFill>
                   <a:srgbClr val="6B7280"/>
                 </a:solidFill>
@@ -8897,9 +9289,9 @@
                 <a:ea typeface="Aptos" pitchFamily="34" charset="-122"/>
                 <a:cs typeface="Aptos" pitchFamily="34" charset="-120"/>
               </a:rPr>
-              <a:t>18</a:t>
-            </a:r>
-            <a:endParaRPr lang="en-US" sz="1000" dirty="0"/>
+              <a:t>19</a:t>
+            </a:r>
+            <a:endParaRPr lang="en-US" sz="1800" dirty="0"/>
           </a:p>
         </p:txBody>
       </p:sp>
@@ -8965,8 +9357,8 @@
         </p:blipFill>
         <p:spPr>
           <a:xfrm>
-            <a:off x="502920" y="1554480"/>
-            <a:ext cx="594360" cy="594360"/>
+            <a:off x="502920" y="1463040"/>
+            <a:ext cx="640080" cy="640080"/>
           </a:xfrm>
           <a:prstGeom prst="rect">
             <a:avLst/>
@@ -8981,7 +9373,7 @@
         </p:nvSpPr>
         <p:spPr>
           <a:xfrm>
-            <a:off x="502920" y="2286000"/>
+            <a:off x="502920" y="2240280"/>
             <a:ext cx="11183112" cy="1280160"/>
           </a:xfrm>
           <a:prstGeom prst="rect">
@@ -9021,7 +9413,7 @@
         <p:spPr>
           <a:xfrm>
             <a:off x="502920" y="3611880"/>
-            <a:ext cx="9326880" cy="914400"/>
+            <a:ext cx="10058400" cy="1280160"/>
           </a:xfrm>
           <a:prstGeom prst="rect">
             <a:avLst/>
@@ -9040,7 +9432,7 @@
               <a:buNone/>
             </a:pPr>
             <a:r>
-              <a:rPr lang="en-US" sz="1700" dirty="0">
+              <a:rPr lang="en-US" sz="1800" dirty="0">
                 <a:solidFill>
                   <a:srgbClr val="B9D6F2"/>
                 </a:solidFill>
@@ -9050,7 +9442,7 @@
               </a:rPr>
               <a:t>Forms of enterprise → researching the idea → franchising → aims, SMART objectives and the environments businesses operate in — the business context every IT systems support professional works inside.</a:t>
             </a:r>
-            <a:endParaRPr lang="en-US" sz="1700" dirty="0"/>
+            <a:endParaRPr lang="en-US" sz="1800" dirty="0"/>
           </a:p>
         </p:txBody>
       </p:sp>
@@ -9062,8 +9454,8 @@
         </p:nvSpPr>
         <p:spPr>
           <a:xfrm>
-            <a:off x="502920" y="6309360"/>
-            <a:ext cx="11183112" cy="320040"/>
+            <a:off x="502920" y="6291072"/>
+            <a:ext cx="11183112" cy="365760"/>
           </a:xfrm>
           <a:prstGeom prst="rect">
             <a:avLst/>
@@ -9079,7 +9471,7 @@
               <a:buNone/>
             </a:pPr>
             <a:r>
-              <a:rPr lang="en-US" sz="1200" dirty="0">
+              <a:rPr lang="en-US" sz="1800" dirty="0">
                 <a:solidFill>
                   <a:srgbClr val="6E93BC"/>
                 </a:solidFill>
@@ -9087,9 +9479,9 @@
                 <a:ea typeface="Aptos" pitchFamily="34" charset="-122"/>
                 <a:cs typeface="Aptos" pitchFamily="34" charset="-120"/>
               </a:rPr>
-              <a:t>US 114050 · National Certificate: Information Technology — System Support · SAQA ID 48573 · ITSS Learn</a:t>
-            </a:r>
-            <a:endParaRPr lang="en-US" sz="1200" dirty="0"/>
+              <a:t>US 114050 · National Certificate: IT — System Support · SAQA ID 48573 · ITSS Learn</a:t>
+            </a:r>
+            <a:endParaRPr lang="en-US" sz="1800" dirty="0"/>
           </a:p>
         </p:txBody>
       </p:sp>
@@ -9133,8 +9525,8 @@
         </p:nvSpPr>
         <p:spPr>
           <a:xfrm>
-            <a:off x="502920" y="6473952"/>
-            <a:ext cx="10268712" cy="274320"/>
+            <a:off x="502920" y="6400800"/>
+            <a:ext cx="10268712" cy="347472"/>
           </a:xfrm>
           <a:prstGeom prst="rect">
             <a:avLst/>
@@ -9150,7 +9542,7 @@
               <a:buNone/>
             </a:pPr>
             <a:r>
-              <a:rPr lang="en-US" sz="1000" dirty="0">
+              <a:rPr lang="en-US" sz="1800" dirty="0">
                 <a:solidFill>
                   <a:srgbClr val="6B7280"/>
                 </a:solidFill>
@@ -9158,9 +9550,9 @@
                 <a:ea typeface="Aptos" pitchFamily="34" charset="-122"/>
                 <a:cs typeface="Aptos" pitchFamily="34" charset="-120"/>
               </a:rPr>
-              <a:t>US 114050 — Explain the principles of business and the role of information technology · NQF 5 · 4 credits</a:t>
-            </a:r>
-            <a:endParaRPr lang="en-US" sz="1000" dirty="0"/>
+              <a:t>US 114050 · Principles of business &amp; the role of IT · NQF 5 · 4 credits</a:t>
+            </a:r>
+            <a:endParaRPr lang="en-US" sz="1800" dirty="0"/>
           </a:p>
         </p:txBody>
       </p:sp>
@@ -9172,8 +9564,8 @@
         </p:nvSpPr>
         <p:spPr>
           <a:xfrm>
-            <a:off x="11137392" y="6473952"/>
-            <a:ext cx="548640" cy="274320"/>
+            <a:off x="11045952" y="6400800"/>
+            <a:ext cx="640080" cy="347472"/>
           </a:xfrm>
           <a:prstGeom prst="rect">
             <a:avLst/>
@@ -9189,7 +9581,7 @@
               <a:buNone/>
             </a:pPr>
             <a:r>
-              <a:rPr lang="en-US" sz="1000" dirty="0">
+              <a:rPr lang="en-US" sz="1800" dirty="0">
                 <a:solidFill>
                   <a:srgbClr val="6B7280"/>
                 </a:solidFill>
@@ -9199,7 +9591,7 @@
               </a:rPr>
               <a:t>2</a:t>
             </a:r>
-            <a:endParaRPr lang="en-US" sz="1000" dirty="0"/>
+            <a:endParaRPr lang="en-US" sz="1800" dirty="0"/>
           </a:p>
         </p:txBody>
       </p:sp>
@@ -9231,8 +9623,8 @@
         </p:nvSpPr>
         <p:spPr>
           <a:xfrm>
-            <a:off x="502920" y="274320"/>
-            <a:ext cx="11183112" cy="310896"/>
+            <a:off x="502920" y="237744"/>
+            <a:ext cx="11183112" cy="347472"/>
           </a:xfrm>
           <a:prstGeom prst="rect">
             <a:avLst/>
@@ -9248,7 +9640,7 @@
               <a:buNone/>
             </a:pPr>
             <a:r>
-              <a:rPr lang="en-US" sz="1300" b="1" spc="200" kern="0" dirty="0">
+              <a:rPr lang="en-US" sz="1800" b="1" spc="200" kern="0" dirty="0">
                 <a:solidFill>
                   <a:srgbClr val="0F6CBD"/>
                 </a:solidFill>
@@ -9258,7 +9650,7 @@
               </a:rPr>
               <a:t>SPECIFIC OUTCOMES &amp; ASSESSMENT CRITERIA</a:t>
             </a:r>
-            <a:endParaRPr lang="en-US" sz="1300" dirty="0"/>
+            <a:endParaRPr lang="en-US" sz="1800" dirty="0"/>
           </a:p>
         </p:txBody>
       </p:sp>
@@ -9270,8 +9662,8 @@
         </p:nvSpPr>
         <p:spPr>
           <a:xfrm>
-            <a:off x="502920" y="566928"/>
-            <a:ext cx="11183112" cy="731520"/>
+            <a:off x="502920" y="585216"/>
+            <a:ext cx="11183112" cy="603504"/>
           </a:xfrm>
           <a:prstGeom prst="rect">
             <a:avLst/>
@@ -9309,8 +9701,8 @@
         </p:nvSpPr>
         <p:spPr>
           <a:xfrm>
-            <a:off x="502920" y="1298448"/>
-            <a:ext cx="11183112" cy="548640"/>
+            <a:off x="502920" y="1280160"/>
+            <a:ext cx="11183112" cy="621792"/>
           </a:xfrm>
           <a:prstGeom prst="rect">
             <a:avLst/>
@@ -9329,7 +9721,7 @@
               <a:buNone/>
             </a:pPr>
             <a:r>
-              <a:rPr lang="en-US" sz="1600" dirty="0">
+              <a:rPr lang="en-US" sz="1800" dirty="0">
                 <a:solidFill>
                   <a:srgbClr val="6B7280"/>
                 </a:solidFill>
@@ -9337,9 +9729,9 @@
                 <a:ea typeface="Aptos" pitchFamily="34" charset="-122"/>
                 <a:cs typeface="Aptos" pitchFamily="34" charset="-120"/>
               </a:rPr>
-              <a:t>Specific outcome: Explain the principles of business and the role of information technology. You will be assessed against these criteria:</a:t>
-            </a:r>
-            <a:endParaRPr lang="en-US" sz="1600" dirty="0"/>
+              <a:t>Specific outcome: explain the principles of business and the role of information technology. You will be assessed against these criteria:</a:t>
+            </a:r>
+            <a:endParaRPr lang="en-US" sz="1800" dirty="0"/>
           </a:p>
         </p:txBody>
       </p:sp>
@@ -9351,12 +9743,12 @@
         </p:nvSpPr>
         <p:spPr>
           <a:xfrm>
-            <a:off x="502920" y="2103120"/>
-            <a:ext cx="3605784" cy="1920240"/>
+            <a:off x="502920" y="2057400"/>
+            <a:ext cx="3605784" cy="2743200"/>
           </a:xfrm>
           <a:prstGeom prst="roundRect">
             <a:avLst>
-              <a:gd name="adj" fmla="val 4286"/>
+              <a:gd name="adj" fmla="val 3000"/>
             </a:avLst>
           </a:prstGeom>
           <a:solidFill>
@@ -9399,8 +9791,8 @@
         </p:blipFill>
         <p:spPr>
           <a:xfrm>
-            <a:off x="667512" y="2267712"/>
-            <a:ext cx="329184" cy="329184"/>
+            <a:off x="667512" y="2240280"/>
+            <a:ext cx="347472" cy="347472"/>
           </a:xfrm>
           <a:prstGeom prst="rect">
             <a:avLst/>
@@ -9415,8 +9807,8 @@
         </p:nvSpPr>
         <p:spPr>
           <a:xfrm>
-            <a:off x="1088136" y="2212848"/>
-            <a:ext cx="2855976" cy="566928"/>
+            <a:off x="1106424" y="2167128"/>
+            <a:ext cx="2837688" cy="777240"/>
           </a:xfrm>
           <a:prstGeom prst="rect">
             <a:avLst/>
@@ -9435,7 +9827,7 @@
               <a:buNone/>
             </a:pPr>
             <a:r>
-              <a:rPr lang="en-US" sz="1500" b="1" dirty="0">
+              <a:rPr lang="en-US" sz="2000" b="1" dirty="0">
                 <a:solidFill>
                   <a:srgbClr val="002050"/>
                 </a:solidFill>
@@ -9445,7 +9837,7 @@
               </a:rPr>
               <a:t>Types of business organisations</a:t>
             </a:r>
-            <a:endParaRPr lang="en-US" sz="1500" dirty="0"/>
+            <a:endParaRPr lang="en-US" sz="2000" dirty="0"/>
           </a:p>
         </p:txBody>
       </p:sp>
@@ -9457,8 +9849,8 @@
         </p:nvSpPr>
         <p:spPr>
           <a:xfrm>
-            <a:off x="667512" y="2834640"/>
-            <a:ext cx="3276600" cy="1078992"/>
+            <a:off x="667512" y="2990088"/>
+            <a:ext cx="3276600" cy="1682496"/>
           </a:xfrm>
           <a:prstGeom prst="rect">
             <a:avLst/>
@@ -9477,7 +9869,7 @@
               <a:buNone/>
             </a:pPr>
             <a:r>
-              <a:rPr lang="en-US" sz="1300" dirty="0">
+              <a:rPr lang="en-US" sz="1800" dirty="0">
                 <a:solidFill>
                   <a:srgbClr val="6B7280"/>
                 </a:solidFill>
@@ -9485,9 +9877,9 @@
                 <a:ea typeface="Aptos" pitchFamily="34" charset="-122"/>
                 <a:cs typeface="Aptos" pitchFamily="34" charset="-120"/>
               </a:rPr>
-              <a:t>The description distinguishes types of business organisations — Sole trader, Partnership, Limited Co, Private Co, Public Ltd Company.</a:t>
-            </a:r>
-            <a:endParaRPr lang="en-US" sz="1300" dirty="0"/>
+              <a:t>Distinguish sole trader, partnership, limited, private and public companies.</a:t>
+            </a:r>
+            <a:endParaRPr lang="en-US" sz="1800" dirty="0"/>
           </a:p>
         </p:txBody>
       </p:sp>
@@ -9499,12 +9891,12 @@
         </p:nvSpPr>
         <p:spPr>
           <a:xfrm>
-            <a:off x="4291584" y="2103120"/>
-            <a:ext cx="3605784" cy="1920240"/>
+            <a:off x="4291584" y="2057400"/>
+            <a:ext cx="3605784" cy="2743200"/>
           </a:xfrm>
           <a:prstGeom prst="roundRect">
             <a:avLst>
-              <a:gd name="adj" fmla="val 4286"/>
+              <a:gd name="adj" fmla="val 3000"/>
             </a:avLst>
           </a:prstGeom>
           <a:solidFill>
@@ -9547,8 +9939,8 @@
         </p:blipFill>
         <p:spPr>
           <a:xfrm>
-            <a:off x="4456176" y="2267712"/>
-            <a:ext cx="329184" cy="329184"/>
+            <a:off x="4456176" y="2240280"/>
+            <a:ext cx="347472" cy="347472"/>
           </a:xfrm>
           <a:prstGeom prst="rect">
             <a:avLst/>
@@ -9563,8 +9955,8 @@
         </p:nvSpPr>
         <p:spPr>
           <a:xfrm>
-            <a:off x="4876800" y="2212848"/>
-            <a:ext cx="2855976" cy="566928"/>
+            <a:off x="4895088" y="2167128"/>
+            <a:ext cx="2837688" cy="777240"/>
           </a:xfrm>
           <a:prstGeom prst="rect">
             <a:avLst/>
@@ -9583,7 +9975,7 @@
               <a:buNone/>
             </a:pPr>
             <a:r>
-              <a:rPr lang="en-US" sz="1500" b="1" dirty="0">
+              <a:rPr lang="en-US" sz="2000" b="1" dirty="0">
                 <a:solidFill>
                   <a:srgbClr val="002050"/>
                 </a:solidFill>
@@ -9593,7 +9985,7 @@
               </a:rPr>
               <a:t>Common objectives</a:t>
             </a:r>
-            <a:endParaRPr lang="en-US" sz="1500" dirty="0"/>
+            <a:endParaRPr lang="en-US" sz="2000" dirty="0"/>
           </a:p>
         </p:txBody>
       </p:sp>
@@ -9605,8 +9997,8 @@
         </p:nvSpPr>
         <p:spPr>
           <a:xfrm>
-            <a:off x="4456176" y="2834640"/>
-            <a:ext cx="3276600" cy="1078992"/>
+            <a:off x="4456176" y="2990088"/>
+            <a:ext cx="3276600" cy="1682496"/>
           </a:xfrm>
           <a:prstGeom prst="rect">
             <a:avLst/>
@@ -9625,7 +10017,7 @@
               <a:buNone/>
             </a:pPr>
             <a:r>
-              <a:rPr lang="en-US" sz="1300" dirty="0">
+              <a:rPr lang="en-US" sz="1800" dirty="0">
                 <a:solidFill>
                   <a:srgbClr val="6B7280"/>
                 </a:solidFill>
@@ -9633,9 +10025,9 @@
                 <a:ea typeface="Aptos" pitchFamily="34" charset="-122"/>
                 <a:cs typeface="Aptos" pitchFamily="34" charset="-120"/>
               </a:rPr>
-              <a:t>The description outlines the common objectives within which businesses operate — buying &amp; selling activity, profit, charity, social clubs.</a:t>
-            </a:r>
-            <a:endParaRPr lang="en-US" sz="1300" dirty="0"/>
+              <a:t>Outline the objectives businesses pursue — buying &amp; selling, profit, charity, social clubs.</a:t>
+            </a:r>
+            <a:endParaRPr lang="en-US" sz="1800" dirty="0"/>
           </a:p>
         </p:txBody>
       </p:sp>
@@ -9647,12 +10039,12 @@
         </p:nvSpPr>
         <p:spPr>
           <a:xfrm>
-            <a:off x="8080248" y="2103120"/>
-            <a:ext cx="3605784" cy="1920240"/>
+            <a:off x="8080248" y="2057400"/>
+            <a:ext cx="3605784" cy="2743200"/>
           </a:xfrm>
           <a:prstGeom prst="roundRect">
             <a:avLst>
-              <a:gd name="adj" fmla="val 4286"/>
+              <a:gd name="adj" fmla="val 3000"/>
             </a:avLst>
           </a:prstGeom>
           <a:solidFill>
@@ -9695,8 +10087,8 @@
         </p:blipFill>
         <p:spPr>
           <a:xfrm>
-            <a:off x="8244840" y="2267712"/>
-            <a:ext cx="329184" cy="329184"/>
+            <a:off x="8244840" y="2240280"/>
+            <a:ext cx="347472" cy="347472"/>
           </a:xfrm>
           <a:prstGeom prst="rect">
             <a:avLst/>
@@ -9711,8 +10103,8 @@
         </p:nvSpPr>
         <p:spPr>
           <a:xfrm>
-            <a:off x="8665464" y="2212848"/>
-            <a:ext cx="2855976" cy="566928"/>
+            <a:off x="8683752" y="2167128"/>
+            <a:ext cx="2837688" cy="777240"/>
           </a:xfrm>
           <a:prstGeom prst="rect">
             <a:avLst/>
@@ -9731,7 +10123,7 @@
               <a:buNone/>
             </a:pPr>
             <a:r>
-              <a:rPr lang="en-US" sz="1500" b="1" dirty="0">
+              <a:rPr lang="en-US" sz="2000" b="1" dirty="0">
                 <a:solidFill>
                   <a:srgbClr val="002050"/>
                 </a:solidFill>
@@ -9741,7 +10133,7 @@
               </a:rPr>
               <a:t>Business environment</a:t>
             </a:r>
-            <a:endParaRPr lang="en-US" sz="1500" dirty="0"/>
+            <a:endParaRPr lang="en-US" sz="2000" dirty="0"/>
           </a:p>
         </p:txBody>
       </p:sp>
@@ -9753,8 +10145,8 @@
         </p:nvSpPr>
         <p:spPr>
           <a:xfrm>
-            <a:off x="8244840" y="2834640"/>
-            <a:ext cx="3276600" cy="1078992"/>
+            <a:off x="8244840" y="2990088"/>
+            <a:ext cx="3276600" cy="1682496"/>
           </a:xfrm>
           <a:prstGeom prst="rect">
             <a:avLst/>
@@ -9773,7 +10165,7 @@
               <a:buNone/>
             </a:pPr>
             <a:r>
-              <a:rPr lang="en-US" sz="1300" dirty="0">
+              <a:rPr lang="en-US" sz="1800" dirty="0">
                 <a:solidFill>
                   <a:srgbClr val="6B7280"/>
                 </a:solidFill>
@@ -9781,9 +10173,9 @@
                 <a:ea typeface="Aptos" pitchFamily="34" charset="-122"/>
                 <a:cs typeface="Aptos" pitchFamily="34" charset="-120"/>
               </a:rPr>
-              <a:t>The description outlines the environment within which businesses operate.</a:t>
-            </a:r>
-            <a:endParaRPr lang="en-US" sz="1300" dirty="0"/>
+              <a:t>Outline the environment within which businesses operate.</a:t>
+            </a:r>
+            <a:endParaRPr lang="en-US" sz="1800" dirty="0"/>
           </a:p>
         </p:txBody>
       </p:sp>
@@ -9795,12 +10187,12 @@
         </p:nvSpPr>
         <p:spPr>
           <a:xfrm>
-            <a:off x="502920" y="4572000"/>
-            <a:ext cx="11183112" cy="566928"/>
+            <a:off x="502920" y="5074920"/>
+            <a:ext cx="11183112" cy="777240"/>
           </a:xfrm>
           <a:prstGeom prst="roundRect">
             <a:avLst>
-              <a:gd name="adj" fmla="val 14516"/>
+              <a:gd name="adj" fmla="val 10588"/>
             </a:avLst>
           </a:prstGeom>
           <a:solidFill>
@@ -9843,8 +10235,8 @@
         </p:blipFill>
         <p:spPr>
           <a:xfrm>
-            <a:off x="704088" y="4709160"/>
-            <a:ext cx="274320" cy="274320"/>
+            <a:off x="704088" y="5285232"/>
+            <a:ext cx="347472" cy="347472"/>
           </a:xfrm>
           <a:prstGeom prst="rect">
             <a:avLst/>
@@ -9859,8 +10251,8 @@
         </p:nvSpPr>
         <p:spPr>
           <a:xfrm>
-            <a:off x="1069848" y="4572000"/>
-            <a:ext cx="10378440" cy="566928"/>
+            <a:off x="1161288" y="5074920"/>
+            <a:ext cx="10287000" cy="777240"/>
           </a:xfrm>
           <a:prstGeom prst="rect">
             <a:avLst/>
@@ -9873,10 +10265,13 @@
           <a:lstStyle/>
           <a:p>
             <a:pPr indent="0" marL="0">
-              <a:buNone/>
-            </a:pPr>
-            <a:r>
-              <a:rPr lang="en-US" sz="1350" dirty="0">
+              <a:lnSpc>
+                <a:spcPct val="110000"/>
+              </a:lnSpc>
+              <a:buNone/>
+            </a:pPr>
+            <a:r>
+              <a:rPr lang="en-US" sz="1800" dirty="0">
                 <a:solidFill>
                   <a:srgbClr val="002050"/>
                 </a:solidFill>
@@ -9886,7 +10281,7 @@
               </a:rPr>
               <a:t>Choose your own business setup as you work through this lesson — every form of enterprise you meet is a candidate.</a:t>
             </a:r>
-            <a:endParaRPr lang="en-US" sz="1350" dirty="0"/>
+            <a:endParaRPr lang="en-US" sz="1800" dirty="0"/>
           </a:p>
         </p:txBody>
       </p:sp>
@@ -9930,8 +10325,8 @@
         </p:nvSpPr>
         <p:spPr>
           <a:xfrm>
-            <a:off x="502920" y="6473952"/>
-            <a:ext cx="10268712" cy="274320"/>
+            <a:off x="502920" y="6400800"/>
+            <a:ext cx="10268712" cy="347472"/>
           </a:xfrm>
           <a:prstGeom prst="rect">
             <a:avLst/>
@@ -9947,7 +10342,7 @@
               <a:buNone/>
             </a:pPr>
             <a:r>
-              <a:rPr lang="en-US" sz="1000" dirty="0">
+              <a:rPr lang="en-US" sz="1800" dirty="0">
                 <a:solidFill>
                   <a:srgbClr val="6B7280"/>
                 </a:solidFill>
@@ -9955,9 +10350,9 @@
                 <a:ea typeface="Aptos" pitchFamily="34" charset="-122"/>
                 <a:cs typeface="Aptos" pitchFamily="34" charset="-120"/>
               </a:rPr>
-              <a:t>US 114050 — Explain the principles of business and the role of information technology · NQF 5 · 4 credits</a:t>
-            </a:r>
-            <a:endParaRPr lang="en-US" sz="1000" dirty="0"/>
+              <a:t>US 114050 · Principles of business &amp; the role of IT · NQF 5 · 4 credits</a:t>
+            </a:r>
+            <a:endParaRPr lang="en-US" sz="1800" dirty="0"/>
           </a:p>
         </p:txBody>
       </p:sp>
@@ -9969,8 +10364,8 @@
         </p:nvSpPr>
         <p:spPr>
           <a:xfrm>
-            <a:off x="11137392" y="6473952"/>
-            <a:ext cx="548640" cy="274320"/>
+            <a:off x="11045952" y="6400800"/>
+            <a:ext cx="640080" cy="347472"/>
           </a:xfrm>
           <a:prstGeom prst="rect">
             <a:avLst/>
@@ -9986,7 +10381,7 @@
               <a:buNone/>
             </a:pPr>
             <a:r>
-              <a:rPr lang="en-US" sz="1000" dirty="0">
+              <a:rPr lang="en-US" sz="1800" dirty="0">
                 <a:solidFill>
                   <a:srgbClr val="6B7280"/>
                 </a:solidFill>
@@ -9996,7 +10391,7 @@
               </a:rPr>
               <a:t>3</a:t>
             </a:r>
-            <a:endParaRPr lang="en-US" sz="1000" dirty="0"/>
+            <a:endParaRPr lang="en-US" sz="1800" dirty="0"/>
           </a:p>
         </p:txBody>
       </p:sp>
@@ -10028,8 +10423,8 @@
         </p:nvSpPr>
         <p:spPr>
           <a:xfrm>
-            <a:off x="502920" y="274320"/>
-            <a:ext cx="11183112" cy="310896"/>
+            <a:off x="502920" y="237744"/>
+            <a:ext cx="11183112" cy="347472"/>
           </a:xfrm>
           <a:prstGeom prst="rect">
             <a:avLst/>
@@ -10045,7 +10440,7 @@
               <a:buNone/>
             </a:pPr>
             <a:r>
-              <a:rPr lang="en-US" sz="1300" b="1" spc="200" kern="0" dirty="0">
+              <a:rPr lang="en-US" sz="1800" b="1" spc="200" kern="0" dirty="0">
                 <a:solidFill>
                   <a:srgbClr val="0F6CBD"/>
                 </a:solidFill>
@@ -10055,7 +10450,7 @@
               </a:rPr>
               <a:t>FORMS OF ENTERPRISES</a:t>
             </a:r>
-            <a:endParaRPr lang="en-US" sz="1300" dirty="0"/>
+            <a:endParaRPr lang="en-US" sz="1800" dirty="0"/>
           </a:p>
         </p:txBody>
       </p:sp>
@@ -10067,8 +10462,8 @@
         </p:nvSpPr>
         <p:spPr>
           <a:xfrm>
-            <a:off x="502920" y="566928"/>
-            <a:ext cx="11183112" cy="731520"/>
+            <a:off x="502920" y="585216"/>
+            <a:ext cx="11183112" cy="603504"/>
           </a:xfrm>
           <a:prstGeom prst="rect">
             <a:avLst/>
@@ -10106,8 +10501,8 @@
         </p:nvSpPr>
         <p:spPr>
           <a:xfrm>
-            <a:off x="502920" y="1298448"/>
-            <a:ext cx="11183112" cy="548640"/>
+            <a:off x="502920" y="1280160"/>
+            <a:ext cx="11183112" cy="365760"/>
           </a:xfrm>
           <a:prstGeom prst="rect">
             <a:avLst/>
@@ -10126,7 +10521,7 @@
               <a:buNone/>
             </a:pPr>
             <a:r>
-              <a:rPr lang="en-US" sz="1600" dirty="0">
+              <a:rPr lang="en-US" sz="1800" dirty="0">
                 <a:solidFill>
                   <a:srgbClr val="6B7280"/>
                 </a:solidFill>
@@ -10134,9 +10529,9 @@
                 <a:ea typeface="Aptos" pitchFamily="34" charset="-122"/>
                 <a:cs typeface="Aptos" pitchFamily="34" charset="-120"/>
               </a:rPr>
-              <a:t>Let's take a closer look at the different types of businesses there are, from which you must choose for your own setup.</a:t>
-            </a:r>
-            <a:endParaRPr lang="en-US" sz="1600" dirty="0"/>
+              <a:t>The different types of businesses — from which you must choose your own setup.</a:t>
+            </a:r>
+            <a:endParaRPr lang="en-US" sz="1800" dirty="0"/>
           </a:p>
         </p:txBody>
       </p:sp>
@@ -10148,12 +10543,12 @@
         </p:nvSpPr>
         <p:spPr>
           <a:xfrm>
-            <a:off x="502920" y="1965960"/>
-            <a:ext cx="2658618" cy="2286000"/>
+            <a:off x="502920" y="1828800"/>
+            <a:ext cx="5500116" cy="1965960"/>
           </a:xfrm>
           <a:prstGeom prst="roundRect">
             <a:avLst>
-              <a:gd name="adj" fmla="val 3600"/>
+              <a:gd name="adj" fmla="val 4186"/>
             </a:avLst>
           </a:prstGeom>
           <a:solidFill>
@@ -10196,8 +10591,8 @@
         </p:blipFill>
         <p:spPr>
           <a:xfrm>
-            <a:off x="667512" y="2130552"/>
-            <a:ext cx="329184" cy="329184"/>
+            <a:off x="667512" y="2011680"/>
+            <a:ext cx="347472" cy="347472"/>
           </a:xfrm>
           <a:prstGeom prst="rect">
             <a:avLst/>
@@ -10212,8 +10607,8 @@
         </p:nvSpPr>
         <p:spPr>
           <a:xfrm>
-            <a:off x="1088136" y="2075688"/>
-            <a:ext cx="1908810" cy="566928"/>
+            <a:off x="1106424" y="1938528"/>
+            <a:ext cx="4732020" cy="777240"/>
           </a:xfrm>
           <a:prstGeom prst="rect">
             <a:avLst/>
@@ -10232,7 +10627,7 @@
               <a:buNone/>
             </a:pPr>
             <a:r>
-              <a:rPr lang="en-US" sz="1400" b="1" dirty="0">
+              <a:rPr lang="en-US" sz="2000" b="1" dirty="0">
                 <a:solidFill>
                   <a:srgbClr val="002050"/>
                 </a:solidFill>
@@ -10242,7 +10637,7 @@
               </a:rPr>
               <a:t>Sole Proprietor</a:t>
             </a:r>
-            <a:endParaRPr lang="en-US" sz="1400" dirty="0"/>
+            <a:endParaRPr lang="en-US" sz="2000" dirty="0"/>
           </a:p>
         </p:txBody>
       </p:sp>
@@ -10254,8 +10649,8 @@
         </p:nvSpPr>
         <p:spPr>
           <a:xfrm>
-            <a:off x="667512" y="2697480"/>
-            <a:ext cx="2329434" cy="1444752"/>
+            <a:off x="667512" y="2761488"/>
+            <a:ext cx="5170932" cy="905256"/>
           </a:xfrm>
           <a:prstGeom prst="rect">
             <a:avLst/>
@@ -10274,7 +10669,7 @@
               <a:buNone/>
             </a:pPr>
             <a:r>
-              <a:rPr lang="en-US" sz="1200" dirty="0">
+              <a:rPr lang="en-US" sz="1800" dirty="0">
                 <a:solidFill>
                   <a:srgbClr val="6B7280"/>
                 </a:solidFill>
@@ -10282,9 +10677,9 @@
                 <a:ea typeface="Aptos" pitchFamily="34" charset="-122"/>
                 <a:cs typeface="Aptos" pitchFamily="34" charset="-120"/>
               </a:rPr>
-              <a:t>One owner, no partners or co-owners. No formal registration — but if the business becomes insolvent, you personally become insolvent.</a:t>
-            </a:r>
-            <a:endParaRPr lang="en-US" sz="1200" dirty="0"/>
+              <a:t>One owner, no partners. No formal registration — but if the business fails, you personally become insolvent.</a:t>
+            </a:r>
+            <a:endParaRPr lang="en-US" sz="1800" dirty="0"/>
           </a:p>
         </p:txBody>
       </p:sp>
@@ -10296,12 +10691,12 @@
         </p:nvSpPr>
         <p:spPr>
           <a:xfrm>
-            <a:off x="3344418" y="1965960"/>
-            <a:ext cx="2658618" cy="2286000"/>
+            <a:off x="6185916" y="1828800"/>
+            <a:ext cx="5500116" cy="1965960"/>
           </a:xfrm>
           <a:prstGeom prst="roundRect">
             <a:avLst>
-              <a:gd name="adj" fmla="val 3600"/>
+              <a:gd name="adj" fmla="val 4186"/>
             </a:avLst>
           </a:prstGeom>
           <a:solidFill>
@@ -10344,8 +10739,8 @@
         </p:blipFill>
         <p:spPr>
           <a:xfrm>
-            <a:off x="3509010" y="2130552"/>
-            <a:ext cx="329184" cy="329184"/>
+            <a:off x="6350508" y="2011680"/>
+            <a:ext cx="347472" cy="347472"/>
           </a:xfrm>
           <a:prstGeom prst="rect">
             <a:avLst/>
@@ -10360,8 +10755,8 @@
         </p:nvSpPr>
         <p:spPr>
           <a:xfrm>
-            <a:off x="3929634" y="2075688"/>
-            <a:ext cx="1908810" cy="566928"/>
+            <a:off x="6789420" y="1938528"/>
+            <a:ext cx="4732020" cy="777240"/>
           </a:xfrm>
           <a:prstGeom prst="rect">
             <a:avLst/>
@@ -10380,7 +10775,7 @@
               <a:buNone/>
             </a:pPr>
             <a:r>
-              <a:rPr lang="en-US" sz="1400" b="1" dirty="0">
+              <a:rPr lang="en-US" sz="2000" b="1" dirty="0">
                 <a:solidFill>
                   <a:srgbClr val="002050"/>
                 </a:solidFill>
@@ -10390,7 +10785,7 @@
               </a:rPr>
               <a:t>Partnership</a:t>
             </a:r>
-            <a:endParaRPr lang="en-US" sz="1400" dirty="0"/>
+            <a:endParaRPr lang="en-US" sz="2000" dirty="0"/>
           </a:p>
         </p:txBody>
       </p:sp>
@@ -10402,8 +10797,8 @@
         </p:nvSpPr>
         <p:spPr>
           <a:xfrm>
-            <a:off x="3509010" y="2697480"/>
-            <a:ext cx="2329434" cy="1444752"/>
+            <a:off x="6350508" y="2761488"/>
+            <a:ext cx="5170932" cy="905256"/>
           </a:xfrm>
           <a:prstGeom prst="rect">
             <a:avLst/>
@@ -10422,7 +10817,7 @@
               <a:buNone/>
             </a:pPr>
             <a:r>
-              <a:rPr lang="en-US" sz="1200" dirty="0">
+              <a:rPr lang="en-US" sz="1800" dirty="0">
                 <a:solidFill>
                   <a:srgbClr val="6B7280"/>
                 </a:solidFill>
@@ -10430,9 +10825,9 @@
                 <a:ea typeface="Aptos" pitchFamily="34" charset="-122"/>
                 <a:cs typeface="Aptos" pitchFamily="34" charset="-120"/>
               </a:rPr>
-              <a:t>Two to 20 people making and sharing profits. Not a legal person — partners are jointly and severally liable for its debts.</a:t>
-            </a:r>
-            <a:endParaRPr lang="en-US" sz="1200" dirty="0"/>
+              <a:t>Two to 20 people making and sharing profits. Partners are jointly and severally liable for its debts.</a:t>
+            </a:r>
+            <a:endParaRPr lang="en-US" sz="1800" dirty="0"/>
           </a:p>
         </p:txBody>
       </p:sp>
@@ -10444,12 +10839,12 @@
         </p:nvSpPr>
         <p:spPr>
           <a:xfrm>
-            <a:off x="6185916" y="1965960"/>
-            <a:ext cx="2658618" cy="2286000"/>
+            <a:off x="502920" y="3977640"/>
+            <a:ext cx="5500116" cy="1965960"/>
           </a:xfrm>
           <a:prstGeom prst="roundRect">
             <a:avLst>
-              <a:gd name="adj" fmla="val 3600"/>
+              <a:gd name="adj" fmla="val 4186"/>
             </a:avLst>
           </a:prstGeom>
           <a:solidFill>
@@ -10492,8 +10887,8 @@
         </p:blipFill>
         <p:spPr>
           <a:xfrm>
-            <a:off x="6350508" y="2130552"/>
-            <a:ext cx="329184" cy="329184"/>
+            <a:off x="667512" y="4160520"/>
+            <a:ext cx="347472" cy="347472"/>
           </a:xfrm>
           <a:prstGeom prst="rect">
             <a:avLst/>
@@ -10508,8 +10903,8 @@
         </p:nvSpPr>
         <p:spPr>
           <a:xfrm>
-            <a:off x="6771132" y="2075688"/>
-            <a:ext cx="1908810" cy="566928"/>
+            <a:off x="1106424" y="4087368"/>
+            <a:ext cx="4732020" cy="777240"/>
           </a:xfrm>
           <a:prstGeom prst="rect">
             <a:avLst/>
@@ -10528,7 +10923,7 @@
               <a:buNone/>
             </a:pPr>
             <a:r>
-              <a:rPr lang="en-US" sz="1400" b="1" dirty="0">
+              <a:rPr lang="en-US" sz="2000" b="1" dirty="0">
                 <a:solidFill>
                   <a:srgbClr val="002050"/>
                 </a:solidFill>
@@ -10538,7 +10933,7 @@
               </a:rPr>
               <a:t>Closed Corporation</a:t>
             </a:r>
-            <a:endParaRPr lang="en-US" sz="1400" dirty="0"/>
+            <a:endParaRPr lang="en-US" sz="2000" dirty="0"/>
           </a:p>
         </p:txBody>
       </p:sp>
@@ -10550,8 +10945,8 @@
         </p:nvSpPr>
         <p:spPr>
           <a:xfrm>
-            <a:off x="6350508" y="2697480"/>
-            <a:ext cx="2329434" cy="1444752"/>
+            <a:off x="667512" y="4910328"/>
+            <a:ext cx="5170932" cy="905256"/>
           </a:xfrm>
           <a:prstGeom prst="rect">
             <a:avLst/>
@@ -10570,7 +10965,7 @@
               <a:buNone/>
             </a:pPr>
             <a:r>
-              <a:rPr lang="en-US" sz="1200" dirty="0">
+              <a:rPr lang="en-US" sz="1800" dirty="0">
                 <a:solidFill>
                   <a:srgbClr val="6B7280"/>
                 </a:solidFill>
@@ -10578,9 +10973,9 @@
                 <a:ea typeface="Aptos" pitchFamily="34" charset="-122"/>
                 <a:cs typeface="Aptos" pitchFamily="34" charset="-120"/>
               </a:rPr>
-              <a:t>Simple, flexible, inexpensive legal structure for up to ten natural persons. A legal person in its own right.</a:t>
-            </a:r>
-            <a:endParaRPr lang="en-US" sz="1200" dirty="0"/>
+              <a:t>A simple, flexible, inexpensive legal person for up to ten natural persons.</a:t>
+            </a:r>
+            <a:endParaRPr lang="en-US" sz="1800" dirty="0"/>
           </a:p>
         </p:txBody>
       </p:sp>
@@ -10592,12 +10987,12 @@
         </p:nvSpPr>
         <p:spPr>
           <a:xfrm>
-            <a:off x="9027414" y="1965960"/>
-            <a:ext cx="2658618" cy="2286000"/>
+            <a:off x="6185916" y="3977640"/>
+            <a:ext cx="5500116" cy="1965960"/>
           </a:xfrm>
           <a:prstGeom prst="roundRect">
             <a:avLst>
-              <a:gd name="adj" fmla="val 3600"/>
+              <a:gd name="adj" fmla="val 4186"/>
             </a:avLst>
           </a:prstGeom>
           <a:solidFill>
@@ -10640,8 +11035,8 @@
         </p:blipFill>
         <p:spPr>
           <a:xfrm>
-            <a:off x="9192006" y="2130552"/>
-            <a:ext cx="329184" cy="329184"/>
+            <a:off x="6350508" y="4160520"/>
+            <a:ext cx="347472" cy="347472"/>
           </a:xfrm>
           <a:prstGeom prst="rect">
             <a:avLst/>
@@ -10656,8 +11051,8 @@
         </p:nvSpPr>
         <p:spPr>
           <a:xfrm>
-            <a:off x="9612630" y="2075688"/>
-            <a:ext cx="1908810" cy="566928"/>
+            <a:off x="6789420" y="4087368"/>
+            <a:ext cx="4732020" cy="777240"/>
           </a:xfrm>
           <a:prstGeom prst="rect">
             <a:avLst/>
@@ -10676,7 +11071,7 @@
               <a:buNone/>
             </a:pPr>
             <a:r>
-              <a:rPr lang="en-US" sz="1400" b="1" dirty="0">
+              <a:rPr lang="en-US" sz="2000" b="1" dirty="0">
                 <a:solidFill>
                   <a:srgbClr val="002050"/>
                 </a:solidFill>
@@ -10686,7 +11081,7 @@
               </a:rPr>
               <a:t>Company</a:t>
             </a:r>
-            <a:endParaRPr lang="en-US" sz="1400" dirty="0"/>
+            <a:endParaRPr lang="en-US" sz="2000" dirty="0"/>
           </a:p>
         </p:txBody>
       </p:sp>
@@ -10698,8 +11093,8 @@
         </p:nvSpPr>
         <p:spPr>
           <a:xfrm>
-            <a:off x="9192006" y="2697480"/>
-            <a:ext cx="2329434" cy="1444752"/>
+            <a:off x="6350508" y="4910328"/>
+            <a:ext cx="5170932" cy="905256"/>
           </a:xfrm>
           <a:prstGeom prst="rect">
             <a:avLst/>
@@ -10718,7 +11113,7 @@
               <a:buNone/>
             </a:pPr>
             <a:r>
-              <a:rPr lang="en-US" sz="1200" dirty="0">
+              <a:rPr lang="en-US" sz="1800" dirty="0">
                 <a:solidFill>
                   <a:srgbClr val="6B7280"/>
                 </a:solidFill>
@@ -10726,9 +11121,9 @@
                 <a:ea typeface="Aptos" pitchFamily="34" charset="-122"/>
                 <a:cs typeface="Aptos" pitchFamily="34" charset="-120"/>
               </a:rPr>
-              <a:t>The most advanced form (Act 61 of 1973) — eliminates unlimited liability and improves the ability to acquire capital. Private or public.</a:t>
-            </a:r>
-            <a:endParaRPr lang="en-US" sz="1200" dirty="0"/>
+              <a:t>The most advanced form — limits liability and improves access to capital. Private or public.</a:t>
+            </a:r>
+            <a:endParaRPr lang="en-US" sz="1800" dirty="0"/>
           </a:p>
         </p:txBody>
       </p:sp>
@@ -10772,8 +11167,8 @@
         </p:nvSpPr>
         <p:spPr>
           <a:xfrm>
-            <a:off x="502920" y="6473952"/>
-            <a:ext cx="10268712" cy="274320"/>
+            <a:off x="502920" y="6400800"/>
+            <a:ext cx="10268712" cy="347472"/>
           </a:xfrm>
           <a:prstGeom prst="rect">
             <a:avLst/>
@@ -10789,7 +11184,7 @@
               <a:buNone/>
             </a:pPr>
             <a:r>
-              <a:rPr lang="en-US" sz="1000" dirty="0">
+              <a:rPr lang="en-US" sz="1800" dirty="0">
                 <a:solidFill>
                   <a:srgbClr val="6B7280"/>
                 </a:solidFill>
@@ -10797,9 +11192,9 @@
                 <a:ea typeface="Aptos" pitchFamily="34" charset="-122"/>
                 <a:cs typeface="Aptos" pitchFamily="34" charset="-120"/>
               </a:rPr>
-              <a:t>US 114050 — Explain the principles of business and the role of information technology · NQF 5 · 4 credits</a:t>
-            </a:r>
-            <a:endParaRPr lang="en-US" sz="1000" dirty="0"/>
+              <a:t>US 114050 · Principles of business &amp; the role of IT · NQF 5 · 4 credits</a:t>
+            </a:r>
+            <a:endParaRPr lang="en-US" sz="1800" dirty="0"/>
           </a:p>
         </p:txBody>
       </p:sp>
@@ -10811,8 +11206,8 @@
         </p:nvSpPr>
         <p:spPr>
           <a:xfrm>
-            <a:off x="11137392" y="6473952"/>
-            <a:ext cx="548640" cy="274320"/>
+            <a:off x="11045952" y="6400800"/>
+            <a:ext cx="640080" cy="347472"/>
           </a:xfrm>
           <a:prstGeom prst="rect">
             <a:avLst/>
@@ -10828,7 +11223,7 @@
               <a:buNone/>
             </a:pPr>
             <a:r>
-              <a:rPr lang="en-US" sz="1000" dirty="0">
+              <a:rPr lang="en-US" sz="1800" dirty="0">
                 <a:solidFill>
                   <a:srgbClr val="6B7280"/>
                 </a:solidFill>
@@ -10838,7 +11233,7 @@
               </a:rPr>
               <a:t>4</a:t>
             </a:r>
-            <a:endParaRPr lang="en-US" sz="1000" dirty="0"/>
+            <a:endParaRPr lang="en-US" sz="1800" dirty="0"/>
           </a:p>
         </p:txBody>
       </p:sp>
@@ -10870,8 +11265,8 @@
         </p:nvSpPr>
         <p:spPr>
           <a:xfrm>
-            <a:off x="502920" y="274320"/>
-            <a:ext cx="11183112" cy="310896"/>
+            <a:off x="502920" y="237744"/>
+            <a:ext cx="11183112" cy="347472"/>
           </a:xfrm>
           <a:prstGeom prst="rect">
             <a:avLst/>
@@ -10887,7 +11282,7 @@
               <a:buNone/>
             </a:pPr>
             <a:r>
-              <a:rPr lang="en-US" sz="1300" b="1" spc="200" kern="0" dirty="0">
+              <a:rPr lang="en-US" sz="1800" b="1" spc="200" kern="0" dirty="0">
                 <a:solidFill>
                   <a:srgbClr val="0F6CBD"/>
                 </a:solidFill>
@@ -10897,7 +11292,7 @@
               </a:rPr>
               <a:t>THE COMPANY (PTY LTD)</a:t>
             </a:r>
-            <a:endParaRPr lang="en-US" sz="1300" dirty="0"/>
+            <a:endParaRPr lang="en-US" sz="1800" dirty="0"/>
           </a:p>
         </p:txBody>
       </p:sp>
@@ -10909,8 +11304,8 @@
         </p:nvSpPr>
         <p:spPr>
           <a:xfrm>
-            <a:off x="502920" y="566928"/>
-            <a:ext cx="11183112" cy="731520"/>
+            <a:off x="502920" y="585216"/>
+            <a:ext cx="11183112" cy="603504"/>
           </a:xfrm>
           <a:prstGeom prst="rect">
             <a:avLst/>
@@ -10948,8 +11343,8 @@
         </p:nvSpPr>
         <p:spPr>
           <a:xfrm>
-            <a:off x="502920" y="1298448"/>
-            <a:ext cx="11183112" cy="548640"/>
+            <a:off x="502920" y="1280160"/>
+            <a:ext cx="11183112" cy="365760"/>
           </a:xfrm>
           <a:prstGeom prst="rect">
             <a:avLst/>
@@ -10968,7 +11363,7 @@
               <a:buNone/>
             </a:pPr>
             <a:r>
-              <a:rPr lang="en-US" sz="1600" dirty="0">
+              <a:rPr lang="en-US" sz="1800" dirty="0">
                 <a:solidFill>
                   <a:srgbClr val="6B7280"/>
                 </a:solidFill>
@@ -10976,9 +11371,9 @@
                 <a:ea typeface="Aptos" pitchFamily="34" charset="-122"/>
                 <a:cs typeface="Aptos" pitchFamily="34" charset="-120"/>
               </a:rPr>
-              <a:t>In South Africa two types of profit-seeking companies are found — the private and the public company. The most important differences:</a:t>
-            </a:r>
-            <a:endParaRPr lang="en-US" sz="1600" dirty="0"/>
+              <a:t>Two types of profit-seeking companies are found in South Africa. The most important differences:</a:t>
+            </a:r>
+            <a:endParaRPr lang="en-US" sz="1800" dirty="0"/>
           </a:p>
         </p:txBody>
       </p:sp>
@@ -10997,7 +11392,7 @@
           </p:nvPr>
         </p:nvGraphicFramePr>
         <p:xfrm>
-          <a:off x="502920" y="1874520"/>
+          <a:off x="502920" y="1783080"/>
           <a:ext cx="11183112" cy="914400"/>
         </p:xfrm>
         <a:graphic>
@@ -11005,9 +11400,9 @@
             <a:tbl>
               <a:tblPr/>
               <a:tblGrid>
-                <a:gridCol w="3108960"/>
+                <a:gridCol w="3291840"/>
                 <a:gridCol w="4023360"/>
-                <a:gridCol w="4050792"/>
+                <a:gridCol w="3867912"/>
               </a:tblGrid>
               <a:tr h="566928">
                 <a:tc>
@@ -11018,7 +11413,7 @@
                       <a:pPr indent="0" marL="0">
                         <a:buNone/>
                       </a:pPr>
-                      <a:endParaRPr lang="en-US" sz="1300" dirty="0">
+                      <a:endParaRPr lang="en-US" sz="1800" dirty="0">
                         <a:latin typeface="Aptos Display" charset="0"/>
                         <a:ea typeface="Aptos Display" charset="0"/>
                         <a:cs typeface="Aptos Display" charset="0"/>
@@ -11076,7 +11471,7 @@
                         <a:buNone/>
                       </a:pPr>
                       <a:r>
-                        <a:rPr lang="en-US" sz="1300" b="1" dirty="0">
+                        <a:rPr lang="en-US" sz="1800" b="1" dirty="0">
                           <a:solidFill>
                             <a:srgbClr val="FFFFFF"/>
                           </a:solidFill>
@@ -11086,7 +11481,7 @@
                         </a:rPr>
                         <a:t>Private Company</a:t>
                       </a:r>
-                      <a:endParaRPr lang="en-US" sz="1300" dirty="0">
+                      <a:endParaRPr lang="en-US" sz="1800" dirty="0">
                         <a:latin typeface="Aptos Display" charset="0"/>
                         <a:ea typeface="Aptos Display" charset="0"/>
                         <a:cs typeface="Aptos Display" charset="0"/>
@@ -11144,7 +11539,7 @@
                         <a:buNone/>
                       </a:pPr>
                       <a:r>
-                        <a:rPr lang="en-US" sz="1300" b="1" dirty="0">
+                        <a:rPr lang="en-US" sz="1800" b="1" dirty="0">
                           <a:solidFill>
                             <a:srgbClr val="FFFFFF"/>
                           </a:solidFill>
@@ -11154,7 +11549,7 @@
                         </a:rPr>
                         <a:t>Public Company</a:t>
                       </a:r>
-                      <a:endParaRPr lang="en-US" sz="1300" dirty="0">
+                      <a:endParaRPr lang="en-US" sz="1800" dirty="0">
                         <a:latin typeface="Aptos Display" charset="0"/>
                         <a:ea typeface="Aptos Display" charset="0"/>
                         <a:cs typeface="Aptos Display" charset="0"/>
@@ -11214,7 +11609,7 @@
                         <a:buNone/>
                       </a:pPr>
                       <a:r>
-                        <a:rPr lang="en-US" sz="1300" dirty="0">
+                        <a:rPr lang="en-US" sz="1800" dirty="0">
                           <a:solidFill>
                             <a:srgbClr val="002050"/>
                           </a:solidFill>
@@ -11224,7 +11619,7 @@
                         </a:rPr>
                         <a:t>Members (shareholders)</a:t>
                       </a:r>
-                      <a:endParaRPr lang="en-US" sz="1300" dirty="0">
+                      <a:endParaRPr lang="en-US" sz="1800" dirty="0">
                         <a:latin typeface="Aptos" charset="0"/>
                         <a:ea typeface="Aptos" charset="0"/>
                         <a:cs typeface="Aptos" charset="0"/>
@@ -11282,7 +11677,7 @@
                         <a:buNone/>
                       </a:pPr>
                       <a:r>
-                        <a:rPr lang="en-US" sz="1300" dirty="0">
+                        <a:rPr lang="en-US" sz="1800" dirty="0">
                           <a:solidFill>
                             <a:srgbClr val="002050"/>
                           </a:solidFill>
@@ -11292,7 +11687,7 @@
                         </a:rPr>
                         <a:t>Between one and 50</a:t>
                       </a:r>
-                      <a:endParaRPr lang="en-US" sz="1300" dirty="0">
+                      <a:endParaRPr lang="en-US" sz="1800" dirty="0">
                         <a:latin typeface="Aptos" charset="0"/>
                         <a:ea typeface="Aptos" charset="0"/>
                         <a:cs typeface="Aptos" charset="0"/>
@@ -11350,7 +11745,7 @@
                         <a:buNone/>
                       </a:pPr>
                       <a:r>
-                        <a:rPr lang="en-US" sz="1300" dirty="0">
+                        <a:rPr lang="en-US" sz="1800" dirty="0">
                           <a:solidFill>
                             <a:srgbClr val="002050"/>
                           </a:solidFill>
@@ -11360,7 +11755,7 @@
                         </a:rPr>
                         <a:t>At least seven</a:t>
                       </a:r>
-                      <a:endParaRPr lang="en-US" sz="1300" dirty="0">
+                      <a:endParaRPr lang="en-US" sz="1800" dirty="0">
                         <a:latin typeface="Aptos" charset="0"/>
                         <a:ea typeface="Aptos" charset="0"/>
                         <a:cs typeface="Aptos" charset="0"/>
@@ -11420,7 +11815,7 @@
                         <a:buNone/>
                       </a:pPr>
                       <a:r>
-                        <a:rPr lang="en-US" sz="1300" dirty="0">
+                        <a:rPr lang="en-US" sz="1800" dirty="0">
                           <a:solidFill>
                             <a:srgbClr val="002050"/>
                           </a:solidFill>
@@ -11430,7 +11825,7 @@
                         </a:rPr>
                         <a:t>Directors</a:t>
                       </a:r>
-                      <a:endParaRPr lang="en-US" sz="1300" dirty="0">
+                      <a:endParaRPr lang="en-US" sz="1800" dirty="0">
                         <a:latin typeface="Aptos" charset="0"/>
                         <a:ea typeface="Aptos" charset="0"/>
                         <a:cs typeface="Aptos" charset="0"/>
@@ -11488,7 +11883,7 @@
                         <a:buNone/>
                       </a:pPr>
                       <a:r>
-                        <a:rPr lang="en-US" sz="1300" dirty="0">
+                        <a:rPr lang="en-US" sz="1800" dirty="0">
                           <a:solidFill>
                             <a:srgbClr val="002050"/>
                           </a:solidFill>
@@ -11498,7 +11893,7 @@
                         </a:rPr>
                         <a:t>At least one</a:t>
                       </a:r>
-                      <a:endParaRPr lang="en-US" sz="1300" dirty="0">
+                      <a:endParaRPr lang="en-US" sz="1800" dirty="0">
                         <a:latin typeface="Aptos" charset="0"/>
                         <a:ea typeface="Aptos" charset="0"/>
                         <a:cs typeface="Aptos" charset="0"/>
@@ -11556,7 +11951,7 @@
                         <a:buNone/>
                       </a:pPr>
                       <a:r>
-                        <a:rPr lang="en-US" sz="1300" dirty="0">
+                        <a:rPr lang="en-US" sz="1800" dirty="0">
                           <a:solidFill>
                             <a:srgbClr val="002050"/>
                           </a:solidFill>
@@ -11566,7 +11961,7 @@
                         </a:rPr>
                         <a:t>At least two</a:t>
                       </a:r>
-                      <a:endParaRPr lang="en-US" sz="1300" dirty="0">
+                      <a:endParaRPr lang="en-US" sz="1800" dirty="0">
                         <a:latin typeface="Aptos" charset="0"/>
                         <a:ea typeface="Aptos" charset="0"/>
                         <a:cs typeface="Aptos" charset="0"/>
@@ -11626,7 +12021,7 @@
                         <a:buNone/>
                       </a:pPr>
                       <a:r>
-                        <a:rPr lang="en-US" sz="1300" dirty="0">
+                        <a:rPr lang="en-US" sz="1800" dirty="0">
                           <a:solidFill>
                             <a:srgbClr val="002050"/>
                           </a:solidFill>
@@ -11636,7 +12031,7 @@
                         </a:rPr>
                         <a:t>Shares</a:t>
                       </a:r>
-                      <a:endParaRPr lang="en-US" sz="1300" dirty="0">
+                      <a:endParaRPr lang="en-US" sz="1800" dirty="0">
                         <a:latin typeface="Aptos" charset="0"/>
                         <a:ea typeface="Aptos" charset="0"/>
                         <a:cs typeface="Aptos" charset="0"/>
@@ -11694,7 +12089,7 @@
                         <a:buNone/>
                       </a:pPr>
                       <a:r>
-                        <a:rPr lang="en-US" sz="1300" dirty="0">
+                        <a:rPr lang="en-US" sz="1800" dirty="0">
                           <a:solidFill>
                             <a:srgbClr val="002050"/>
                           </a:solidFill>
@@ -11702,9 +12097,9 @@
                           <a:ea typeface="Aptos" pitchFamily="34" charset="-122"/>
                           <a:cs typeface="Aptos" pitchFamily="34" charset="-120"/>
                         </a:rPr>
-                        <a:t>May not be offered to the general public</a:t>
+                        <a:t>May not be offered to the public</a:t>
                       </a:r>
-                      <a:endParaRPr lang="en-US" sz="1300" dirty="0">
+                      <a:endParaRPr lang="en-US" sz="1800" dirty="0">
                         <a:latin typeface="Aptos" charset="0"/>
                         <a:ea typeface="Aptos" charset="0"/>
                         <a:cs typeface="Aptos" charset="0"/>
@@ -11762,7 +12157,7 @@
                         <a:buNone/>
                       </a:pPr>
                       <a:r>
-                        <a:rPr lang="en-US" sz="1300" dirty="0">
+                        <a:rPr lang="en-US" sz="1800" dirty="0">
                           <a:solidFill>
                             <a:srgbClr val="002050"/>
                           </a:solidFill>
@@ -11770,9 +12165,9 @@
                           <a:ea typeface="Aptos" pitchFamily="34" charset="-122"/>
                           <a:cs typeface="Aptos" pitchFamily="34" charset="-120"/>
                         </a:rPr>
-                        <a:t>May be offered to the general public</a:t>
+                        <a:t>May be offered to the public</a:t>
                       </a:r>
-                      <a:endParaRPr lang="en-US" sz="1300" dirty="0">
+                      <a:endParaRPr lang="en-US" sz="1800" dirty="0">
                         <a:latin typeface="Aptos" charset="0"/>
                         <a:ea typeface="Aptos" charset="0"/>
                         <a:cs typeface="Aptos" charset="0"/>
@@ -11832,7 +12227,7 @@
                         <a:buNone/>
                       </a:pPr>
                       <a:r>
-                        <a:rPr lang="en-US" sz="1300" dirty="0">
+                        <a:rPr lang="en-US" sz="1800" dirty="0">
                           <a:solidFill>
                             <a:srgbClr val="002050"/>
                           </a:solidFill>
@@ -11840,9 +12235,9 @@
                           <a:ea typeface="Aptos" pitchFamily="34" charset="-122"/>
                           <a:cs typeface="Aptos" pitchFamily="34" charset="-120"/>
                         </a:rPr>
-                        <a:t>Transferability of shares</a:t>
+                        <a:t>Transfer of shares</a:t>
                       </a:r>
-                      <a:endParaRPr lang="en-US" sz="1300" dirty="0">
+                      <a:endParaRPr lang="en-US" sz="1800" dirty="0">
                         <a:latin typeface="Aptos" charset="0"/>
                         <a:ea typeface="Aptos" charset="0"/>
                         <a:cs typeface="Aptos" charset="0"/>
@@ -11900,7 +12295,7 @@
                         <a:buNone/>
                       </a:pPr>
                       <a:r>
-                        <a:rPr lang="en-US" sz="1300" dirty="0">
+                        <a:rPr lang="en-US" sz="1800" dirty="0">
                           <a:solidFill>
                             <a:srgbClr val="002050"/>
                           </a:solidFill>
@@ -11908,9 +12303,9 @@
                           <a:ea typeface="Aptos" pitchFamily="34" charset="-122"/>
                           <a:cs typeface="Aptos" pitchFamily="34" charset="-120"/>
                         </a:rPr>
-                        <a:t>Limited — needs board of directors' consent</a:t>
+                        <a:t>Needs the board's consent</a:t>
                       </a:r>
-                      <a:endParaRPr lang="en-US" sz="1300" dirty="0">
+                      <a:endParaRPr lang="en-US" sz="1800" dirty="0">
                         <a:latin typeface="Aptos" charset="0"/>
                         <a:ea typeface="Aptos" charset="0"/>
                         <a:cs typeface="Aptos" charset="0"/>
@@ -11968,7 +12363,7 @@
                         <a:buNone/>
                       </a:pPr>
                       <a:r>
-                        <a:rPr lang="en-US" sz="1300" dirty="0">
+                        <a:rPr lang="en-US" sz="1800" dirty="0">
                           <a:solidFill>
                             <a:srgbClr val="002050"/>
                           </a:solidFill>
@@ -11978,7 +12373,7 @@
                         </a:rPr>
                         <a:t>Freely transferable</a:t>
                       </a:r>
-                      <a:endParaRPr lang="en-US" sz="1300" dirty="0">
+                      <a:endParaRPr lang="en-US" sz="1800" dirty="0">
                         <a:latin typeface="Aptos" charset="0"/>
                         <a:ea typeface="Aptos" charset="0"/>
                         <a:cs typeface="Aptos" charset="0"/>
@@ -12038,7 +12433,7 @@
                         <a:buNone/>
                       </a:pPr>
                       <a:r>
-                        <a:rPr lang="en-US" sz="1300" dirty="0">
+                        <a:rPr lang="en-US" sz="1800" dirty="0">
                           <a:solidFill>
                             <a:srgbClr val="002050"/>
                           </a:solidFill>
@@ -12048,7 +12443,7 @@
                         </a:rPr>
                         <a:t>Name ends with</a:t>
                       </a:r>
-                      <a:endParaRPr lang="en-US" sz="1300" dirty="0">
+                      <a:endParaRPr lang="en-US" sz="1800" dirty="0">
                         <a:latin typeface="Aptos" charset="0"/>
                         <a:ea typeface="Aptos" charset="0"/>
                         <a:cs typeface="Aptos" charset="0"/>
@@ -12106,7 +12501,7 @@
                         <a:buNone/>
                       </a:pPr>
                       <a:r>
-                        <a:rPr lang="en-US" sz="1300" dirty="0">
+                        <a:rPr lang="en-US" sz="1800" dirty="0">
                           <a:solidFill>
                             <a:srgbClr val="002050"/>
                           </a:solidFill>
@@ -12114,9 +12509,9 @@
                           <a:ea typeface="Aptos" pitchFamily="34" charset="-122"/>
                           <a:cs typeface="Aptos" pitchFamily="34" charset="-120"/>
                         </a:rPr>
-                        <a:t>(Pty.) Ltd. or Proprietary (Limited)</a:t>
+                        <a:t>(Pty.) Ltd.</a:t>
                       </a:r>
-                      <a:endParaRPr lang="en-US" sz="1300" dirty="0">
+                      <a:endParaRPr lang="en-US" sz="1800" dirty="0">
                         <a:latin typeface="Aptos" charset="0"/>
                         <a:ea typeface="Aptos" charset="0"/>
                         <a:cs typeface="Aptos" charset="0"/>
@@ -12174,7 +12569,7 @@
                         <a:buNone/>
                       </a:pPr>
                       <a:r>
-                        <a:rPr lang="en-US" sz="1300" dirty="0">
+                        <a:rPr lang="en-US" sz="1800" dirty="0">
                           <a:solidFill>
                             <a:srgbClr val="002050"/>
                           </a:solidFill>
@@ -12184,7 +12579,7 @@
                         </a:rPr>
                         <a:t>Ltd. or Limited</a:t>
                       </a:r>
-                      <a:endParaRPr lang="en-US" sz="1300" dirty="0">
+                      <a:endParaRPr lang="en-US" sz="1800" dirty="0">
                         <a:latin typeface="Aptos" charset="0"/>
                         <a:ea typeface="Aptos" charset="0"/>
                         <a:cs typeface="Aptos" charset="0"/>
@@ -12244,7 +12639,7 @@
                         <a:buNone/>
                       </a:pPr>
                       <a:r>
-                        <a:rPr lang="en-US" sz="1300" dirty="0">
+                        <a:rPr lang="en-US" sz="1800" dirty="0">
                           <a:solidFill>
                             <a:srgbClr val="002050"/>
                           </a:solidFill>
@@ -12254,7 +12649,7 @@
                         </a:rPr>
                         <a:t>Legal requirements</a:t>
                       </a:r>
-                      <a:endParaRPr lang="en-US" sz="1300" dirty="0">
+                      <a:endParaRPr lang="en-US" sz="1800" dirty="0">
                         <a:latin typeface="Aptos" charset="0"/>
                         <a:ea typeface="Aptos" charset="0"/>
                         <a:cs typeface="Aptos" charset="0"/>
@@ -12312,7 +12707,7 @@
                         <a:buNone/>
                       </a:pPr>
                       <a:r>
-                        <a:rPr lang="en-US" sz="1300" dirty="0">
+                        <a:rPr lang="en-US" sz="1800" dirty="0">
                           <a:solidFill>
                             <a:srgbClr val="002050"/>
                           </a:solidFill>
@@ -12320,9 +12715,9 @@
                           <a:ea typeface="Aptos" pitchFamily="34" charset="-122"/>
                           <a:cs typeface="Aptos" pitchFamily="34" charset="-120"/>
                         </a:rPr>
-                        <a:t>Subject to less requirements and limitations</a:t>
+                        <a:t>Fewer requirements</a:t>
                       </a:r>
-                      <a:endParaRPr lang="en-US" sz="1300" dirty="0">
+                      <a:endParaRPr lang="en-US" sz="1800" dirty="0">
                         <a:latin typeface="Aptos" charset="0"/>
                         <a:ea typeface="Aptos" charset="0"/>
                         <a:cs typeface="Aptos" charset="0"/>
@@ -12380,7 +12775,7 @@
                         <a:buNone/>
                       </a:pPr>
                       <a:r>
-                        <a:rPr lang="en-US" sz="1300" dirty="0">
+                        <a:rPr lang="en-US" sz="1800" dirty="0">
                           <a:solidFill>
                             <a:srgbClr val="002050"/>
                           </a:solidFill>
@@ -12388,9 +12783,9 @@
                           <a:ea typeface="Aptos" pitchFamily="34" charset="-122"/>
                           <a:cs typeface="Aptos" pitchFamily="34" charset="-120"/>
                         </a:rPr>
-                        <a:t>Subject to numerous requirements and limitations</a:t>
+                        <a:t>Numerous requirements</a:t>
                       </a:r>
-                      <a:endParaRPr lang="en-US" sz="1300" dirty="0">
+                      <a:endParaRPr lang="en-US" sz="1800" dirty="0">
                         <a:latin typeface="Aptos" charset="0"/>
                         <a:ea typeface="Aptos" charset="0"/>
                         <a:cs typeface="Aptos" charset="0"/>
@@ -12484,8 +12879,8 @@
         </p:nvSpPr>
         <p:spPr>
           <a:xfrm>
-            <a:off x="502920" y="6473952"/>
-            <a:ext cx="10268712" cy="274320"/>
+            <a:off x="502920" y="6400800"/>
+            <a:ext cx="10268712" cy="347472"/>
           </a:xfrm>
           <a:prstGeom prst="rect">
             <a:avLst/>
@@ -12501,7 +12896,7 @@
               <a:buNone/>
             </a:pPr>
             <a:r>
-              <a:rPr lang="en-US" sz="1000" dirty="0">
+              <a:rPr lang="en-US" sz="1800" dirty="0">
                 <a:solidFill>
                   <a:srgbClr val="6B7280"/>
                 </a:solidFill>
@@ -12509,9 +12904,9 @@
                 <a:ea typeface="Aptos" pitchFamily="34" charset="-122"/>
                 <a:cs typeface="Aptos" pitchFamily="34" charset="-120"/>
               </a:rPr>
-              <a:t>US 114050 — Explain the principles of business and the role of information technology · NQF 5 · 4 credits</a:t>
-            </a:r>
-            <a:endParaRPr lang="en-US" sz="1000" dirty="0"/>
+              <a:t>US 114050 · Principles of business &amp; the role of IT · NQF 5 · 4 credits</a:t>
+            </a:r>
+            <a:endParaRPr lang="en-US" sz="1800" dirty="0"/>
           </a:p>
         </p:txBody>
       </p:sp>
@@ -12523,8 +12918,8 @@
         </p:nvSpPr>
         <p:spPr>
           <a:xfrm>
-            <a:off x="11137392" y="6473952"/>
-            <a:ext cx="548640" cy="274320"/>
+            <a:off x="11045952" y="6400800"/>
+            <a:ext cx="640080" cy="347472"/>
           </a:xfrm>
           <a:prstGeom prst="rect">
             <a:avLst/>
@@ -12540,7 +12935,7 @@
               <a:buNone/>
             </a:pPr>
             <a:r>
-              <a:rPr lang="en-US" sz="1000" dirty="0">
+              <a:rPr lang="en-US" sz="1800" dirty="0">
                 <a:solidFill>
                   <a:srgbClr val="6B7280"/>
                 </a:solidFill>
@@ -12550,7 +12945,7 @@
               </a:rPr>
               <a:t>5</a:t>
             </a:r>
-            <a:endParaRPr lang="en-US" sz="1000" dirty="0"/>
+            <a:endParaRPr lang="en-US" sz="1800" dirty="0"/>
           </a:p>
         </p:txBody>
       </p:sp>
@@ -12582,8 +12977,8 @@
         </p:nvSpPr>
         <p:spPr>
           <a:xfrm>
-            <a:off x="502920" y="274320"/>
-            <a:ext cx="11183112" cy="310896"/>
+            <a:off x="502920" y="237744"/>
+            <a:ext cx="11183112" cy="347472"/>
           </a:xfrm>
           <a:prstGeom prst="rect">
             <a:avLst/>
@@ -12599,7 +12994,7 @@
               <a:buNone/>
             </a:pPr>
             <a:r>
-              <a:rPr lang="en-US" sz="1300" b="1" spc="200" kern="0" dirty="0">
+              <a:rPr lang="en-US" sz="1800" b="1" spc="200" kern="0" dirty="0">
                 <a:solidFill>
                   <a:srgbClr val="0F6CBD"/>
                 </a:solidFill>
@@ -12609,7 +13004,7 @@
               </a:rPr>
               <a:t>FORMS OF ENTERPRISES</a:t>
             </a:r>
-            <a:endParaRPr lang="en-US" sz="1300" dirty="0"/>
+            <a:endParaRPr lang="en-US" sz="1800" dirty="0"/>
           </a:p>
         </p:txBody>
       </p:sp>
@@ -12621,8 +13016,8 @@
         </p:nvSpPr>
         <p:spPr>
           <a:xfrm>
-            <a:off x="502920" y="566928"/>
-            <a:ext cx="11183112" cy="731520"/>
+            <a:off x="502920" y="585216"/>
+            <a:ext cx="11183112" cy="603504"/>
           </a:xfrm>
           <a:prstGeom prst="rect">
             <a:avLst/>
@@ -12660,8 +13055,8 @@
         </p:nvSpPr>
         <p:spPr>
           <a:xfrm>
-            <a:off x="502920" y="1600200"/>
-            <a:ext cx="11183112" cy="4206240"/>
+            <a:off x="502920" y="1554480"/>
+            <a:ext cx="11183112" cy="4572000"/>
           </a:xfrm>
           <a:prstGeom prst="rect">
             <a:avLst/>
@@ -12673,18 +13068,18 @@
           <a:bodyPr wrap="square" rtlCol="0" anchor="t"/>
           <a:lstStyle/>
           <a:p>
-            <a:pPr marL="177800" indent="-177800">
+            <a:pPr marL="203200" indent="-203200">
               <a:lnSpc>
-                <a:spcPct val="130000"/>
+                <a:spcPct val="120000"/>
               </a:lnSpc>
               <a:spcAft>
-                <a:spcPts val="800"/>
+                <a:spcPts val="1000"/>
               </a:spcAft>
               <a:buSzPct val="100000"/>
               <a:buChar char="•"/>
             </a:pPr>
             <a:r>
-              <a:rPr lang="en-US" sz="1500" dirty="0">
+              <a:rPr lang="en-US" sz="1800" dirty="0">
                 <a:solidFill>
                   <a:srgbClr val="002050"/>
                 </a:solidFill>
@@ -12692,23 +13087,23 @@
                 <a:ea typeface="Aptos" pitchFamily="34" charset="-122"/>
                 <a:cs typeface="Aptos" pitchFamily="34" charset="-120"/>
               </a:rPr>
-              <a:t>A simple, flexible, inexpensive and legal business structure for up to ten natural persons involved in business together.</a:t>
-            </a:r>
-            <a:endParaRPr lang="en-US" sz="1500" dirty="0"/>
-          </a:p>
-          <a:p>
-            <a:pPr marL="177800" indent="-177800">
+              <a:t>A simple, flexible, inexpensive legal structure for up to ten natural persons in business together.</a:t>
+            </a:r>
+            <a:endParaRPr lang="en-US" sz="1800" dirty="0"/>
+          </a:p>
+          <a:p>
+            <a:pPr marL="203200" indent="-203200">
               <a:lnSpc>
-                <a:spcPct val="130000"/>
+                <a:spcPct val="120000"/>
               </a:lnSpc>
               <a:spcAft>
-                <a:spcPts val="800"/>
+                <a:spcPts val="1000"/>
               </a:spcAft>
               <a:buSzPct val="100000"/>
               <a:buChar char="•"/>
             </a:pPr>
             <a:r>
-              <a:rPr lang="en-US" sz="1500" dirty="0">
+              <a:rPr lang="en-US" sz="1800" dirty="0">
                 <a:solidFill>
                   <a:srgbClr val="002050"/>
                 </a:solidFill>
@@ -12716,23 +13111,23 @@
                 <a:ea typeface="Aptos" pitchFamily="34" charset="-122"/>
                 <a:cs typeface="Aptos" pitchFamily="34" charset="-120"/>
               </a:rPr>
-              <a:t>May not have more than ten members and must be registered with the Registrar of Closed Corporations in Pretoria.</a:t>
-            </a:r>
-            <a:endParaRPr lang="en-US" sz="1500" dirty="0"/>
-          </a:p>
-          <a:p>
-            <a:pPr marL="177800" indent="-177800">
+              <a:t>Maximum ten members; must be registered with the Registrar of Closed Corporations in Pretoria.</a:t>
+            </a:r>
+            <a:endParaRPr lang="en-US" sz="1800" dirty="0"/>
+          </a:p>
+          <a:p>
+            <a:pPr marL="203200" indent="-203200">
               <a:lnSpc>
-                <a:spcPct val="130000"/>
+                <a:spcPct val="120000"/>
               </a:lnSpc>
               <a:spcAft>
-                <a:spcPts val="800"/>
+                <a:spcPts val="1000"/>
               </a:spcAft>
               <a:buSzPct val="100000"/>
               <a:buChar char="•"/>
             </a:pPr>
             <a:r>
-              <a:rPr lang="en-US" sz="1500" dirty="0">
+              <a:rPr lang="en-US" sz="1800" dirty="0">
                 <a:solidFill>
                   <a:srgbClr val="002050"/>
                 </a:solidFill>
@@ -12740,23 +13135,23 @@
                 <a:ea typeface="Aptos" pitchFamily="34" charset="-122"/>
                 <a:cs typeface="Aptos" pitchFamily="34" charset="-120"/>
               </a:rPr>
-              <a:t>A legal person — it can enter into contracts, operate a bank account, own property, sue or be sued in court.</a:t>
-            </a:r>
-            <a:endParaRPr lang="en-US" sz="1500" dirty="0"/>
-          </a:p>
-          <a:p>
-            <a:pPr marL="177800" indent="-177800">
+              <a:t>A legal person — it can enter into contracts, operate a bank account, own property, sue or be sued.</a:t>
+            </a:r>
+            <a:endParaRPr lang="en-US" sz="1800" dirty="0"/>
+          </a:p>
+          <a:p>
+            <a:pPr marL="203200" indent="-203200">
               <a:lnSpc>
-                <a:spcPct val="130000"/>
+                <a:spcPct val="120000"/>
               </a:lnSpc>
               <a:spcAft>
-                <a:spcPts val="800"/>
+                <a:spcPts val="1000"/>
               </a:spcAft>
               <a:buSzPct val="100000"/>
               <a:buChar char="•"/>
             </a:pPr>
             <a:r>
-              <a:rPr lang="en-US" sz="1500" dirty="0">
+              <a:rPr lang="en-US" sz="1800" dirty="0">
                 <a:solidFill>
                   <a:srgbClr val="002050"/>
                 </a:solidFill>
@@ -12764,23 +13159,23 @@
                 <a:ea typeface="Aptos" pitchFamily="34" charset="-122"/>
                 <a:cs typeface="Aptos" pitchFamily="34" charset="-120"/>
               </a:rPr>
-              <a:t>Formed and owned by its members but exists independently of them — it continues even if membership changes or all members die.</a:t>
-            </a:r>
-            <a:endParaRPr lang="en-US" sz="1500" dirty="0"/>
-          </a:p>
-          <a:p>
-            <a:pPr marL="177800" indent="-177800">
+              <a:t>Formed by its members but exists independently — it continues even if membership changes or all members die.</a:t>
+            </a:r>
+            <a:endParaRPr lang="en-US" sz="1800" dirty="0"/>
+          </a:p>
+          <a:p>
+            <a:pPr marL="203200" indent="-203200">
               <a:lnSpc>
-                <a:spcPct val="130000"/>
+                <a:spcPct val="120000"/>
               </a:lnSpc>
               <a:spcAft>
-                <a:spcPts val="800"/>
+                <a:spcPts val="1000"/>
               </a:spcAft>
               <a:buSzPct val="100000"/>
               <a:buChar char="•"/>
             </a:pPr>
             <a:r>
-              <a:rPr lang="en-US" sz="1500" dirty="0">
+              <a:rPr lang="en-US" sz="1800" dirty="0">
                 <a:solidFill>
                   <a:srgbClr val="002050"/>
                 </a:solidFill>
@@ -12788,23 +13183,23 @@
                 <a:ea typeface="Aptos" pitchFamily="34" charset="-122"/>
                 <a:cs typeface="Aptos" pitchFamily="34" charset="-120"/>
               </a:rPr>
-              <a:t>Establishment, existence or termination can be done only by law, in terms of the Closed Corporations Act.</a:t>
-            </a:r>
-            <a:endParaRPr lang="en-US" sz="1500" dirty="0"/>
-          </a:p>
-          <a:p>
-            <a:pPr marL="177800" indent="-177800">
+              <a:t>Established, run and terminated only in terms of the Closed Corporations Act.</a:t>
+            </a:r>
+            <a:endParaRPr lang="en-US" sz="1800" dirty="0"/>
+          </a:p>
+          <a:p>
+            <a:pPr marL="203200" indent="-203200">
               <a:lnSpc>
-                <a:spcPct val="130000"/>
+                <a:spcPct val="120000"/>
               </a:lnSpc>
               <a:spcAft>
-                <a:spcPts val="800"/>
+                <a:spcPts val="1000"/>
               </a:spcAft>
               <a:buSzPct val="100000"/>
               <a:buChar char="•"/>
             </a:pPr>
             <a:r>
-              <a:rPr lang="en-US" sz="1500" dirty="0">
+              <a:rPr lang="en-US" sz="1800" dirty="0">
                 <a:solidFill>
                   <a:srgbClr val="002050"/>
                 </a:solidFill>
@@ -12812,23 +13207,23 @@
                 <a:ea typeface="Aptos" pitchFamily="34" charset="-122"/>
                 <a:cs typeface="Aptos" pitchFamily="34" charset="-120"/>
               </a:rPr>
-              <a:t>Owned and managed by its members: each holds an interest (a percentage) and these must always add up to 100 percent.</a:t>
-            </a:r>
-            <a:endParaRPr lang="en-US" sz="1500" dirty="0"/>
-          </a:p>
-          <a:p>
-            <a:pPr marL="177800" indent="-177800">
+              <a:t>Each member holds an interest (a percentage); the interests must always add up to 100 percent.</a:t>
+            </a:r>
+            <a:endParaRPr lang="en-US" sz="1800" dirty="0"/>
+          </a:p>
+          <a:p>
+            <a:pPr marL="203200" indent="-203200">
               <a:lnSpc>
-                <a:spcPct val="130000"/>
+                <a:spcPct val="120000"/>
               </a:lnSpc>
               <a:spcAft>
-                <a:spcPts val="800"/>
+                <a:spcPts val="1000"/>
               </a:spcAft>
               <a:buSzPct val="100000"/>
               <a:buChar char="•"/>
             </a:pPr>
             <a:r>
-              <a:rPr lang="en-US" sz="1500" dirty="0">
+              <a:rPr lang="en-US" sz="1800" dirty="0">
                 <a:solidFill>
                   <a:srgbClr val="002050"/>
                 </a:solidFill>
@@ -12838,7 +13233,7 @@
               </a:rPr>
               <a:t>A company, corporation or trust may not be a member of a closed corporation.</a:t>
             </a:r>
-            <a:endParaRPr lang="en-US" sz="1500" dirty="0"/>
+            <a:endParaRPr lang="en-US" sz="1800" dirty="0"/>
           </a:p>
         </p:txBody>
       </p:sp>
@@ -12882,8 +13277,8 @@
         </p:nvSpPr>
         <p:spPr>
           <a:xfrm>
-            <a:off x="502920" y="6473952"/>
-            <a:ext cx="10268712" cy="274320"/>
+            <a:off x="502920" y="6400800"/>
+            <a:ext cx="10268712" cy="347472"/>
           </a:xfrm>
           <a:prstGeom prst="rect">
             <a:avLst/>
@@ -12899,7 +13294,7 @@
               <a:buNone/>
             </a:pPr>
             <a:r>
-              <a:rPr lang="en-US" sz="1000" dirty="0">
+              <a:rPr lang="en-US" sz="1800" dirty="0">
                 <a:solidFill>
                   <a:srgbClr val="6B7280"/>
                 </a:solidFill>
@@ -12907,9 +13302,9 @@
                 <a:ea typeface="Aptos" pitchFamily="34" charset="-122"/>
                 <a:cs typeface="Aptos" pitchFamily="34" charset="-120"/>
               </a:rPr>
-              <a:t>US 114050 — Explain the principles of business and the role of information technology · NQF 5 · 4 credits</a:t>
-            </a:r>
-            <a:endParaRPr lang="en-US" sz="1000" dirty="0"/>
+              <a:t>US 114050 · Principles of business &amp; the role of IT · NQF 5 · 4 credits</a:t>
+            </a:r>
+            <a:endParaRPr lang="en-US" sz="1800" dirty="0"/>
           </a:p>
         </p:txBody>
       </p:sp>
@@ -12921,8 +13316,8 @@
         </p:nvSpPr>
         <p:spPr>
           <a:xfrm>
-            <a:off x="11137392" y="6473952"/>
-            <a:ext cx="548640" cy="274320"/>
+            <a:off x="11045952" y="6400800"/>
+            <a:ext cx="640080" cy="347472"/>
           </a:xfrm>
           <a:prstGeom prst="rect">
             <a:avLst/>
@@ -12938,7 +13333,7 @@
               <a:buNone/>
             </a:pPr>
             <a:r>
-              <a:rPr lang="en-US" sz="1000" dirty="0">
+              <a:rPr lang="en-US" sz="1800" dirty="0">
                 <a:solidFill>
                   <a:srgbClr val="6B7280"/>
                 </a:solidFill>
@@ -12948,7 +13343,7 @@
               </a:rPr>
               <a:t>6</a:t>
             </a:r>
-            <a:endParaRPr lang="en-US" sz="1000" dirty="0"/>
+            <a:endParaRPr lang="en-US" sz="1800" dirty="0"/>
           </a:p>
         </p:txBody>
       </p:sp>
@@ -12980,8 +13375,8 @@
         </p:nvSpPr>
         <p:spPr>
           <a:xfrm>
-            <a:off x="502920" y="274320"/>
-            <a:ext cx="11183112" cy="310896"/>
+            <a:off x="502920" y="237744"/>
+            <a:ext cx="11183112" cy="347472"/>
           </a:xfrm>
           <a:prstGeom prst="rect">
             <a:avLst/>
@@ -12997,7 +13392,7 @@
               <a:buNone/>
             </a:pPr>
             <a:r>
-              <a:rPr lang="en-US" sz="1300" b="1" spc="200" kern="0" dirty="0">
+              <a:rPr lang="en-US" sz="1800" b="1" spc="200" kern="0" dirty="0">
                 <a:solidFill>
                   <a:srgbClr val="0F6CBD"/>
                 </a:solidFill>
@@ -13007,7 +13402,7 @@
               </a:rPr>
               <a:t>FORMS OF ENTERPRISES</a:t>
             </a:r>
-            <a:endParaRPr lang="en-US" sz="1300" dirty="0"/>
+            <a:endParaRPr lang="en-US" sz="1800" dirty="0"/>
           </a:p>
         </p:txBody>
       </p:sp>
@@ -13019,8 +13414,8 @@
         </p:nvSpPr>
         <p:spPr>
           <a:xfrm>
-            <a:off x="502920" y="566928"/>
-            <a:ext cx="11183112" cy="731520"/>
+            <a:off x="502920" y="585216"/>
+            <a:ext cx="11183112" cy="603504"/>
           </a:xfrm>
           <a:prstGeom prst="rect">
             <a:avLst/>
@@ -13058,8 +13453,8 @@
         </p:nvSpPr>
         <p:spPr>
           <a:xfrm>
-            <a:off x="502920" y="1600200"/>
-            <a:ext cx="11183112" cy="4206240"/>
+            <a:off x="502920" y="1554480"/>
+            <a:ext cx="11183112" cy="4572000"/>
           </a:xfrm>
           <a:prstGeom prst="rect">
             <a:avLst/>
@@ -13071,18 +13466,18 @@
           <a:bodyPr wrap="square" rtlCol="0" anchor="t"/>
           <a:lstStyle/>
           <a:p>
-            <a:pPr marL="177800" indent="-177800">
+            <a:pPr marL="203200" indent="-203200">
               <a:lnSpc>
-                <a:spcPct val="130000"/>
+                <a:spcPct val="120000"/>
               </a:lnSpc>
               <a:spcAft>
-                <a:spcPts val="800"/>
+                <a:spcPts val="1000"/>
               </a:spcAft>
               <a:buSzPct val="100000"/>
               <a:buChar char="•"/>
             </a:pPr>
             <a:r>
-              <a:rPr lang="en-US" sz="1500" dirty="0">
+              <a:rPr lang="en-US" sz="1800" dirty="0">
                 <a:solidFill>
                   <a:srgbClr val="002050"/>
                 </a:solidFill>
@@ -13092,21 +13487,21 @@
               </a:rPr>
               <a:t>A business association concluded between people who intend making and sharing profits.</a:t>
             </a:r>
-            <a:endParaRPr lang="en-US" sz="1500" dirty="0"/>
-          </a:p>
-          <a:p>
-            <a:pPr marL="177800" indent="-177800">
+            <a:endParaRPr lang="en-US" sz="1800" dirty="0"/>
+          </a:p>
+          <a:p>
+            <a:pPr marL="203200" indent="-203200">
               <a:lnSpc>
-                <a:spcPct val="130000"/>
+                <a:spcPct val="120000"/>
               </a:lnSpc>
               <a:spcAft>
-                <a:spcPts val="800"/>
+                <a:spcPts val="1000"/>
               </a:spcAft>
               <a:buSzPct val="100000"/>
               <a:buChar char="•"/>
             </a:pPr>
             <a:r>
-              <a:rPr lang="en-US" sz="1500" dirty="0">
+              <a:rPr lang="en-US" sz="1800" dirty="0">
                 <a:solidFill>
                   <a:srgbClr val="002050"/>
                 </a:solidFill>
@@ -13114,23 +13509,23 @@
                 <a:ea typeface="Aptos" pitchFamily="34" charset="-122"/>
                 <a:cs typeface="Aptos" pitchFamily="34" charset="-120"/>
               </a:rPr>
-              <a:t>Not a legal person — the rights, duties and liabilities of the partnership bind the individual partners.</a:t>
-            </a:r>
-            <a:endParaRPr lang="en-US" sz="1500" dirty="0"/>
-          </a:p>
-          <a:p>
-            <a:pPr marL="177800" indent="-177800">
+              <a:t>Not a legal person — its rights, duties and liabilities bind the individual partners.</a:t>
+            </a:r>
+            <a:endParaRPr lang="en-US" sz="1800" dirty="0"/>
+          </a:p>
+          <a:p>
+            <a:pPr marL="203200" indent="-203200">
               <a:lnSpc>
-                <a:spcPct val="130000"/>
+                <a:spcPct val="120000"/>
               </a:lnSpc>
               <a:spcAft>
-                <a:spcPts val="800"/>
+                <a:spcPts val="1000"/>
               </a:spcAft>
               <a:buSzPct val="100000"/>
               <a:buChar char="•"/>
             </a:pPr>
             <a:r>
-              <a:rPr lang="en-US" sz="1500" dirty="0">
+              <a:rPr lang="en-US" sz="1800" dirty="0">
                 <a:solidFill>
                   <a:srgbClr val="002050"/>
                 </a:solidFill>
@@ -13140,21 +13535,21 @@
               </a:rPr>
               <a:t>Minimum of two and maximum of 20 partners (certain professional partnerships may have more).</a:t>
             </a:r>
-            <a:endParaRPr lang="en-US" sz="1500" dirty="0"/>
-          </a:p>
-          <a:p>
-            <a:pPr marL="177800" indent="-177800">
+            <a:endParaRPr lang="en-US" sz="1800" dirty="0"/>
+          </a:p>
+          <a:p>
+            <a:pPr marL="203200" indent="-203200">
               <a:lnSpc>
-                <a:spcPct val="130000"/>
+                <a:spcPct val="120000"/>
               </a:lnSpc>
               <a:spcAft>
-                <a:spcPts val="800"/>
+                <a:spcPts val="1000"/>
               </a:spcAft>
               <a:buSzPct val="100000"/>
               <a:buChar char="•"/>
             </a:pPr>
             <a:r>
-              <a:rPr lang="en-US" sz="1500" dirty="0">
+              <a:rPr lang="en-US" sz="1800" dirty="0">
                 <a:solidFill>
                   <a:srgbClr val="002050"/>
                 </a:solidFill>
@@ -13162,23 +13557,23 @@
                 <a:ea typeface="Aptos" pitchFamily="34" charset="-122"/>
                 <a:cs typeface="Aptos" pitchFamily="34" charset="-120"/>
               </a:rPr>
-              <a:t>Managed according to the agreement between the partners; each partner is an agent of the partnership and binds all other partners.</a:t>
-            </a:r>
-            <a:endParaRPr lang="en-US" sz="1500" dirty="0"/>
-          </a:p>
-          <a:p>
-            <a:pPr marL="177800" indent="-177800">
+              <a:t>Each partner is an agent of the partnership and binds all the other partners.</a:t>
+            </a:r>
+            <a:endParaRPr lang="en-US" sz="1800" dirty="0"/>
+          </a:p>
+          <a:p>
+            <a:pPr marL="203200" indent="-203200">
               <a:lnSpc>
-                <a:spcPct val="130000"/>
+                <a:spcPct val="120000"/>
               </a:lnSpc>
               <a:spcAft>
-                <a:spcPts val="800"/>
+                <a:spcPts val="1000"/>
               </a:spcAft>
               <a:buSzPct val="100000"/>
               <a:buChar char="•"/>
             </a:pPr>
             <a:r>
-              <a:rPr lang="en-US" sz="1500" dirty="0">
+              <a:rPr lang="en-US" sz="1800" dirty="0">
                 <a:solidFill>
                   <a:srgbClr val="002050"/>
                 </a:solidFill>
@@ -13186,23 +13581,23 @@
                 <a:ea typeface="Aptos" pitchFamily="34" charset="-122"/>
                 <a:cs typeface="Aptos" pitchFamily="34" charset="-120"/>
               </a:rPr>
-              <a:t>Partners are jointly and severally liable for partnership debts.</a:t>
-            </a:r>
-            <a:endParaRPr lang="en-US" sz="1500" dirty="0"/>
-          </a:p>
-          <a:p>
-            <a:pPr marL="177800" indent="-177800">
+              <a:t>Partners are jointly and severally liable for partnership debts; insolvency sequestrates every partner's estate.</a:t>
+            </a:r>
+            <a:endParaRPr lang="en-US" sz="1800" dirty="0"/>
+          </a:p>
+          <a:p>
+            <a:pPr marL="203200" indent="-203200">
               <a:lnSpc>
-                <a:spcPct val="130000"/>
+                <a:spcPct val="120000"/>
               </a:lnSpc>
               <a:spcAft>
-                <a:spcPts val="800"/>
+                <a:spcPts val="1000"/>
               </a:spcAft>
               <a:buSzPct val="100000"/>
               <a:buChar char="•"/>
             </a:pPr>
             <a:r>
-              <a:rPr lang="en-US" sz="1500" dirty="0">
+              <a:rPr lang="en-US" sz="1800" dirty="0">
                 <a:solidFill>
                   <a:srgbClr val="002050"/>
                 </a:solidFill>
@@ -13210,33 +13605,9 @@
                 <a:ea typeface="Aptos" pitchFamily="34" charset="-122"/>
                 <a:cs typeface="Aptos" pitchFamily="34" charset="-120"/>
               </a:rPr>
-              <a:t>If sequestrated due to insolvency, the estates of all the partners are simultaneously sequestrated.</a:t>
-            </a:r>
-            <a:endParaRPr lang="en-US" sz="1500" dirty="0"/>
-          </a:p>
-          <a:p>
-            <a:pPr marL="177800" indent="-177800">
-              <a:lnSpc>
-                <a:spcPct val="130000"/>
-              </a:lnSpc>
-              <a:spcAft>
-                <a:spcPts val="800"/>
-              </a:spcAft>
-              <a:buSzPct val="100000"/>
-              <a:buChar char="•"/>
-            </a:pPr>
-            <a:r>
-              <a:rPr lang="en-US" sz="1500" dirty="0">
-                <a:solidFill>
-                  <a:srgbClr val="002050"/>
-                </a:solidFill>
-                <a:latin typeface="Aptos" pitchFamily="34" charset="0"/>
-                <a:ea typeface="Aptos" pitchFamily="34" charset="-122"/>
-                <a:cs typeface="Aptos" pitchFamily="34" charset="-120"/>
-              </a:rPr>
-              <a:t>Always have a properly worded agreement drawn up by an attorney — stipulating what happens if a partner dies or the partnership dissolves.</a:t>
-            </a:r>
-            <a:endParaRPr lang="en-US" sz="1500" dirty="0"/>
+              <a:t>Always have a properly worded agreement drawn up by an attorney — covering death of a partner or dissolution.</a:t>
+            </a:r>
+            <a:endParaRPr lang="en-US" sz="1800" dirty="0"/>
           </a:p>
         </p:txBody>
       </p:sp>
@@ -13280,8 +13651,8 @@
         </p:nvSpPr>
         <p:spPr>
           <a:xfrm>
-            <a:off x="502920" y="6473952"/>
-            <a:ext cx="10268712" cy="274320"/>
+            <a:off x="502920" y="6400800"/>
+            <a:ext cx="10268712" cy="347472"/>
           </a:xfrm>
           <a:prstGeom prst="rect">
             <a:avLst/>
@@ -13297,7 +13668,7 @@
               <a:buNone/>
             </a:pPr>
             <a:r>
-              <a:rPr lang="en-US" sz="1000" dirty="0">
+              <a:rPr lang="en-US" sz="1800" dirty="0">
                 <a:solidFill>
                   <a:srgbClr val="6B7280"/>
                 </a:solidFill>
@@ -13305,9 +13676,9 @@
                 <a:ea typeface="Aptos" pitchFamily="34" charset="-122"/>
                 <a:cs typeface="Aptos" pitchFamily="34" charset="-120"/>
               </a:rPr>
-              <a:t>US 114050 — Explain the principles of business and the role of information technology · NQF 5 · 4 credits</a:t>
-            </a:r>
-            <a:endParaRPr lang="en-US" sz="1000" dirty="0"/>
+              <a:t>US 114050 · Principles of business &amp; the role of IT · NQF 5 · 4 credits</a:t>
+            </a:r>
+            <a:endParaRPr lang="en-US" sz="1800" dirty="0"/>
           </a:p>
         </p:txBody>
       </p:sp>
@@ -13319,8 +13690,8 @@
         </p:nvSpPr>
         <p:spPr>
           <a:xfrm>
-            <a:off x="11137392" y="6473952"/>
-            <a:ext cx="548640" cy="274320"/>
+            <a:off x="11045952" y="6400800"/>
+            <a:ext cx="640080" cy="347472"/>
           </a:xfrm>
           <a:prstGeom prst="rect">
             <a:avLst/>
@@ -13336,7 +13707,7 @@
               <a:buNone/>
             </a:pPr>
             <a:r>
-              <a:rPr lang="en-US" sz="1000" dirty="0">
+              <a:rPr lang="en-US" sz="1800" dirty="0">
                 <a:solidFill>
                   <a:srgbClr val="6B7280"/>
                 </a:solidFill>
@@ -13346,7 +13717,7 @@
               </a:rPr>
               <a:t>7</a:t>
             </a:r>
-            <a:endParaRPr lang="en-US" sz="1000" dirty="0"/>
+            <a:endParaRPr lang="en-US" sz="1800" dirty="0"/>
           </a:p>
         </p:txBody>
       </p:sp>
@@ -13378,8 +13749,8 @@
         </p:nvSpPr>
         <p:spPr>
           <a:xfrm>
-            <a:off x="502920" y="274320"/>
-            <a:ext cx="11183112" cy="310896"/>
+            <a:off x="502920" y="237744"/>
+            <a:ext cx="11183112" cy="347472"/>
           </a:xfrm>
           <a:prstGeom prst="rect">
             <a:avLst/>
@@ -13395,7 +13766,7 @@
               <a:buNone/>
             </a:pPr>
             <a:r>
-              <a:rPr lang="en-US" sz="1300" b="1" spc="200" kern="0" dirty="0">
+              <a:rPr lang="en-US" sz="1800" b="1" spc="200" kern="0" dirty="0">
                 <a:solidFill>
                   <a:srgbClr val="0F6CBD"/>
                 </a:solidFill>
@@ -13405,7 +13776,7 @@
               </a:rPr>
               <a:t>FORMS OF ENTERPRISES</a:t>
             </a:r>
-            <a:endParaRPr lang="en-US" sz="1300" dirty="0"/>
+            <a:endParaRPr lang="en-US" sz="1800" dirty="0"/>
           </a:p>
         </p:txBody>
       </p:sp>
@@ -13417,8 +13788,8 @@
         </p:nvSpPr>
         <p:spPr>
           <a:xfrm>
-            <a:off x="502920" y="566928"/>
-            <a:ext cx="11183112" cy="731520"/>
+            <a:off x="502920" y="585216"/>
+            <a:ext cx="11183112" cy="603504"/>
           </a:xfrm>
           <a:prstGeom prst="rect">
             <a:avLst/>
@@ -13456,7 +13827,7 @@
         </p:nvSpPr>
         <p:spPr>
           <a:xfrm>
-            <a:off x="502920" y="1600200"/>
+            <a:off x="502920" y="1554480"/>
             <a:ext cx="11183112" cy="2377440"/>
           </a:xfrm>
           <a:prstGeom prst="rect">
@@ -13469,18 +13840,18 @@
           <a:bodyPr wrap="square" rtlCol="0" anchor="t"/>
           <a:lstStyle/>
           <a:p>
-            <a:pPr marL="177800" indent="-177800">
+            <a:pPr marL="203200" indent="-203200">
               <a:lnSpc>
-                <a:spcPct val="130000"/>
+                <a:spcPct val="120000"/>
               </a:lnSpc>
               <a:spcAft>
-                <a:spcPts val="800"/>
+                <a:spcPts val="1000"/>
               </a:spcAft>
               <a:buSzPct val="100000"/>
               <a:buChar char="•"/>
             </a:pPr>
             <a:r>
-              <a:rPr lang="en-US" sz="1500" dirty="0">
+              <a:rPr lang="en-US" sz="1800" dirty="0">
                 <a:solidFill>
                   <a:srgbClr val="002050"/>
                 </a:solidFill>
@@ -13490,21 +13861,21 @@
               </a:rPr>
               <a:t>Only one person owns the business — there are no partners or co-owners.</a:t>
             </a:r>
-            <a:endParaRPr lang="en-US" sz="1500" dirty="0"/>
-          </a:p>
-          <a:p>
-            <a:pPr marL="177800" indent="-177800">
+            <a:endParaRPr lang="en-US" sz="1800" dirty="0"/>
+          </a:p>
+          <a:p>
+            <a:pPr marL="203200" indent="-203200">
               <a:lnSpc>
-                <a:spcPct val="130000"/>
+                <a:spcPct val="120000"/>
               </a:lnSpc>
               <a:spcAft>
-                <a:spcPts val="800"/>
+                <a:spcPts val="1000"/>
               </a:spcAft>
               <a:buSzPct val="100000"/>
               <a:buChar char="•"/>
             </a:pPr>
             <a:r>
-              <a:rPr lang="en-US" sz="1500" dirty="0">
+              <a:rPr lang="en-US" sz="1800" dirty="0">
                 <a:solidFill>
                   <a:srgbClr val="002050"/>
                 </a:solidFill>
@@ -13512,23 +13883,23 @@
                 <a:ea typeface="Aptos" pitchFamily="34" charset="-122"/>
                 <a:cs typeface="Aptos" pitchFamily="34" charset="-120"/>
               </a:rPr>
-              <a:t>No need for formal registration, administration or termination; no statutes regulate sole owners and no documentation needs registering.</a:t>
-            </a:r>
-            <a:endParaRPr lang="en-US" sz="1500" dirty="0"/>
-          </a:p>
-          <a:p>
-            <a:pPr marL="177800" indent="-177800">
+              <a:t>No formal registration, administration or termination; no statutes regulate sole owners.</a:t>
+            </a:r>
+            <a:endParaRPr lang="en-US" sz="1800" dirty="0"/>
+          </a:p>
+          <a:p>
+            <a:pPr marL="203200" indent="-203200">
               <a:lnSpc>
-                <a:spcPct val="130000"/>
+                <a:spcPct val="120000"/>
               </a:lnSpc>
               <a:spcAft>
-                <a:spcPts val="800"/>
+                <a:spcPts val="1000"/>
               </a:spcAft>
               <a:buSzPct val="100000"/>
               <a:buChar char="•"/>
             </a:pPr>
             <a:r>
-              <a:rPr lang="en-US" sz="1500" dirty="0">
+              <a:rPr lang="en-US" sz="1800" dirty="0">
                 <a:solidFill>
                   <a:srgbClr val="002050"/>
                 </a:solidFill>
@@ -13536,23 +13907,23 @@
                 <a:ea typeface="Aptos" pitchFamily="34" charset="-122"/>
                 <a:cs typeface="Aptos" pitchFamily="34" charset="-120"/>
               </a:rPr>
-              <a:t>You do not have to work alone — you may employ people to manage or help you run the business.</a:t>
-            </a:r>
-            <a:endParaRPr lang="en-US" sz="1500" dirty="0"/>
-          </a:p>
-          <a:p>
-            <a:pPr marL="177800" indent="-177800">
+              <a:t>You do not have to work alone — you may employ people to help you run the business.</a:t>
+            </a:r>
+            <a:endParaRPr lang="en-US" sz="1800" dirty="0"/>
+          </a:p>
+          <a:p>
+            <a:pPr marL="203200" indent="-203200">
               <a:lnSpc>
-                <a:spcPct val="130000"/>
+                <a:spcPct val="120000"/>
               </a:lnSpc>
               <a:spcAft>
-                <a:spcPts val="800"/>
+                <a:spcPts val="1000"/>
               </a:spcAft>
               <a:buSzPct val="100000"/>
               <a:buChar char="•"/>
             </a:pPr>
             <a:r>
-              <a:rPr lang="en-US" sz="1500" dirty="0">
+              <a:rPr lang="en-US" sz="1800" dirty="0">
                 <a:solidFill>
                   <a:srgbClr val="002050"/>
                 </a:solidFill>
@@ -13562,7 +13933,7 @@
               </a:rPr>
               <a:t>If the business becomes insolvent, you personally become insolvent.</a:t>
             </a:r>
-            <a:endParaRPr lang="en-US" sz="1500" dirty="0"/>
+            <a:endParaRPr lang="en-US" sz="1800" dirty="0"/>
           </a:p>
         </p:txBody>
       </p:sp>
@@ -13574,12 +13945,12 @@
         </p:nvSpPr>
         <p:spPr>
           <a:xfrm>
-            <a:off x="502920" y="4297680"/>
-            <a:ext cx="11183112" cy="1737360"/>
+            <a:off x="502920" y="3977640"/>
+            <a:ext cx="11183112" cy="1965960"/>
           </a:xfrm>
           <a:prstGeom prst="roundRect">
             <a:avLst>
-              <a:gd name="adj" fmla="val 4737"/>
+              <a:gd name="adj" fmla="val 4186"/>
             </a:avLst>
           </a:prstGeom>
           <a:solidFill>
@@ -13608,8 +13979,8 @@
         </p:nvSpPr>
         <p:spPr>
           <a:xfrm>
-            <a:off x="731520" y="4480560"/>
-            <a:ext cx="10725912" cy="274320"/>
+            <a:off x="731520" y="4160520"/>
+            <a:ext cx="10725912" cy="329184"/>
           </a:xfrm>
           <a:prstGeom prst="rect">
             <a:avLst/>
@@ -13625,7 +13996,7 @@
               <a:buNone/>
             </a:pPr>
             <a:r>
-              <a:rPr lang="en-US" sz="1200" b="1" spc="150" kern="0" dirty="0">
+              <a:rPr lang="en-US" sz="1800" b="1" spc="100" kern="0" dirty="0">
                 <a:solidFill>
                   <a:srgbClr val="0F6CBD"/>
                 </a:solidFill>
@@ -13635,7 +14006,7 @@
               </a:rPr>
               <a:t>BEFORE YOU START: RESEARCH THE NEED</a:t>
             </a:r>
-            <a:endParaRPr lang="en-US" sz="1200" dirty="0"/>
+            <a:endParaRPr lang="en-US" sz="1800" dirty="0"/>
           </a:p>
         </p:txBody>
       </p:sp>
@@ -13647,8 +14018,8 @@
         </p:nvSpPr>
         <p:spPr>
           <a:xfrm>
-            <a:off x="731520" y="4800600"/>
-            <a:ext cx="10725912" cy="1097280"/>
+            <a:off x="731520" y="4526280"/>
+            <a:ext cx="10725912" cy="1325880"/>
           </a:xfrm>
           <a:prstGeom prst="rect">
             <a:avLst/>
@@ -13662,12 +14033,12 @@
           <a:p>
             <a:pPr indent="0" marL="0">
               <a:lnSpc>
-                <a:spcPct val="130000"/>
+                <a:spcPct val="125000"/>
               </a:lnSpc>
               <a:buNone/>
             </a:pPr>
             <a:r>
-              <a:rPr lang="en-US" sz="1400" dirty="0">
+              <a:rPr lang="en-US" sz="1800" dirty="0">
                 <a:solidFill>
                   <a:srgbClr val="002050"/>
                 </a:solidFill>
@@ -13675,9 +14046,9 @@
                 <a:ea typeface="Aptos" pitchFamily="34" charset="-122"/>
                 <a:cs typeface="Aptos" pitchFamily="34" charset="-120"/>
               </a:rPr>
-              <a:t>Your skills · your interests · your other commitments · is there a market? · who is the market? · how big is it? · who is the competition? · growing or stagnant? · premises or home? · capital requirements · right size · working hours · staffing numbers · the risk</a:t>
-            </a:r>
-            <a:endParaRPr lang="en-US" sz="1400" dirty="0"/>
+              <a:t>Your skills · your interests · other commitments · is there a market? · who is it? · how big? · the competition · growing or stagnant? · premises or home? · capital · right size · working hours · staffing · the risk</a:t>
+            </a:r>
+            <a:endParaRPr lang="en-US" sz="1800" dirty="0"/>
           </a:p>
         </p:txBody>
       </p:sp>
@@ -13721,8 +14092,8 @@
         </p:nvSpPr>
         <p:spPr>
           <a:xfrm>
-            <a:off x="502920" y="6473952"/>
-            <a:ext cx="10268712" cy="274320"/>
+            <a:off x="502920" y="6400800"/>
+            <a:ext cx="10268712" cy="347472"/>
           </a:xfrm>
           <a:prstGeom prst="rect">
             <a:avLst/>
@@ -13738,7 +14109,7 @@
               <a:buNone/>
             </a:pPr>
             <a:r>
-              <a:rPr lang="en-US" sz="1000" dirty="0">
+              <a:rPr lang="en-US" sz="1800" dirty="0">
                 <a:solidFill>
                   <a:srgbClr val="6B7280"/>
                 </a:solidFill>
@@ -13746,9 +14117,9 @@
                 <a:ea typeface="Aptos" pitchFamily="34" charset="-122"/>
                 <a:cs typeface="Aptos" pitchFamily="34" charset="-120"/>
               </a:rPr>
-              <a:t>US 114050 — Explain the principles of business and the role of information technology · NQF 5 · 4 credits</a:t>
-            </a:r>
-            <a:endParaRPr lang="en-US" sz="1000" dirty="0"/>
+              <a:t>US 114050 · Principles of business &amp; the role of IT · NQF 5 · 4 credits</a:t>
+            </a:r>
+            <a:endParaRPr lang="en-US" sz="1800" dirty="0"/>
           </a:p>
         </p:txBody>
       </p:sp>
@@ -13760,8 +14131,8 @@
         </p:nvSpPr>
         <p:spPr>
           <a:xfrm>
-            <a:off x="11137392" y="6473952"/>
-            <a:ext cx="548640" cy="274320"/>
+            <a:off x="11045952" y="6400800"/>
+            <a:ext cx="640080" cy="347472"/>
           </a:xfrm>
           <a:prstGeom prst="rect">
             <a:avLst/>
@@ -13777,7 +14148,7 @@
               <a:buNone/>
             </a:pPr>
             <a:r>
-              <a:rPr lang="en-US" sz="1000" dirty="0">
+              <a:rPr lang="en-US" sz="1800" dirty="0">
                 <a:solidFill>
                   <a:srgbClr val="6B7280"/>
                 </a:solidFill>
@@ -13787,7 +14158,7 @@
               </a:rPr>
               <a:t>8</a:t>
             </a:r>
-            <a:endParaRPr lang="en-US" sz="1000" dirty="0"/>
+            <a:endParaRPr lang="en-US" sz="1800" dirty="0"/>
           </a:p>
         </p:txBody>
       </p:sp>
@@ -13819,8 +14190,8 @@
         </p:nvSpPr>
         <p:spPr>
           <a:xfrm>
-            <a:off x="502920" y="274320"/>
-            <a:ext cx="11183112" cy="310896"/>
+            <a:off x="502920" y="237744"/>
+            <a:ext cx="11183112" cy="347472"/>
           </a:xfrm>
           <a:prstGeom prst="rect">
             <a:avLst/>
@@ -13836,7 +14207,7 @@
               <a:buNone/>
             </a:pPr>
             <a:r>
-              <a:rPr lang="en-US" sz="1300" b="1" spc="200" kern="0" dirty="0">
+              <a:rPr lang="en-US" sz="1800" b="1" spc="200" kern="0" dirty="0">
                 <a:solidFill>
                   <a:srgbClr val="0F6CBD"/>
                 </a:solidFill>
@@ -13846,7 +14217,7 @@
               </a:rPr>
               <a:t>CHOOSING YOUR IDEA</a:t>
             </a:r>
-            <a:endParaRPr lang="en-US" sz="1300" dirty="0"/>
+            <a:endParaRPr lang="en-US" sz="1800" dirty="0"/>
           </a:p>
         </p:txBody>
       </p:sp>
@@ -13858,8 +14229,8 @@
         </p:nvSpPr>
         <p:spPr>
           <a:xfrm>
-            <a:off x="502920" y="566928"/>
-            <a:ext cx="11183112" cy="731520"/>
+            <a:off x="502920" y="585216"/>
+            <a:ext cx="11183112" cy="603504"/>
           </a:xfrm>
           <a:prstGeom prst="rect">
             <a:avLst/>
@@ -13897,8 +14268,8 @@
         </p:nvSpPr>
         <p:spPr>
           <a:xfrm>
-            <a:off x="502920" y="1298448"/>
-            <a:ext cx="11183112" cy="548640"/>
+            <a:off x="502920" y="1280160"/>
+            <a:ext cx="11183112" cy="365760"/>
           </a:xfrm>
           <a:prstGeom prst="rect">
             <a:avLst/>
@@ -13917,7 +14288,7 @@
               <a:buNone/>
             </a:pPr>
             <a:r>
-              <a:rPr lang="en-US" sz="1600" dirty="0">
+              <a:rPr lang="en-US" sz="1800" dirty="0">
                 <a:solidFill>
                   <a:srgbClr val="6B7280"/>
                 </a:solidFill>
@@ -13925,9 +14296,9 @@
                 <a:ea typeface="Aptos" pitchFamily="34" charset="-122"/>
                 <a:cs typeface="Aptos" pitchFamily="34" charset="-120"/>
               </a:rPr>
-              <a:t>Rate each business idea against the research criteria on a scale of 1–10 to see which to start with first.</a:t>
-            </a:r>
-            <a:endParaRPr lang="en-US" sz="1600" dirty="0"/>
+              <a:t>Rate each idea against the research criteria on a scale of 1–10.</a:t>
+            </a:r>
+            <a:endParaRPr lang="en-US" sz="1800" dirty="0"/>
           </a:p>
         </p:txBody>
       </p:sp>
@@ -13939,12 +14310,12 @@
         </p:nvSpPr>
         <p:spPr>
           <a:xfrm>
-            <a:off x="502920" y="1965960"/>
-            <a:ext cx="3605784" cy="2148840"/>
+            <a:off x="502920" y="1828800"/>
+            <a:ext cx="3605784" cy="2926080"/>
           </a:xfrm>
           <a:prstGeom prst="roundRect">
             <a:avLst>
-              <a:gd name="adj" fmla="val 3830"/>
+              <a:gd name="adj" fmla="val 2813"/>
             </a:avLst>
           </a:prstGeom>
           <a:solidFill>
@@ -13987,8 +14358,8 @@
         </p:blipFill>
         <p:spPr>
           <a:xfrm>
-            <a:off x="667512" y="2130552"/>
-            <a:ext cx="329184" cy="329184"/>
+            <a:off x="667512" y="2011680"/>
+            <a:ext cx="347472" cy="347472"/>
           </a:xfrm>
           <a:prstGeom prst="rect">
             <a:avLst/>
@@ -14003,8 +14374,8 @@
         </p:nvSpPr>
         <p:spPr>
           <a:xfrm>
-            <a:off x="1088136" y="2075688"/>
-            <a:ext cx="2855976" cy="566928"/>
+            <a:off x="1106424" y="1938528"/>
+            <a:ext cx="2837688" cy="777240"/>
           </a:xfrm>
           <a:prstGeom prst="rect">
             <a:avLst/>
@@ -14023,7 +14394,7 @@
               <a:buNone/>
             </a:pPr>
             <a:r>
-              <a:rPr lang="en-US" sz="1450" b="1" dirty="0">
+              <a:rPr lang="en-US" sz="2000" b="1" dirty="0">
                 <a:solidFill>
                   <a:srgbClr val="002050"/>
                 </a:solidFill>
@@ -14033,7 +14404,7 @@
               </a:rPr>
               <a:t>Start a new business</a:t>
             </a:r>
-            <a:endParaRPr lang="en-US" sz="1450" dirty="0"/>
+            <a:endParaRPr lang="en-US" sz="2000" dirty="0"/>
           </a:p>
         </p:txBody>
       </p:sp>
@@ -14045,8 +14416,8 @@
         </p:nvSpPr>
         <p:spPr>
           <a:xfrm>
-            <a:off x="667512" y="2697480"/>
-            <a:ext cx="3276600" cy="1307592"/>
+            <a:off x="667512" y="2761488"/>
+            <a:ext cx="3276600" cy="1865376"/>
           </a:xfrm>
           <a:prstGeom prst="rect">
             <a:avLst/>
@@ -14065,7 +14436,7 @@
               <a:buNone/>
             </a:pPr>
             <a:r>
-              <a:rPr lang="en-US" sz="1250" dirty="0">
+              <a:rPr lang="en-US" sz="1800" dirty="0">
                 <a:solidFill>
                   <a:srgbClr val="6B7280"/>
                 </a:solidFill>
@@ -14073,9 +14444,9 @@
                 <a:ea typeface="Aptos" pitchFamily="34" charset="-122"/>
                 <a:cs typeface="Aptos" pitchFamily="34" charset="-120"/>
               </a:rPr>
-              <a:t>Your own idea from scratch. Rate it 1–10 against the research checklist — skills, market, competition, capital, location, risk.</a:t>
-            </a:r>
-            <a:endParaRPr lang="en-US" sz="1250" dirty="0"/>
+              <a:t>Your own idea from scratch — rate it against the checklist: skills, market, competition, capital, risk.</a:t>
+            </a:r>
+            <a:endParaRPr lang="en-US" sz="1800" dirty="0"/>
           </a:p>
         </p:txBody>
       </p:sp>
@@ -14087,12 +14458,12 @@
         </p:nvSpPr>
         <p:spPr>
           <a:xfrm>
-            <a:off x="4291584" y="1965960"/>
-            <a:ext cx="3605784" cy="2148840"/>
+            <a:off x="4291584" y="1828800"/>
+            <a:ext cx="3605784" cy="2926080"/>
           </a:xfrm>
           <a:prstGeom prst="roundRect">
             <a:avLst>
-              <a:gd name="adj" fmla="val 3830"/>
+              <a:gd name="adj" fmla="val 2813"/>
             </a:avLst>
           </a:prstGeom>
           <a:solidFill>
@@ -14135,8 +14506,8 @@
         </p:blipFill>
         <p:spPr>
           <a:xfrm>
-            <a:off x="4456176" y="2130552"/>
-            <a:ext cx="329184" cy="329184"/>
+            <a:off x="4456176" y="2011680"/>
+            <a:ext cx="347472" cy="347472"/>
           </a:xfrm>
           <a:prstGeom prst="rect">
             <a:avLst/>
@@ -14151,8 +14522,8 @@
         </p:nvSpPr>
         <p:spPr>
           <a:xfrm>
-            <a:off x="4876800" y="2075688"/>
-            <a:ext cx="2855976" cy="566928"/>
+            <a:off x="4895088" y="1938528"/>
+            <a:ext cx="2837688" cy="777240"/>
           </a:xfrm>
           <a:prstGeom prst="rect">
             <a:avLst/>
@@ -14171,7 +14542,7 @@
               <a:buNone/>
             </a:pPr>
             <a:r>
-              <a:rPr lang="en-US" sz="1450" b="1" dirty="0">
+              <a:rPr lang="en-US" sz="2000" b="1" dirty="0">
                 <a:solidFill>
                   <a:srgbClr val="002050"/>
                 </a:solidFill>
@@ -14179,9 +14550,9 @@
                 <a:ea typeface="Aptos Display" pitchFamily="34" charset="-122"/>
                 <a:cs typeface="Aptos Display" pitchFamily="34" charset="-120"/>
               </a:rPr>
-              <a:t>Buy an existing business</a:t>
-            </a:r>
-            <a:endParaRPr lang="en-US" sz="1450" dirty="0"/>
+              <a:t>Buy an existing one</a:t>
+            </a:r>
+            <a:endParaRPr lang="en-US" sz="2000" dirty="0"/>
           </a:p>
         </p:txBody>
       </p:sp>
@@ -14193,8 +14564,8 @@
         </p:nvSpPr>
         <p:spPr>
           <a:xfrm>
-            <a:off x="4456176" y="2697480"/>
-            <a:ext cx="3276600" cy="1307592"/>
+            <a:off x="4456176" y="2761488"/>
+            <a:ext cx="3276600" cy="1865376"/>
           </a:xfrm>
           <a:prstGeom prst="rect">
             <a:avLst/>
@@ -14213,7 +14584,7 @@
               <a:buNone/>
             </a:pPr>
             <a:r>
-              <a:rPr lang="en-US" sz="1250" dirty="0">
+              <a:rPr lang="en-US" sz="1800" dirty="0">
                 <a:solidFill>
                   <a:srgbClr val="6B7280"/>
                 </a:solidFill>
@@ -14221,9 +14592,9 @@
                 <a:ea typeface="Aptos" pitchFamily="34" charset="-122"/>
                 <a:cs typeface="Aptos" pitchFamily="34" charset="-120"/>
               </a:rPr>
-              <a:t>An ongoing concern — revenue from day one with a customer and supplier base, premises and equipment. But you pay for goodwill and there may be unseen flaws.</a:t>
-            </a:r>
-            <a:endParaRPr lang="en-US" sz="1250" dirty="0"/>
+              <a:t>Revenue from day one with customers and suppliers in place — but you pay for goodwill and there may be unseen flaws.</a:t>
+            </a:r>
+            <a:endParaRPr lang="en-US" sz="1800" dirty="0"/>
           </a:p>
         </p:txBody>
       </p:sp>
@@ -14235,12 +14606,12 @@
         </p:nvSpPr>
         <p:spPr>
           <a:xfrm>
-            <a:off x="8080248" y="1965960"/>
-            <a:ext cx="3605784" cy="2148840"/>
+            <a:off x="8080248" y="1828800"/>
+            <a:ext cx="3605784" cy="2926080"/>
           </a:xfrm>
           <a:prstGeom prst="roundRect">
             <a:avLst>
-              <a:gd name="adj" fmla="val 3830"/>
+              <a:gd name="adj" fmla="val 2813"/>
             </a:avLst>
           </a:prstGeom>
           <a:solidFill>
@@ -14283,8 +14654,8 @@
         </p:blipFill>
         <p:spPr>
           <a:xfrm>
-            <a:off x="8244840" y="2130552"/>
-            <a:ext cx="329184" cy="329184"/>
+            <a:off x="8244840" y="2011680"/>
+            <a:ext cx="347472" cy="347472"/>
           </a:xfrm>
           <a:prstGeom prst="rect">
             <a:avLst/>
@@ -14299,8 +14670,8 @@
         </p:nvSpPr>
         <p:spPr>
           <a:xfrm>
-            <a:off x="8665464" y="2075688"/>
-            <a:ext cx="2855976" cy="566928"/>
+            <a:off x="8683752" y="1938528"/>
+            <a:ext cx="2837688" cy="777240"/>
           </a:xfrm>
           <a:prstGeom prst="rect">
             <a:avLst/>
@@ -14319,7 +14690,7 @@
               <a:buNone/>
             </a:pPr>
             <a:r>
-              <a:rPr lang="en-US" sz="1450" b="1" dirty="0">
+              <a:rPr lang="en-US" sz="2000" b="1" dirty="0">
                 <a:solidFill>
                   <a:srgbClr val="002050"/>
                 </a:solidFill>
@@ -14329,7 +14700,7 @@
               </a:rPr>
               <a:t>Open a franchise</a:t>
             </a:r>
-            <a:endParaRPr lang="en-US" sz="1450" dirty="0"/>
+            <a:endParaRPr lang="en-US" sz="2000" dirty="0"/>
           </a:p>
         </p:txBody>
       </p:sp>
@@ -14341,8 +14712,8 @@
         </p:nvSpPr>
         <p:spPr>
           <a:xfrm>
-            <a:off x="8244840" y="2697480"/>
-            <a:ext cx="3276600" cy="1307592"/>
+            <a:off x="8244840" y="2761488"/>
+            <a:ext cx="3276600" cy="1865376"/>
           </a:xfrm>
           <a:prstGeom prst="rect">
             <a:avLst/>
@@ -14361,7 +14732,7 @@
               <a:buNone/>
             </a:pPr>
             <a:r>
-              <a:rPr lang="en-US" sz="1250" dirty="0">
+              <a:rPr lang="en-US" sz="1800" dirty="0">
                 <a:solidFill>
                   <a:srgbClr val="6B7280"/>
                 </a:solidFill>
@@ -14371,7 +14742,7 @@
               </a:rPr>
               <a:t>The in-between: a new business that is also a known brand. “A marriage between a big business and a small business.”</a:t>
             </a:r>
-            <a:endParaRPr lang="en-US" sz="1250" dirty="0"/>
+            <a:endParaRPr lang="en-US" sz="1800" dirty="0"/>
           </a:p>
         </p:txBody>
       </p:sp>
@@ -14383,8 +14754,8 @@
         </p:nvSpPr>
         <p:spPr>
           <a:xfrm>
-            <a:off x="502920" y="4434840"/>
-            <a:ext cx="11183112" cy="548640"/>
+            <a:off x="502920" y="5029200"/>
+            <a:ext cx="11183112" cy="685800"/>
           </a:xfrm>
           <a:prstGeom prst="rect">
             <a:avLst/>
@@ -14397,10 +14768,13 @@
           <a:lstStyle/>
           <a:p>
             <a:pPr indent="0" marL="0">
-              <a:buNone/>
-            </a:pPr>
-            <a:r>
-              <a:rPr lang="en-US" sz="1400" i="1" dirty="0">
+              <a:lnSpc>
+                <a:spcPct val="115000"/>
+              </a:lnSpc>
+              <a:buNone/>
+            </a:pPr>
+            <a:r>
+              <a:rPr lang="en-US" sz="1800" i="1" dirty="0">
                 <a:solidFill>
                   <a:srgbClr val="6B7280"/>
                 </a:solidFill>
@@ -14408,9 +14782,9 @@
                 <a:ea typeface="Aptos" pitchFamily="34" charset="-122"/>
                 <a:cs typeface="Aptos" pitchFamily="34" charset="-120"/>
               </a:rPr>
-              <a:t>According to the South African Franchise Association, franchising is about to explode in South Africa — one of the best opportunities for aspiring entrepreneurs.</a:t>
-            </a:r>
-            <a:endParaRPr lang="en-US" sz="1400" dirty="0"/>
+              <a:t>According to the South African Franchise Association, franchising is about to explode in South Africa.</a:t>
+            </a:r>
+            <a:endParaRPr lang="en-US" sz="1800" dirty="0"/>
           </a:p>
         </p:txBody>
       </p:sp>
@@ -14454,8 +14828,8 @@
         </p:nvSpPr>
         <p:spPr>
           <a:xfrm>
-            <a:off x="502920" y="6473952"/>
-            <a:ext cx="10268712" cy="274320"/>
+            <a:off x="502920" y="6400800"/>
+            <a:ext cx="10268712" cy="347472"/>
           </a:xfrm>
           <a:prstGeom prst="rect">
             <a:avLst/>
@@ -14471,7 +14845,7 @@
               <a:buNone/>
             </a:pPr>
             <a:r>
-              <a:rPr lang="en-US" sz="1000" dirty="0">
+              <a:rPr lang="en-US" sz="1800" dirty="0">
                 <a:solidFill>
                   <a:srgbClr val="6B7280"/>
                 </a:solidFill>
@@ -14479,9 +14853,9 @@
                 <a:ea typeface="Aptos" pitchFamily="34" charset="-122"/>
                 <a:cs typeface="Aptos" pitchFamily="34" charset="-120"/>
               </a:rPr>
-              <a:t>US 114050 — Explain the principles of business and the role of information technology · NQF 5 · 4 credits</a:t>
-            </a:r>
-            <a:endParaRPr lang="en-US" sz="1000" dirty="0"/>
+              <a:t>US 114050 · Principles of business &amp; the role of IT · NQF 5 · 4 credits</a:t>
+            </a:r>
+            <a:endParaRPr lang="en-US" sz="1800" dirty="0"/>
           </a:p>
         </p:txBody>
       </p:sp>
@@ -14493,8 +14867,8 @@
         </p:nvSpPr>
         <p:spPr>
           <a:xfrm>
-            <a:off x="11137392" y="6473952"/>
-            <a:ext cx="548640" cy="274320"/>
+            <a:off x="11045952" y="6400800"/>
+            <a:ext cx="640080" cy="347472"/>
           </a:xfrm>
           <a:prstGeom prst="rect">
             <a:avLst/>
@@ -14510,7 +14884,7 @@
               <a:buNone/>
             </a:pPr>
             <a:r>
-              <a:rPr lang="en-US" sz="1000" dirty="0">
+              <a:rPr lang="en-US" sz="1800" dirty="0">
                 <a:solidFill>
                   <a:srgbClr val="6B7280"/>
                 </a:solidFill>
@@ -14520,7 +14894,7 @@
               </a:rPr>
               <a:t>9</a:t>
             </a:r>
-            <a:endParaRPr lang="en-US" sz="1000" dirty="0"/>
+            <a:endParaRPr lang="en-US" sz="1800" dirty="0"/>
           </a:p>
         </p:txBody>
       </p:sp>
@@ -14552,8 +14926,8 @@
         </p:nvSpPr>
         <p:spPr>
           <a:xfrm>
-            <a:off x="502920" y="274320"/>
-            <a:ext cx="11183112" cy="310896"/>
+            <a:off x="502920" y="237744"/>
+            <a:ext cx="11183112" cy="347472"/>
           </a:xfrm>
           <a:prstGeom prst="rect">
             <a:avLst/>
@@ -14569,7 +14943,7 @@
               <a:buNone/>
             </a:pPr>
             <a:r>
-              <a:rPr lang="en-US" sz="1300" b="1" spc="200" kern="0" dirty="0">
+              <a:rPr lang="en-US" sz="1800" b="1" spc="200" kern="0" dirty="0">
                 <a:solidFill>
                   <a:srgbClr val="0F6CBD"/>
                 </a:solidFill>
@@ -14579,7 +14953,7 @@
               </a:rPr>
               <a:t>FRANCHISING</a:t>
             </a:r>
-            <a:endParaRPr lang="en-US" sz="1300" dirty="0"/>
+            <a:endParaRPr lang="en-US" sz="1800" dirty="0"/>
           </a:p>
         </p:txBody>
       </p:sp>
@@ -14591,8 +14965,8 @@
         </p:nvSpPr>
         <p:spPr>
           <a:xfrm>
-            <a:off x="502920" y="566928"/>
-            <a:ext cx="11183112" cy="731520"/>
+            <a:off x="502920" y="585216"/>
+            <a:ext cx="11183112" cy="603504"/>
           </a:xfrm>
           <a:prstGeom prst="rect">
             <a:avLst/>
@@ -14630,12 +15004,12 @@
         </p:nvSpPr>
         <p:spPr>
           <a:xfrm>
-            <a:off x="502920" y="1737360"/>
-            <a:ext cx="5500116" cy="1737360"/>
+            <a:off x="502920" y="1600200"/>
+            <a:ext cx="5500116" cy="2286000"/>
           </a:xfrm>
           <a:prstGeom prst="roundRect">
             <a:avLst>
-              <a:gd name="adj" fmla="val 4737"/>
+              <a:gd name="adj" fmla="val 3600"/>
             </a:avLst>
           </a:prstGeom>
           <a:solidFill>
@@ -14678,8 +15052,8 @@
         </p:blipFill>
         <p:spPr>
           <a:xfrm>
-            <a:off x="667512" y="1901952"/>
-            <a:ext cx="329184" cy="329184"/>
+            <a:off x="667512" y="1783080"/>
+            <a:ext cx="347472" cy="347472"/>
           </a:xfrm>
           <a:prstGeom prst="rect">
             <a:avLst/>
@@ -14694,8 +15068,8 @@
         </p:nvSpPr>
         <p:spPr>
           <a:xfrm>
-            <a:off x="1088136" y="1847088"/>
-            <a:ext cx="4750308" cy="566928"/>
+            <a:off x="1106424" y="1709928"/>
+            <a:ext cx="4732020" cy="777240"/>
           </a:xfrm>
           <a:prstGeom prst="rect">
             <a:avLst/>
@@ -14714,7 +15088,7 @@
               <a:buNone/>
             </a:pPr>
             <a:r>
-              <a:rPr lang="en-US" sz="1500" b="1" dirty="0">
+              <a:rPr lang="en-US" sz="2000" b="1" dirty="0">
                 <a:solidFill>
                   <a:srgbClr val="002050"/>
                 </a:solidFill>
@@ -14724,7 +15098,7 @@
               </a:rPr>
               <a:t>The franchisor</a:t>
             </a:r>
-            <a:endParaRPr lang="en-US" sz="1500" dirty="0"/>
+            <a:endParaRPr lang="en-US" sz="2000" dirty="0"/>
           </a:p>
         </p:txBody>
       </p:sp>
@@ -14736,8 +15110,8 @@
         </p:nvSpPr>
         <p:spPr>
           <a:xfrm>
-            <a:off x="667512" y="2468880"/>
-            <a:ext cx="5170932" cy="896112"/>
+            <a:off x="667512" y="2532888"/>
+            <a:ext cx="5170932" cy="1225296"/>
           </a:xfrm>
           <a:prstGeom prst="rect">
             <a:avLst/>
@@ -14756,7 +15130,7 @@
               <a:buNone/>
             </a:pPr>
             <a:r>
-              <a:rPr lang="en-US" sz="1300" dirty="0">
+              <a:rPr lang="en-US" sz="1800" dirty="0">
                 <a:solidFill>
                   <a:srgbClr val="6B7280"/>
                 </a:solidFill>
@@ -14766,7 +15140,7 @@
               </a:rPr>
               <a:t>A person or company with a highly marketable product or service. Achieves rapid expansion at relatively low cost.</a:t>
             </a:r>
-            <a:endParaRPr lang="en-US" sz="1300" dirty="0"/>
+            <a:endParaRPr lang="en-US" sz="1800" dirty="0"/>
           </a:p>
         </p:txBody>
       </p:sp>
@@ -14778,12 +15152,12 @@
         </p:nvSpPr>
         <p:spPr>
           <a:xfrm>
-            <a:off x="6185916" y="1737360"/>
-            <a:ext cx="5500116" cy="1737360"/>
+            <a:off x="6185916" y="1600200"/>
+            <a:ext cx="5500116" cy="2286000"/>
           </a:xfrm>
           <a:prstGeom prst="roundRect">
             <a:avLst>
-              <a:gd name="adj" fmla="val 4737"/>
+              <a:gd name="adj" fmla="val 3600"/>
             </a:avLst>
           </a:prstGeom>
           <a:solidFill>
@@ -14826,8 +15200,8 @@
         </p:blipFill>
         <p:spPr>
           <a:xfrm>
-            <a:off x="6350508" y="1901952"/>
-            <a:ext cx="329184" cy="329184"/>
+            <a:off x="6350508" y="1783080"/>
+            <a:ext cx="347472" cy="347472"/>
           </a:xfrm>
           <a:prstGeom prst="rect">
             <a:avLst/>
@@ -14842,8 +15216,8 @@
         </p:nvSpPr>
         <p:spPr>
           <a:xfrm>
-            <a:off x="6771132" y="1847088"/>
-            <a:ext cx="4750308" cy="566928"/>
+            <a:off x="6789420" y="1709928"/>
+            <a:ext cx="4732020" cy="777240"/>
           </a:xfrm>
           <a:prstGeom prst="rect">
             <a:avLst/>
@@ -14862,7 +15236,7 @@
               <a:buNone/>
             </a:pPr>
             <a:r>
-              <a:rPr lang="en-US" sz="1500" b="1" dirty="0">
+              <a:rPr lang="en-US" sz="2000" b="1" dirty="0">
                 <a:solidFill>
                   <a:srgbClr val="002050"/>
                 </a:solidFill>
@@ -14872,7 +15246,7 @@
               </a:rPr>
               <a:t>The franchisee</a:t>
             </a:r>
-            <a:endParaRPr lang="en-US" sz="1500" dirty="0"/>
+            <a:endParaRPr lang="en-US" sz="2000" dirty="0"/>
           </a:p>
         </p:txBody>
       </p:sp>
@@ -14884,8 +15258,8 @@
         </p:nvSpPr>
         <p:spPr>
           <a:xfrm>
-            <a:off x="6350508" y="2468880"/>
-            <a:ext cx="5170932" cy="896112"/>
+            <a:off x="6350508" y="2532888"/>
+            <a:ext cx="5170932" cy="1225296"/>
           </a:xfrm>
           <a:prstGeom prst="rect">
             <a:avLst/>
@@ -14904,7 +15278,7 @@
               <a:buNone/>
             </a:pPr>
             <a:r>
-              <a:rPr lang="en-US" sz="1300" dirty="0">
+              <a:rPr lang="en-US" sz="1800" dirty="0">
                 <a:solidFill>
                   <a:srgbClr val="6B7280"/>
                 </a:solidFill>
@@ -14912,9 +15286,9 @@
                 <a:ea typeface="Aptos" pitchFamily="34" charset="-122"/>
                 <a:cs typeface="Aptos" pitchFamily="34" charset="-120"/>
               </a:rPr>
-              <a:t>Licensed by the franchisor to perform the marketing function; provides most of the capital required. Gains big-business purchasing and advertising advantages.</a:t>
-            </a:r>
-            <a:endParaRPr lang="en-US" sz="1300" dirty="0"/>
+              <a:t>Licensed to perform the marketing function; provides most of the capital. Gains big-business purchasing and advertising advantages.</a:t>
+            </a:r>
+            <a:endParaRPr lang="en-US" sz="1800" dirty="0"/>
           </a:p>
         </p:txBody>
       </p:sp>
@@ -14926,8 +15300,8 @@
         </p:nvSpPr>
         <p:spPr>
           <a:xfrm>
-            <a:off x="502920" y="3794760"/>
-            <a:ext cx="11183112" cy="822960"/>
+            <a:off x="502920" y="4160520"/>
+            <a:ext cx="11183112" cy="1188720"/>
           </a:xfrm>
           <a:prstGeom prst="rect">
             <a:avLst/>
@@ -14946,7 +15320,7 @@
               <a:buNone/>
             </a:pPr>
             <a:r>
-              <a:rPr lang="en-US" sz="1500" dirty="0">
+              <a:rPr lang="en-US" sz="1800" dirty="0">
                 <a:solidFill>
                   <a:srgbClr val="6B7280"/>
                 </a:solidFill>
@@ -14954,9 +15328,9 @@
                 <a:ea typeface="Aptos" pitchFamily="34" charset="-122"/>
                 <a:cs typeface="Aptos" pitchFamily="34" charset="-120"/>
               </a:rPr>
-              <a:t>The relatively small size of the franchisee's business keeps small-business advantages — personal dedication and commitment — making franchising particularly suited to service-type businesses, at relatively low risk.</a:t>
-            </a:r>
-            <a:endParaRPr lang="en-US" sz="1500" dirty="0"/>
+              <a:t>The small size of the franchisee's business keeps small-business advantages — personal dedication and commitment — making franchising particularly suited to service businesses, at relatively low risk.</a:t>
+            </a:r>
+            <a:endParaRPr lang="en-US" sz="1800" dirty="0"/>
           </a:p>
         </p:txBody>
       </p:sp>

--- a/public/downloads/US-114050-Principles-of-Business.pptx
+++ b/public/downloads/US-114050-Principles-of-Business.pptx
@@ -3663,9 +3663,9 @@
             <a:prstDash val="solid"/>
           </a:ln>
           <a:effectLst>
-            <a:outerShdw sx="100000" sy="100000" kx="0" ky="0" algn="bl" rotWithShape="0" blurRad="2.524374906065939e+62" dist="7.212499731616968e+61" dir="4.2316648611840007e+73">
+            <a:outerShdw sx="100000" sy="100000" kx="0" ky="0" algn="bl" rotWithShape="0" blurRad="88900" dist="25400" dir="5400000">
               <a:srgbClr val="9AB4CC">
-                <a:alpha val="2.9999999999999995e+74"/>
+                <a:alpha val="30000"/>
               </a:srgbClr>
             </a:outerShdw>
           </a:effectLst>
@@ -3854,9 +3854,9 @@
             <a:prstDash val="solid"/>
           </a:ln>
           <a:effectLst>
-            <a:outerShdw sx="100000" sy="100000" kx="0" ky="0" algn="bl" rotWithShape="0" blurRad="3.2059561307037426e+66" dist="9.15987465915355e+65" dir="2.5389989167104004e+78">
+            <a:outerShdw sx="100000" sy="100000" kx="0" ky="0" algn="bl" rotWithShape="0" blurRad="88900" dist="25400" dir="5400000">
               <a:srgbClr val="9AB4CC">
-                <a:alpha val="3e+79"/>
+                <a:alpha val="30000"/>
               </a:srgbClr>
             </a:outerShdw>
           </a:effectLst>
@@ -4687,9 +4687,9 @@
             <a:prstDash val="solid"/>
           </a:ln>
           <a:effectLst>
-            <a:outerShdw sx="100000" sy="100000" kx="0" ky="0" algn="bl" rotWithShape="0" blurRad="4.071564285993753e+70" dist="1.1633040817125008e+70" dir="1.5233993500262402e+83">
+            <a:outerShdw sx="100000" sy="100000" kx="0" ky="0" algn="bl" rotWithShape="0" blurRad="88900" dist="25400" dir="5400000">
               <a:srgbClr val="9AB4CC">
-                <a:alpha val="2.9999999999999995e+84"/>
+                <a:alpha val="30000"/>
               </a:srgbClr>
             </a:outerShdw>
           </a:effectLst>
@@ -4835,9 +4835,9 @@
             <a:prstDash val="solid"/>
           </a:ln>
           <a:effectLst>
-            <a:outerShdw sx="100000" sy="100000" kx="0" ky="0" algn="bl" rotWithShape="0" blurRad="5.170886643212067e+74" dist="1.477396183774876e+74" dir="9.14039610015744e+87">
+            <a:outerShdw sx="100000" sy="100000" kx="0" ky="0" algn="bl" rotWithShape="0" blurRad="88900" dist="25400" dir="5400000">
               <a:srgbClr val="9AB4CC">
-                <a:alpha val="2.9999999999999996e+89"/>
+                <a:alpha val="30000"/>
               </a:srgbClr>
             </a:outerShdw>
           </a:effectLst>
@@ -4983,9 +4983,9 @@
             <a:prstDash val="solid"/>
           </a:ln>
           <a:effectLst>
-            <a:outerShdw sx="100000" sy="100000" kx="0" ky="0" algn="bl" rotWithShape="0" blurRad="6.567026036879325e+78" dist="1.8762931533940924e+78" dir="5.484237660094465e+92">
+            <a:outerShdw sx="100000" sy="100000" kx="0" ky="0" algn="bl" rotWithShape="0" blurRad="88900" dist="25400" dir="5400000">
               <a:srgbClr val="9AB4CC">
-                <a:alpha val="2.9999999999999997e+94"/>
+                <a:alpha val="30000"/>
               </a:srgbClr>
             </a:outerShdw>
           </a:effectLst>
@@ -5381,9 +5381,9 @@
             <a:prstDash val="solid"/>
           </a:ln>
           <a:effectLst>
-            <a:outerShdw sx="100000" sy="100000" kx="0" ky="0" algn="bl" rotWithShape="0" blurRad="8.340123066836742e+82" dist="2.3828923048104974e+82" dir="3.2905425960566786e+97">
+            <a:outerShdw sx="100000" sy="100000" kx="0" ky="0" algn="bl" rotWithShape="0" blurRad="88900" dist="25400" dir="5400000">
               <a:srgbClr val="9AB4CC">
-                <a:alpha val="2.9999999999999997e+99"/>
+                <a:alpha val="30000"/>
               </a:srgbClr>
             </a:outerShdw>
           </a:effectLst>
@@ -5529,9 +5529,9 @@
             <a:prstDash val="solid"/>
           </a:ln>
           <a:effectLst>
-            <a:outerShdw sx="100000" sy="100000" kx="0" ky="0" algn="bl" rotWithShape="0" blurRad="1.0591956294882662e+87" dist="3.0262732271093317e+86" dir="1.9743255576340073e+102">
+            <a:outerShdw sx="100000" sy="100000" kx="0" ky="0" algn="bl" rotWithShape="0" blurRad="88900" dist="25400" dir="5400000">
               <a:srgbClr val="9AB4CC">
-                <a:alpha val="3e+104"/>
+                <a:alpha val="30000"/>
               </a:srgbClr>
             </a:outerShdw>
           </a:effectLst>
@@ -5677,9 +5677,9 @@
             <a:prstDash val="solid"/>
           </a:ln>
           <a:effectLst>
-            <a:outerShdw sx="100000" sy="100000" kx="0" ky="0" algn="bl" rotWithShape="0" blurRad="1.3451784494500981e+91" dist="3.8433669984288512e+90" dir="1.1845953345804043e+107">
+            <a:outerShdw sx="100000" sy="100000" kx="0" ky="0" algn="bl" rotWithShape="0" blurRad="88900" dist="25400" dir="5400000">
               <a:srgbClr val="9AB4CC">
-                <a:alpha val="2.9999999999999997e+109"/>
+                <a:alpha val="30000"/>
               </a:srgbClr>
             </a:outerShdw>
           </a:effectLst>
@@ -5825,9 +5825,9 @@
             <a:prstDash val="solid"/>
           </a:ln>
           <a:effectLst>
-            <a:outerShdw sx="100000" sy="100000" kx="0" ky="0" algn="bl" rotWithShape="0" blurRad="1.7083766308016246e+95" dist="4.8810760880046414e+94" dir="7.107572007482426e+111">
+            <a:outerShdw sx="100000" sy="100000" kx="0" ky="0" algn="bl" rotWithShape="0" blurRad="88900" dist="25400" dir="5400000">
               <a:srgbClr val="9AB4CC">
-                <a:alpha val="2.9999999999999995e+114"/>
+                <a:alpha val="30000"/>
               </a:srgbClr>
             </a:outerShdw>
           </a:effectLst>
@@ -5973,9 +5973,9 @@
             <a:prstDash val="solid"/>
           </a:ln>
           <a:effectLst>
-            <a:outerShdw sx="100000" sy="100000" kx="0" ky="0" algn="bl" rotWithShape="0" blurRad="2.1696383211180632e+99" dist="6.198966631765894e+98" dir="4.2645432044894554e+116">
+            <a:outerShdw sx="100000" sy="100000" kx="0" ky="0" algn="bl" rotWithShape="0" blurRad="88900" dist="25400" dir="5400000">
               <a:srgbClr val="9AB4CC">
-                <a:alpha val="2.9999999999999997e+119"/>
+                <a:alpha val="30000"/>
               </a:srgbClr>
             </a:outerShdw>
           </a:effectLst>
@@ -6329,9 +6329,9 @@
             <a:prstDash val="solid"/>
           </a:ln>
           <a:effectLst>
-            <a:outerShdw sx="100000" sy="100000" kx="0" ky="0" algn="bl" rotWithShape="0" blurRad="2.7554406678199403e+103" dist="7.872687622342685e+102" dir="2.5587259226936733e+121">
+            <a:outerShdw sx="100000" sy="100000" kx="0" ky="0" algn="bl" rotWithShape="0" blurRad="88900" dist="25400" dir="5400000">
               <a:srgbClr val="9AB4CC">
-                <a:alpha val="2.9999999999999995e+124"/>
+                <a:alpha val="30000"/>
               </a:srgbClr>
             </a:outerShdw>
           </a:effectLst>
@@ -6477,9 +6477,9 @@
             <a:prstDash val="solid"/>
           </a:ln>
           <a:effectLst>
-            <a:outerShdw sx="100000" sy="100000" kx="0" ky="0" algn="bl" rotWithShape="0" blurRad="3.499409648131324e+107" dist="9.998313280375211e+106" dir="1.535235553616204e+126">
+            <a:outerShdw sx="100000" sy="100000" kx="0" ky="0" algn="bl" rotWithShape="0" blurRad="88900" dist="25400" dir="5400000">
               <a:srgbClr val="9AB4CC">
-                <a:alpha val="2.9999999999999997e+129"/>
+                <a:alpha val="30000"/>
               </a:srgbClr>
             </a:outerShdw>
           </a:effectLst>
@@ -6625,9 +6625,9 @@
             <a:prstDash val="solid"/>
           </a:ln>
           <a:effectLst>
-            <a:outerShdw sx="100000" sy="100000" kx="0" ky="0" algn="bl" rotWithShape="0" blurRad="4.4442502531267815e+111" dist="1.2697857866076517e+111" dir="9.211413321697224e+130">
+            <a:outerShdw sx="100000" sy="100000" kx="0" ky="0" algn="bl" rotWithShape="0" blurRad="88900" dist="25400" dir="5400000">
               <a:srgbClr val="9AB4CC">
-                <a:alpha val="2.9999999999999996e+134"/>
+                <a:alpha val="30000"/>
               </a:srgbClr>
             </a:outerShdw>
           </a:effectLst>
@@ -6773,9 +6773,9 @@
             <a:prstDash val="solid"/>
           </a:ln>
           <a:effectLst>
-            <a:outerShdw sx="100000" sy="100000" kx="0" ky="0" algn="bl" rotWithShape="0" blurRad="5.644197821471012e+115" dist="1.6126279489917177e+115" dir="5.526847993018334e+135">
+            <a:outerShdw sx="100000" sy="100000" kx="0" ky="0" algn="bl" rotWithShape="0" blurRad="88900" dist="25400" dir="5400000">
               <a:srgbClr val="9AB4CC">
-                <a:alpha val="2.9999999999999994e+139"/>
+                <a:alpha val="30000"/>
               </a:srgbClr>
             </a:outerShdw>
           </a:effectLst>
@@ -7129,9 +7129,9 @@
             <a:prstDash val="solid"/>
           </a:ln>
           <a:effectLst>
-            <a:outerShdw sx="100000" sy="100000" kx="0" ky="0" algn="bl" rotWithShape="0" blurRad="7.168131233268186e+119" dist="2.0480374952194813e+119" dir="3.3161087958110005e+140">
+            <a:outerShdw sx="100000" sy="100000" kx="0" ky="0" algn="bl" rotWithShape="0" blurRad="88900" dist="25400" dir="5400000">
               <a:srgbClr val="9AB4CC">
-                <a:alpha val="2.9999999999999996e+144"/>
+                <a:alpha val="30000"/>
               </a:srgbClr>
             </a:outerShdw>
           </a:effectLst>
@@ -7296,9 +7296,9 @@
             <a:prstDash val="solid"/>
           </a:ln>
           <a:effectLst>
-            <a:outerShdw sx="100000" sy="100000" kx="0" ky="0" algn="bl" rotWithShape="0" blurRad="9.103526666250596e+123" dist="2.6010076189287412e+123" dir="1.9896652774866004e+145">
+            <a:outerShdw sx="100000" sy="100000" kx="0" ky="0" algn="bl" rotWithShape="0" blurRad="88900" dist="25400" dir="5400000">
               <a:srgbClr val="9AB4CC">
-                <a:alpha val="2.9999999999999996e+149"/>
+                <a:alpha val="30000"/>
               </a:srgbClr>
             </a:outerShdw>
           </a:effectLst>
@@ -7671,9 +7671,9 @@
             <a:prstDash val="solid"/>
           </a:ln>
           <a:effectLst>
-            <a:outerShdw sx="100000" sy="100000" kx="0" ky="0" algn="bl" rotWithShape="0" blurRad="1.1561478866138256e+128" dist="3.303279676039501e+127" dir="1.1937991664919603e+150">
+            <a:outerShdw sx="100000" sy="100000" kx="0" ky="0" algn="bl" rotWithShape="0" blurRad="88900" dist="25400" dir="5400000">
               <a:srgbClr val="9AB4CC">
-                <a:alpha val="2.9999999999999997e+154"/>
+                <a:alpha val="30000"/>
               </a:srgbClr>
             </a:outerShdw>
           </a:effectLst>
@@ -7819,9 +7819,9 @@
             <a:prstDash val="solid"/>
           </a:ln>
           <a:effectLst>
-            <a:outerShdw sx="100000" sy="100000" kx="0" ky="0" algn="bl" rotWithShape="0" blurRad="1.4683078159995586e+132" dist="4.195165188570166e+131" dir="7.162794998951762e+154">
+            <a:outerShdw sx="100000" sy="100000" kx="0" ky="0" algn="bl" rotWithShape="0" blurRad="88900" dist="25400" dir="5400000">
               <a:srgbClr val="9AB4CC">
-                <a:alpha val="2.9999999999999998e+159"/>
+                <a:alpha val="30000"/>
               </a:srgbClr>
             </a:outerShdw>
           </a:effectLst>
@@ -7967,9 +7967,9 @@
             <a:prstDash val="solid"/>
           </a:ln>
           <a:effectLst>
-            <a:outerShdw sx="100000" sy="100000" kx="0" ky="0" algn="bl" rotWithShape="0" blurRad="1.8647509263194394e+136" dist="5.327859789484111e+135" dir="4.297676999371057e+159">
+            <a:outerShdw sx="100000" sy="100000" kx="0" ky="0" algn="bl" rotWithShape="0" blurRad="88900" dist="25400" dir="5400000">
               <a:srgbClr val="9AB4CC">
-                <a:alpha val="3e+164"/>
+                <a:alpha val="30000"/>
               </a:srgbClr>
             </a:outerShdw>
           </a:effectLst>
@@ -8115,9 +8115,9 @@
             <a:prstDash val="solid"/>
           </a:ln>
           <a:effectLst>
-            <a:outerShdw sx="100000" sy="100000" kx="0" ky="0" algn="bl" rotWithShape="0" blurRad="2.368233676425688e+140" dist="6.766381932644821e+139" dir="2.5786061996226343e+164">
+            <a:outerShdw sx="100000" sy="100000" kx="0" ky="0" algn="bl" rotWithShape="0" blurRad="88900" dist="25400" dir="5400000">
               <a:srgbClr val="9AB4CC">
-                <a:alpha val="3e+169"/>
+                <a:alpha val="30000"/>
               </a:srgbClr>
             </a:outerShdw>
           </a:effectLst>
@@ -8263,9 +8263,9 @@
             <a:prstDash val="solid"/>
           </a:ln>
           <a:effectLst>
-            <a:outerShdw sx="100000" sy="100000" kx="0" ky="0" algn="bl" rotWithShape="0" blurRad="3.0076567690606238e+144" dist="8.593305054458923e+143" dir="1.5471637197735807e+169">
+            <a:outerShdw sx="100000" sy="100000" kx="0" ky="0" algn="bl" rotWithShape="0" blurRad="88900" dist="25400" dir="5400000">
               <a:srgbClr val="9AB4CC">
-                <a:alpha val="3e+174"/>
+                <a:alpha val="30000"/>
               </a:srgbClr>
             </a:outerShdw>
           </a:effectLst>
@@ -8619,9 +8619,9 @@
             <a:prstDash val="solid"/>
           </a:ln>
           <a:effectLst>
-            <a:outerShdw sx="100000" sy="100000" kx="0" ky="0" algn="bl" rotWithShape="0" blurRad="3.819724096706992e+148" dist="1.0913497419162833e+148" dir="9.282982318641485e+173">
+            <a:outerShdw sx="100000" sy="100000" kx="0" ky="0" algn="bl" rotWithShape="0" blurRad="88900" dist="25400" dir="5400000">
               <a:srgbClr val="9AB4CC">
-                <a:alpha val="3e+179"/>
+                <a:alpha val="30000"/>
               </a:srgbClr>
             </a:outerShdw>
           </a:effectLst>
@@ -8767,9 +8767,9 @@
             <a:prstDash val="solid"/>
           </a:ln>
           <a:effectLst>
-            <a:outerShdw sx="100000" sy="100000" kx="0" ky="0" algn="bl" rotWithShape="0" blurRad="4.85104960281788e+152" dist="1.38601417223368e+152" dir="5.569789391184891e+178">
+            <a:outerShdw sx="100000" sy="100000" kx="0" ky="0" algn="bl" rotWithShape="0" blurRad="88900" dist="25400" dir="5400000">
               <a:srgbClr val="9AB4CC">
-                <a:alpha val="3e+184"/>
+                <a:alpha val="30000"/>
               </a:srgbClr>
             </a:outerShdw>
           </a:effectLst>
@@ -8915,9 +8915,9 @@
             <a:prstDash val="solid"/>
           </a:ln>
           <a:effectLst>
-            <a:outerShdw sx="100000" sy="100000" kx="0" ky="0" algn="bl" rotWithShape="0" blurRad="6.160832995578707e+156" dist="1.7602379987367734e+156" dir="3.3418736347109347e+183">
+            <a:outerShdw sx="100000" sy="100000" kx="0" ky="0" algn="bl" rotWithShape="0" blurRad="88900" dist="25400" dir="5400000">
               <a:srgbClr val="9AB4CC">
-                <a:alpha val="3e+189"/>
+                <a:alpha val="30000"/>
               </a:srgbClr>
             </a:outerShdw>
           </a:effectLst>
@@ -9063,9 +9063,9 @@
             <a:prstDash val="solid"/>
           </a:ln>
           <a:effectLst>
-            <a:outerShdw sx="100000" sy="100000" kx="0" ky="0" algn="bl" rotWithShape="0" blurRad="7.824257904384958e+160" dist="2.235502258395702e+160" dir="2.0051241808265608e+188">
+            <a:outerShdw sx="100000" sy="100000" kx="0" ky="0" algn="bl" rotWithShape="0" blurRad="88900" dist="25400" dir="5400000">
               <a:srgbClr val="9AB4CC">
-                <a:alpha val="2.9999999999999997e+194"/>
+                <a:alpha val="30000"/>
               </a:srgbClr>
             </a:outerShdw>
           </a:effectLst>
@@ -9909,9 +9909,9 @@
             <a:prstDash val="solid"/>
           </a:ln>
           <a:effectLst>
-            <a:outerShdw sx="100000" sy="100000" kx="0" ky="0" algn="bl" rotWithShape="0" blurRad="1129030000" dist="322580000" dir="324000000000">
+            <a:outerShdw sx="100000" sy="100000" kx="0" ky="0" algn="bl" rotWithShape="0" blurRad="88900" dist="25400" dir="5400000">
               <a:srgbClr val="9AB4CC">
-                <a:alpha val="3000000000"/>
+                <a:alpha val="30000"/>
               </a:srgbClr>
             </a:outerShdw>
           </a:effectLst>
@@ -10057,9 +10057,9 @@
             <a:prstDash val="solid"/>
           </a:ln>
           <a:effectLst>
-            <a:outerShdw sx="100000" sy="100000" kx="0" ky="0" algn="bl" rotWithShape="0" blurRad="14338681000000" dist="4096766000000" dir="19440000000000000">
+            <a:outerShdw sx="100000" sy="100000" kx="0" ky="0" algn="bl" rotWithShape="0" blurRad="88900" dist="25400" dir="5400000">
               <a:srgbClr val="9AB4CC">
-                <a:alpha val="300000000000000"/>
+                <a:alpha val="30000"/>
               </a:srgbClr>
             </a:outerShdw>
           </a:effectLst>
@@ -10205,9 +10205,9 @@
             <a:prstDash val="solid"/>
           </a:ln>
           <a:effectLst>
-            <a:outerShdw sx="100000" sy="100000" kx="0" ky="0" algn="bl" rotWithShape="0" blurRad="182101248700000000" dist="52028928200000000" dir="1.1664e+21">
+            <a:outerShdw sx="100000" sy="100000" kx="0" ky="0" algn="bl" rotWithShape="0" blurRad="88900" dist="25400" dir="5400000">
               <a:srgbClr val="9AB4CC">
-                <a:alpha val="30000000000000000000"/>
+                <a:alpha val="30000"/>
               </a:srgbClr>
             </a:outerShdw>
           </a:effectLst>
@@ -10561,9 +10561,9 @@
             <a:prstDash val="solid"/>
           </a:ln>
           <a:effectLst>
-            <a:outerShdw sx="100000" sy="100000" kx="0" ky="0" algn="bl" rotWithShape="0" blurRad="2.31268585849e+21" dist="660767388140000000000" dir="6.9984e+25">
+            <a:outerShdw sx="100000" sy="100000" kx="0" ky="0" algn="bl" rotWithShape="0" blurRad="88900" dist="25400" dir="5400000">
               <a:srgbClr val="9AB4CC">
-                <a:alpha val="3e+24"/>
+                <a:alpha val="30000"/>
               </a:srgbClr>
             </a:outerShdw>
           </a:effectLst>
@@ -10709,9 +10709,9 @@
             <a:prstDash val="solid"/>
           </a:ln>
           <a:effectLst>
-            <a:outerShdw sx="100000" sy="100000" kx="0" ky="0" algn="bl" rotWithShape="0" blurRad="2.9371110402823e+25" dist="8.391745829378e+24" dir="4.19904e+30">
+            <a:outerShdw sx="100000" sy="100000" kx="0" ky="0" algn="bl" rotWithShape="0" blurRad="88900" dist="25400" dir="5400000">
               <a:srgbClr val="9AB4CC">
-                <a:alpha val="3e+29"/>
+                <a:alpha val="30000"/>
               </a:srgbClr>
             </a:outerShdw>
           </a:effectLst>
@@ -10857,9 +10857,9 @@
             <a:prstDash val="solid"/>
           </a:ln>
           <a:effectLst>
-            <a:outerShdw sx="100000" sy="100000" kx="0" ky="0" algn="bl" rotWithShape="0" blurRad="3.730131021158521e+29" dist="1.0657517203310059e+29" dir="2.519424e+35">
+            <a:outerShdw sx="100000" sy="100000" kx="0" ky="0" algn="bl" rotWithShape="0" blurRad="88900" dist="25400" dir="5400000">
               <a:srgbClr val="9AB4CC">
-                <a:alpha val="2.9999999999999997e+34"/>
+                <a:alpha val="30000"/>
               </a:srgbClr>
             </a:outerShdw>
           </a:effectLst>
@@ -11005,9 +11005,9 @@
             <a:prstDash val="solid"/>
           </a:ln>
           <a:effectLst>
-            <a:outerShdw sx="100000" sy="100000" kx="0" ky="0" algn="bl" rotWithShape="0" blurRad="4.737266396871321e+33" dist="1.3535046848203775e+33" dir="1.5116544e+40">
+            <a:outerShdw sx="100000" sy="100000" kx="0" ky="0" algn="bl" rotWithShape="0" blurRad="88900" dist="25400" dir="5400000">
               <a:srgbClr val="9AB4CC">
-                <a:alpha val="3e+39"/>
+                <a:alpha val="30000"/>
               </a:srgbClr>
             </a:outerShdw>
           </a:effectLst>
@@ -13963,9 +13963,9 @@
             <a:prstDash val="solid"/>
           </a:ln>
           <a:effectLst>
-            <a:outerShdw sx="100000" sy="100000" kx="0" ky="0" algn="bl" rotWithShape="0" blurRad="6.016328324026578e+37" dist="1.7189509497218795e+37" dir="9.069926400000001e+44">
+            <a:outerShdw sx="100000" sy="100000" kx="0" ky="0" algn="bl" rotWithShape="0" blurRad="88900" dist="25400" dir="5400000">
               <a:srgbClr val="9AB4CC">
-                <a:alpha val="3e+44"/>
+                <a:alpha val="30000"/>
               </a:srgbClr>
             </a:outerShdw>
           </a:effectLst>
@@ -14328,9 +14328,9 @@
             <a:prstDash val="solid"/>
           </a:ln>
           <a:effectLst>
-            <a:outerShdw sx="100000" sy="100000" kx="0" ky="0" algn="bl" rotWithShape="0" blurRad="7.640736971513755e+41" dist="2.183067706146787e+41" dir="5.44195584e+49">
+            <a:outerShdw sx="100000" sy="100000" kx="0" ky="0" algn="bl" rotWithShape="0" blurRad="88900" dist="25400" dir="5400000">
               <a:srgbClr val="9AB4CC">
-                <a:alpha val="2.9999999999999997e+49"/>
+                <a:alpha val="30000"/>
               </a:srgbClr>
             </a:outerShdw>
           </a:effectLst>
@@ -14476,9 +14476,9 @@
             <a:prstDash val="solid"/>
           </a:ln>
           <a:effectLst>
-            <a:outerShdw sx="100000" sy="100000" kx="0" ky="0" algn="bl" rotWithShape="0" blurRad="9.703735953822469e+45" dist="2.7724959868064195e+45" dir="3.2651735040000005e+54">
+            <a:outerShdw sx="100000" sy="100000" kx="0" ky="0" algn="bl" rotWithShape="0" blurRad="88900" dist="25400" dir="5400000">
               <a:srgbClr val="9AB4CC">
-                <a:alpha val="2.9999999999999996e+54"/>
+                <a:alpha val="30000"/>
               </a:srgbClr>
             </a:outerShdw>
           </a:effectLst>
@@ -14624,9 +14624,9 @@
             <a:prstDash val="solid"/>
           </a:ln>
           <a:effectLst>
-            <a:outerShdw sx="100000" sy="100000" kx="0" ky="0" algn="bl" rotWithShape="0" blurRad="1.2323744661354536e+50" dist="3.5210699032441527e+49" dir="1.9591041024000004e+59">
+            <a:outerShdw sx="100000" sy="100000" kx="0" ky="0" algn="bl" rotWithShape="0" blurRad="88900" dist="25400" dir="5400000">
               <a:srgbClr val="9AB4CC">
-                <a:alpha val="2.9999999999999996e+59"/>
+                <a:alpha val="30000"/>
               </a:srgbClr>
             </a:outerShdw>
           </a:effectLst>
@@ -15022,9 +15022,9 @@
             <a:prstDash val="solid"/>
           </a:ln>
           <a:effectLst>
-            <a:outerShdw sx="100000" sy="100000" kx="0" ky="0" algn="bl" rotWithShape="0" blurRad="1.5651155719920262e+54" dist="4.471758777120074e+53" dir="1.1754624614400003e+64">
+            <a:outerShdw sx="100000" sy="100000" kx="0" ky="0" algn="bl" rotWithShape="0" blurRad="88900" dist="25400" dir="5400000">
               <a:srgbClr val="9AB4CC">
-                <a:alpha val="2.9999999999999996e+64"/>
+                <a:alpha val="30000"/>
               </a:srgbClr>
             </a:outerShdw>
           </a:effectLst>
@@ -15170,9 +15170,9 @@
             <a:prstDash val="solid"/>
           </a:ln>
           <a:effectLst>
-            <a:outerShdw sx="100000" sy="100000" kx="0" ky="0" algn="bl" rotWithShape="0" blurRad="1.9876967764298733e+58" dist="5.679133646942494e+57" dir="7.052774768640002e+68">
+            <a:outerShdw sx="100000" sy="100000" kx="0" ky="0" algn="bl" rotWithShape="0" blurRad="88900" dist="25400" dir="5400000">
               <a:srgbClr val="9AB4CC">
-                <a:alpha val="2.9999999999999995e+69"/>
+                <a:alpha val="30000"/>
               </a:srgbClr>
             </a:outerShdw>
           </a:effectLst>
